--- a/Aircraft_Design_DT1_EXAELIA_Group13.pptx
+++ b/Aircraft_Design_DT1_EXAELIA_Group13.pptx
@@ -14,7 +14,6 @@
     <p:sldId id="262" r:id="rId13"/>
     <p:sldId id="263" r:id="rId14"/>
     <p:sldId id="264" r:id="rId15"/>
-    <p:sldId id="265" r:id="rId16"/>
   </p:sldIdLst>
   <p:sldSz cx="12191695" cy="6858000" type="screen4x3"/>
   <p:notesSz cx="6858000" cy="9144000"/>
@@ -3093,7 +3092,7 @@
     <p:bg>
       <p:bgPr>
         <a:solidFill>
-          <a:srgbClr val="0A0F1D"/>
+          <a:srgbClr val="0A0D14"/>
         </a:solidFill>
         <a:effectLst/>
       </p:bgPr>
@@ -3107,24 +3106,184 @@
       <p:grpSpPr/>
       <p:sp>
         <p:nvSpPr>
-          <p:cNvPr id="2" name="Rounded Rectangle 1"/>
+          <p:cNvPr id="2" name="TextBox 1"/>
+          <p:cNvSpPr txBox="1"/>
+          <p:nvPr/>
+        </p:nvSpPr>
+        <p:spPr>
+          <a:xfrm>
+            <a:off x="1097280" y="1645920"/>
+            <a:ext cx="10058400" cy="320040"/>
+          </a:xfrm>
+          <a:prstGeom prst="rect">
+            <a:avLst/>
+          </a:prstGeom>
+          <a:noFill/>
+        </p:spPr>
+        <p:txBody>
+          <a:bodyPr wrap="none">
+            <a:spAutoFit/>
+          </a:bodyPr>
+          <a:lstStyle/>
+          <a:p>
+            <a:pPr>
+              <a:defRPr sz="1100" b="1">
+                <a:solidFill>
+                  <a:srgbClr val="38BDF8"/>
+                </a:solidFill>
+                <a:latin typeface="Arial"/>
+              </a:defRPr>
+            </a:pPr>
+            <a:r>
+              <a:t>CHALMERS UNIVERSITY OF TECHNOLOGY  •  MMS236 AIRCRAFT DESIGN</a:t>
+            </a:r>
+          </a:p>
+        </p:txBody>
+      </p:sp>
+      <p:sp>
+        <p:nvSpPr>
+          <p:cNvPr id="3" name="TextBox 2"/>
+          <p:cNvSpPr txBox="1"/>
+          <p:nvPr/>
+        </p:nvSpPr>
+        <p:spPr>
+          <a:xfrm>
+            <a:off x="1097280" y="2011680"/>
+            <a:ext cx="10058400" cy="1005840"/>
+          </a:xfrm>
+          <a:prstGeom prst="rect">
+            <a:avLst/>
+          </a:prstGeom>
+          <a:noFill/>
+        </p:spPr>
+        <p:txBody>
+          <a:bodyPr wrap="none">
+            <a:spAutoFit/>
+          </a:bodyPr>
+          <a:lstStyle/>
+          <a:p>
+            <a:pPr>
+              <a:defRPr sz="4600" b="1">
+                <a:solidFill>
+                  <a:srgbClr val="F8FAFC"/>
+                </a:solidFill>
+                <a:latin typeface="Helvetica Neue"/>
+              </a:defRPr>
+            </a:pPr>
+            <a:r>
+              <a:t>Aircraft Design, DT1</a:t>
+            </a:r>
+          </a:p>
+        </p:txBody>
+      </p:sp>
+      <p:sp>
+        <p:nvSpPr>
+          <p:cNvPr id="4" name="TextBox 3"/>
+          <p:cNvSpPr txBox="1"/>
+          <p:nvPr/>
+        </p:nvSpPr>
+        <p:spPr>
+          <a:xfrm>
+            <a:off x="1097280" y="3108960"/>
+            <a:ext cx="10058400" cy="411480"/>
+          </a:xfrm>
+          <a:prstGeom prst="rect">
+            <a:avLst/>
+          </a:prstGeom>
+          <a:noFill/>
+        </p:spPr>
+        <p:txBody>
+          <a:bodyPr wrap="none">
+            <a:spAutoFit/>
+          </a:bodyPr>
+          <a:lstStyle/>
+          <a:p>
+            <a:pPr>
+              <a:defRPr sz="1800">
+                <a:solidFill>
+                  <a:srgbClr val="CBD5E1"/>
+                </a:solidFill>
+                <a:latin typeface="Helvetica Neue"/>
+              </a:defRPr>
+            </a:pPr>
+            <a:r>
+              <a:t>EXAELIA — 80m Liquid Hydrogen Blended Wing Body Transport</a:t>
+            </a:r>
+          </a:p>
+        </p:txBody>
+      </p:sp>
+      <p:sp>
+        <p:nvSpPr>
+          <p:cNvPr id="5" name="TextBox 4"/>
+          <p:cNvSpPr txBox="1"/>
+          <p:nvPr/>
+        </p:nvSpPr>
+        <p:spPr>
+          <a:xfrm>
+            <a:off x="1097280" y="4114800"/>
+            <a:ext cx="10058400" cy="914400"/>
+          </a:xfrm>
+          <a:prstGeom prst="rect">
+            <a:avLst/>
+          </a:prstGeom>
+          <a:noFill/>
+        </p:spPr>
+        <p:txBody>
+          <a:bodyPr wrap="none">
+            <a:spAutoFit/>
+          </a:bodyPr>
+          <a:lstStyle/>
+          <a:p>
+            <a:pPr>
+              <a:defRPr sz="1400" b="1">
+                <a:solidFill>
+                  <a:srgbClr val="F8FAFC"/>
+                </a:solidFill>
+                <a:latin typeface="Arial"/>
+              </a:defRPr>
+            </a:pPr>
+            <a:r>
+              <a:t>Johan Persson   •   Sai Srinivasa Manideep Jakka   •   Tobias Hilltorp   •   William Gustavsson</a:t>
+            </a:r>
+          </a:p>
+          <a:p>
+            <a:pPr>
+              <a:spcBef>
+                <a:spcPts val="400"/>
+              </a:spcBef>
+              <a:defRPr sz="1200">
+                <a:solidFill>
+                  <a:srgbClr val="94A3B8"/>
+                </a:solidFill>
+                <a:latin typeface="Arial"/>
+              </a:defRPr>
+            </a:pPr>
+            <a:r>
+              <a:t>Group 13</a:t>
+            </a:r>
+          </a:p>
+        </p:txBody>
+      </p:sp>
+      <p:sp>
+        <p:nvSpPr>
+          <p:cNvPr id="6" name="Rounded Rectangle 5"/>
           <p:cNvSpPr/>
           <p:nvPr/>
         </p:nvSpPr>
         <p:spPr>
           <a:xfrm>
-            <a:off x="731520" y="731520"/>
-            <a:ext cx="10728655" cy="5394960"/>
+            <a:off x="1097280" y="5303520"/>
+            <a:ext cx="9997135" cy="777240"/>
           </a:xfrm>
           <a:prstGeom prst="roundRect">
             <a:avLst/>
           </a:prstGeom>
           <a:solidFill>
-            <a:srgbClr val="111C35"/>
+            <a:srgbClr val="111622"/>
           </a:solidFill>
-          <a:ln w="15240">
+          <a:ln w="9525">
             <a:solidFill>
-              <a:srgbClr val="38BDF8"/>
+              <a:srgbClr val="1E293B"/>
             </a:solidFill>
           </a:ln>
         </p:spPr>
@@ -3152,14 +3311,14 @@
       </p:sp>
       <p:sp>
         <p:nvSpPr>
-          <p:cNvPr id="3" name="TextBox 2"/>
+          <p:cNvPr id="7" name="TextBox 6"/>
           <p:cNvSpPr txBox="1"/>
           <p:nvPr/>
         </p:nvSpPr>
         <p:spPr>
           <a:xfrm>
-            <a:off x="1097280" y="1051560"/>
-            <a:ext cx="9144000" cy="320040"/>
+            <a:off x="1280160" y="5440680"/>
+            <a:ext cx="9631375" cy="502920"/>
           </a:xfrm>
           <a:prstGeom prst="rect">
             <a:avLst/>
@@ -3172,8 +3331,8 @@
           </a:bodyPr>
           <a:lstStyle/>
           <a:p>
-            <a:pPr>
-              <a:defRPr sz="1100" b="1">
+            <a:pPr algn="ctr">
+              <a:defRPr sz="1300" b="1">
                 <a:solidFill>
                   <a:srgbClr val="38BDF8"/>
                 </a:solidFill>
@@ -3181,21 +3340,47 @@
               </a:defRPr>
             </a:pPr>
             <a:r>
-              <a:t>CHALMERS UNIVERSITY OF TECHNOLOGY  |  MMS236 AIRCRAFT DESIGN  |  DESIGN TASK 1</a:t>
-            </a:r>
-          </a:p>
-        </p:txBody>
-      </p:sp>
-      <p:sp>
-        <p:nvSpPr>
-          <p:cNvPr id="4" name="TextBox 3"/>
+              <a:t>430 Passengers   |   12,500 km Range   |   Mach 0.85 at FL350   |   80.0 m Span (ICAO Code F)</a:t>
+            </a:r>
+          </a:p>
+        </p:txBody>
+      </p:sp>
+    </p:spTree>
+  </p:cSld>
+  <p:clrMapOvr>
+    <a:masterClrMapping/>
+  </p:clrMapOvr>
+</p:sld>
+</file>
+
+<file path=ppt/slides/slide2.xml><?xml version="1.0" encoding="utf-8"?>
+<p:sld xmlns:a="http://schemas.openxmlformats.org/drawingml/2006/main" xmlns:p="http://schemas.openxmlformats.org/presentationml/2006/main" xmlns:r="http://schemas.openxmlformats.org/officeDocument/2006/relationships">
+  <p:cSld>
+    <p:bg>
+      <p:bgPr>
+        <a:solidFill>
+          <a:srgbClr val="0A0D14"/>
+        </a:solidFill>
+        <a:effectLst/>
+      </p:bgPr>
+    </p:bg>
+    <p:spTree>
+      <p:nvGrpSpPr>
+        <p:cNvPr id="1" name=""/>
+        <p:cNvGrpSpPr/>
+        <p:nvPr/>
+      </p:nvGrpSpPr>
+      <p:grpSpPr/>
+      <p:sp>
+        <p:nvSpPr>
+          <p:cNvPr id="2" name="TextBox 1"/>
           <p:cNvSpPr txBox="1"/>
           <p:nvPr/>
         </p:nvSpPr>
         <p:spPr>
           <a:xfrm>
-            <a:off x="1097280" y="1417320"/>
-            <a:ext cx="9601200" cy="1097280"/>
+            <a:off x="822960" y="502920"/>
+            <a:ext cx="10515600" cy="228600"/>
           </a:xfrm>
           <a:prstGeom prst="rect">
             <a:avLst/>
@@ -3203,48 +3388,35 @@
           <a:noFill/>
         </p:spPr>
         <p:txBody>
-          <a:bodyPr wrap="none">
+          <a:bodyPr wrap="square" lIns="0" rIns="0" tIns="0" bIns="0">
             <a:spAutoFit/>
           </a:bodyPr>
           <a:lstStyle/>
           <a:p>
             <a:pPr>
-              <a:defRPr sz="4600" b="1">
-                <a:solidFill>
-                  <a:srgbClr val="FFFFFF"/>
-                </a:solidFill>
-                <a:latin typeface="Helvetica Neue"/>
+              <a:defRPr sz="950" b="1">
+                <a:solidFill>
+                  <a:srgbClr val="38BDF8"/>
+                </a:solidFill>
+                <a:latin typeface="Arial"/>
               </a:defRPr>
             </a:pPr>
             <a:r>
-              <a:t>EXAELIA</a:t>
-            </a:r>
-          </a:p>
-          <a:p>
-            <a:pPr>
-              <a:defRPr sz="2000" b="1">
-                <a:solidFill>
-                  <a:srgbClr val="FACC15"/>
-                </a:solidFill>
-                <a:latin typeface="Helvetica Neue"/>
-              </a:defRPr>
-            </a:pPr>
-            <a:r>
-              <a:t>80m Long-Range Liquid Hydrogen Blended Wing Body Transport</a:t>
-            </a:r>
-          </a:p>
-        </p:txBody>
-      </p:sp>
-      <p:sp>
-        <p:nvSpPr>
-          <p:cNvPr id="5" name="TextBox 4"/>
+              <a:t>MMS236  •  GROUP 13  •  CONCEPT ORIGIN</a:t>
+            </a:r>
+          </a:p>
+        </p:txBody>
+      </p:sp>
+      <p:sp>
+        <p:nvSpPr>
+          <p:cNvPr id="3" name="TextBox 2"/>
           <p:cNvSpPr txBox="1"/>
           <p:nvPr/>
         </p:nvSpPr>
         <p:spPr>
           <a:xfrm>
-            <a:off x="1097280" y="2926080"/>
-            <a:ext cx="9601200" cy="731520"/>
+            <a:off x="822960" y="749808"/>
+            <a:ext cx="10515600" cy="457200"/>
           </a:xfrm>
           <a:prstGeom prst="rect">
             <a:avLst/>
@@ -3252,58 +3424,45 @@
           <a:noFill/>
         </p:spPr>
         <p:txBody>
-          <a:bodyPr wrap="none">
+          <a:bodyPr wrap="square" lIns="0" rIns="0" tIns="0" bIns="0">
             <a:spAutoFit/>
           </a:bodyPr>
           <a:lstStyle/>
           <a:p>
             <a:pPr>
-              <a:defRPr sz="1200" b="1">
-                <a:solidFill>
-                  <a:srgbClr val="94A3B8"/>
-                </a:solidFill>
-                <a:latin typeface="Arial"/>
+              <a:defRPr sz="2200" b="1">
+                <a:solidFill>
+                  <a:srgbClr val="F8FAFC"/>
+                </a:solidFill>
+                <a:latin typeface="Helvetica Neue"/>
               </a:defRPr>
             </a:pPr>
             <a:r>
-              <a:t>Group 13 Design Team:</a:t>
-            </a:r>
-          </a:p>
-          <a:p>
-            <a:pPr>
-              <a:defRPr sz="1400" b="1">
-                <a:solidFill>
-                  <a:srgbClr val="E2E8F0"/>
-                </a:solidFill>
-                <a:latin typeface="Arial"/>
-              </a:defRPr>
-            </a:pPr>
-            <a:r>
-              <a:t>Johan Persson  •  Sai Srinivasa Manideep Jakka  •  Tobias Hilltorp  •  William Gustavsson</a:t>
-            </a:r>
-          </a:p>
-        </p:txBody>
-      </p:sp>
-      <p:sp>
-        <p:nvSpPr>
-          <p:cNvPr id="6" name="Rounded Rectangle 5"/>
+              <a:t>First sketch</a:t>
+            </a:r>
+          </a:p>
+        </p:txBody>
+      </p:sp>
+      <p:sp>
+        <p:nvSpPr>
+          <p:cNvPr id="4" name="Rounded Rectangle 3"/>
           <p:cNvSpPr/>
           <p:nvPr/>
         </p:nvSpPr>
         <p:spPr>
           <a:xfrm>
-            <a:off x="1097280" y="3931920"/>
-            <a:ext cx="2377440" cy="1737360"/>
+            <a:off x="4114800" y="1371600"/>
+            <a:ext cx="3962095" cy="4754880"/>
           </a:xfrm>
           <a:prstGeom prst="roundRect">
             <a:avLst/>
           </a:prstGeom>
           <a:solidFill>
-            <a:srgbClr val="111C35"/>
+            <a:srgbClr val="111622"/>
           </a:solidFill>
-          <a:ln w="15240">
+          <a:ln w="9525">
             <a:solidFill>
-              <a:srgbClr val="1E3A8A"/>
+              <a:srgbClr val="1E293B"/>
             </a:solidFill>
           </a:ln>
         </p:spPr>
@@ -3329,16 +3488,40 @@
           </a:p>
         </p:txBody>
       </p:sp>
-      <p:sp>
-        <p:nvSpPr>
-          <p:cNvPr id="7" name="TextBox 6"/>
+      <p:pic>
+        <p:nvPicPr>
+          <p:cNvPr id="5" name="Picture 4" descr="image1.jpeg"/>
+          <p:cNvPicPr>
+            <a:picLocks noChangeAspect="1"/>
+          </p:cNvPicPr>
+          <p:nvPr/>
+        </p:nvPicPr>
+        <p:blipFill>
+          <a:blip r:embed="rId2"/>
+          <a:stretch>
+            <a:fillRect/>
+          </a:stretch>
+        </p:blipFill>
+        <p:spPr>
+          <a:xfrm>
+            <a:off x="4297680" y="1508760"/>
+            <a:ext cx="3596335" cy="5083696"/>
+          </a:xfrm>
+          <a:prstGeom prst="rect">
+            <a:avLst/>
+          </a:prstGeom>
+        </p:spPr>
+      </p:pic>
+      <p:sp>
+        <p:nvSpPr>
+          <p:cNvPr id="6" name="TextBox 5"/>
           <p:cNvSpPr txBox="1"/>
           <p:nvPr/>
         </p:nvSpPr>
         <p:spPr>
           <a:xfrm>
-            <a:off x="1234440" y="4041648"/>
-            <a:ext cx="2103120" cy="1517904"/>
+            <a:off x="822960" y="6263640"/>
+            <a:ext cx="10545775" cy="320040"/>
           </a:xfrm>
           <a:prstGeom prst="rect">
             <a:avLst/>
@@ -3346,6 +3529,68 @@
           <a:noFill/>
         </p:spPr>
         <p:txBody>
+          <a:bodyPr wrap="none">
+            <a:spAutoFit/>
+          </a:bodyPr>
+          <a:lstStyle/>
+          <a:p>
+            <a:pPr algn="ctr">
+              <a:defRPr sz="1100">
+                <a:solidFill>
+                  <a:srgbClr val="94A3B8"/>
+                </a:solidFill>
+                <a:latin typeface="Arial"/>
+              </a:defRPr>
+            </a:pPr>
+            <a:r>
+              <a:t>Initial hand-drawn configuration sketch  •  80 m wingspan blended wing body planform</a:t>
+            </a:r>
+          </a:p>
+        </p:txBody>
+      </p:sp>
+    </p:spTree>
+  </p:cSld>
+  <p:clrMapOvr>
+    <a:masterClrMapping/>
+  </p:clrMapOvr>
+</p:sld>
+</file>
+
+<file path=ppt/slides/slide3.xml><?xml version="1.0" encoding="utf-8"?>
+<p:sld xmlns:a="http://schemas.openxmlformats.org/drawingml/2006/main" xmlns:p="http://schemas.openxmlformats.org/presentationml/2006/main" xmlns:r="http://schemas.openxmlformats.org/officeDocument/2006/relationships">
+  <p:cSld>
+    <p:bg>
+      <p:bgPr>
+        <a:solidFill>
+          <a:srgbClr val="0A0D14"/>
+        </a:solidFill>
+        <a:effectLst/>
+      </p:bgPr>
+    </p:bg>
+    <p:spTree>
+      <p:nvGrpSpPr>
+        <p:cNvPr id="1" name=""/>
+        <p:cNvGrpSpPr/>
+        <p:nvPr/>
+      </p:nvGrpSpPr>
+      <p:grpSpPr/>
+      <p:sp>
+        <p:nvSpPr>
+          <p:cNvPr id="2" name="TextBox 1"/>
+          <p:cNvSpPr txBox="1"/>
+          <p:nvPr/>
+        </p:nvSpPr>
+        <p:spPr>
+          <a:xfrm>
+            <a:off x="822960" y="502920"/>
+            <a:ext cx="10515600" cy="228600"/>
+          </a:xfrm>
+          <a:prstGeom prst="rect">
+            <a:avLst/>
+          </a:prstGeom>
+          <a:noFill/>
+        </p:spPr>
+        <p:txBody>
           <a:bodyPr wrap="square" lIns="0" rIns="0" tIns="0" bIns="0">
             <a:spAutoFit/>
           </a:bodyPr>
@@ -3354,50 +3599,73 @@
             <a:pPr>
               <a:defRPr sz="950" b="1">
                 <a:solidFill>
-                  <a:srgbClr val="94A3B8"/>
+                  <a:srgbClr val="38BDF8"/>
                 </a:solidFill>
                 <a:latin typeface="Arial"/>
               </a:defRPr>
             </a:pPr>
             <a:r>
-              <a:t>PASSENGER CAPACITY</a:t>
-            </a:r>
-          </a:p>
+              <a:t>MMS236  •  GROUP 13  •  MISSION PROFILE</a:t>
+            </a:r>
+          </a:p>
+        </p:txBody>
+      </p:sp>
+      <p:sp>
+        <p:nvSpPr>
+          <p:cNvPr id="3" name="TextBox 2"/>
+          <p:cNvSpPr txBox="1"/>
+          <p:nvPr/>
+        </p:nvSpPr>
+        <p:spPr>
+          <a:xfrm>
+            <a:off x="822960" y="749808"/>
+            <a:ext cx="10515600" cy="457200"/>
+          </a:xfrm>
+          <a:prstGeom prst="rect">
+            <a:avLst/>
+          </a:prstGeom>
+          <a:noFill/>
+        </p:spPr>
+        <p:txBody>
+          <a:bodyPr wrap="square" lIns="0" rIns="0" tIns="0" bIns="0">
+            <a:spAutoFit/>
+          </a:bodyPr>
+          <a:lstStyle/>
           <a:p>
             <a:pPr>
-              <a:defRPr sz="2000" b="1">
-                <a:solidFill>
-                  <a:srgbClr val="38BDF8"/>
+              <a:defRPr sz="2200" b="1">
+                <a:solidFill>
+                  <a:srgbClr val="F8FAFC"/>
                 </a:solidFill>
                 <a:latin typeface="Helvetica Neue"/>
               </a:defRPr>
             </a:pPr>
             <a:r>
-              <a:t>430 Pax (2-Class)</a:t>
-            </a:r>
-          </a:p>
-        </p:txBody>
-      </p:sp>
-      <p:sp>
-        <p:nvSpPr>
-          <p:cNvPr id="8" name="Rounded Rectangle 7"/>
+              <a:t>Sizing mission</a:t>
+            </a:r>
+          </a:p>
+        </p:txBody>
+      </p:sp>
+      <p:sp>
+        <p:nvSpPr>
+          <p:cNvPr id="4" name="Rounded Rectangle 3"/>
           <p:cNvSpPr/>
           <p:nvPr/>
         </p:nvSpPr>
         <p:spPr>
           <a:xfrm>
-            <a:off x="3611880" y="3931920"/>
-            <a:ext cx="2377440" cy="1737360"/>
+            <a:off x="2560320" y="1371600"/>
+            <a:ext cx="7071055" cy="4663440"/>
           </a:xfrm>
           <a:prstGeom prst="roundRect">
             <a:avLst/>
           </a:prstGeom>
           <a:solidFill>
-            <a:srgbClr val="111C35"/>
+            <a:srgbClr val="111622"/>
           </a:solidFill>
-          <a:ln w="15240">
+          <a:ln w="9525">
             <a:solidFill>
-              <a:srgbClr val="1E3A8A"/>
+              <a:srgbClr val="1E293B"/>
             </a:solidFill>
           </a:ln>
         </p:spPr>
@@ -3423,16 +3691,40 @@
           </a:p>
         </p:txBody>
       </p:sp>
-      <p:sp>
-        <p:nvSpPr>
-          <p:cNvPr id="9" name="TextBox 8"/>
+      <p:pic>
+        <p:nvPicPr>
+          <p:cNvPr id="5" name="Picture 4" descr="image2.jpeg"/>
+          <p:cNvPicPr>
+            <a:picLocks noChangeAspect="1"/>
+          </p:cNvPicPr>
+          <p:nvPr/>
+        </p:nvPicPr>
+        <p:blipFill>
+          <a:blip r:embed="rId2"/>
+          <a:stretch>
+            <a:fillRect/>
+          </a:stretch>
+        </p:blipFill>
+        <p:spPr>
+          <a:xfrm>
+            <a:off x="2834640" y="1536192"/>
+            <a:ext cx="6522415" cy="5104499"/>
+          </a:xfrm>
+          <a:prstGeom prst="rect">
+            <a:avLst/>
+          </a:prstGeom>
+        </p:spPr>
+      </p:pic>
+      <p:sp>
+        <p:nvSpPr>
+          <p:cNvPr id="6" name="TextBox 5"/>
           <p:cNvSpPr txBox="1"/>
           <p:nvPr/>
         </p:nvSpPr>
         <p:spPr>
           <a:xfrm>
-            <a:off x="3749040" y="4041648"/>
-            <a:ext cx="2103120" cy="1517904"/>
+            <a:off x="822960" y="6263640"/>
+            <a:ext cx="10545775" cy="320040"/>
           </a:xfrm>
           <a:prstGeom prst="rect">
             <a:avLst/>
@@ -3440,6 +3732,68 @@
           <a:noFill/>
         </p:spPr>
         <p:txBody>
+          <a:bodyPr wrap="none">
+            <a:spAutoFit/>
+          </a:bodyPr>
+          <a:lstStyle/>
+          <a:p>
+            <a:pPr algn="ctr">
+              <a:defRPr sz="1100">
+                <a:solidFill>
+                  <a:srgbClr val="94A3B8"/>
+                </a:solidFill>
+                <a:latin typeface="Arial"/>
+              </a:defRPr>
+            </a:pPr>
+            <a:r>
+              <a:t>Design Range: 12,500 km at FL350 (M0.85)  •  200 nm Diversion  •  30 min Loiter + 3% Contingency</a:t>
+            </a:r>
+          </a:p>
+        </p:txBody>
+      </p:sp>
+    </p:spTree>
+  </p:cSld>
+  <p:clrMapOvr>
+    <a:masterClrMapping/>
+  </p:clrMapOvr>
+</p:sld>
+</file>
+
+<file path=ppt/slides/slide4.xml><?xml version="1.0" encoding="utf-8"?>
+<p:sld xmlns:a="http://schemas.openxmlformats.org/drawingml/2006/main" xmlns:p="http://schemas.openxmlformats.org/presentationml/2006/main" xmlns:r="http://schemas.openxmlformats.org/officeDocument/2006/relationships">
+  <p:cSld>
+    <p:bg>
+      <p:bgPr>
+        <a:solidFill>
+          <a:srgbClr val="0A0D14"/>
+        </a:solidFill>
+        <a:effectLst/>
+      </p:bgPr>
+    </p:bg>
+    <p:spTree>
+      <p:nvGrpSpPr>
+        <p:cNvPr id="1" name=""/>
+        <p:cNvGrpSpPr/>
+        <p:nvPr/>
+      </p:nvGrpSpPr>
+      <p:grpSpPr/>
+      <p:sp>
+        <p:nvSpPr>
+          <p:cNvPr id="2" name="TextBox 1"/>
+          <p:cNvSpPr txBox="1"/>
+          <p:nvPr/>
+        </p:nvSpPr>
+        <p:spPr>
+          <a:xfrm>
+            <a:off x="822960" y="502920"/>
+            <a:ext cx="10515600" cy="228600"/>
+          </a:xfrm>
+          <a:prstGeom prst="rect">
+            <a:avLst/>
+          </a:prstGeom>
+          <a:noFill/>
+        </p:spPr>
+        <p:txBody>
           <a:bodyPr wrap="square" lIns="0" rIns="0" tIns="0" bIns="0">
             <a:spAutoFit/>
           </a:bodyPr>
@@ -3448,50 +3802,73 @@
             <a:pPr>
               <a:defRPr sz="950" b="1">
                 <a:solidFill>
-                  <a:srgbClr val="94A3B8"/>
+                  <a:srgbClr val="38BDF8"/>
                 </a:solidFill>
                 <a:latin typeface="Arial"/>
               </a:defRPr>
             </a:pPr>
             <a:r>
-              <a:t>DESIGN RANGE</a:t>
-            </a:r>
-          </a:p>
+              <a:t>MMS236  •  GROUP 13  •  PROPULSION MODELING</a:t>
+            </a:r>
+          </a:p>
+        </p:txBody>
+      </p:sp>
+      <p:sp>
+        <p:nvSpPr>
+          <p:cNvPr id="3" name="TextBox 2"/>
+          <p:cNvSpPr txBox="1"/>
+          <p:nvPr/>
+        </p:nvSpPr>
+        <p:spPr>
+          <a:xfrm>
+            <a:off x="822960" y="749808"/>
+            <a:ext cx="10515600" cy="457200"/>
+          </a:xfrm>
+          <a:prstGeom prst="rect">
+            <a:avLst/>
+          </a:prstGeom>
+          <a:noFill/>
+        </p:spPr>
+        <p:txBody>
+          <a:bodyPr wrap="square" lIns="0" rIns="0" tIns="0" bIns="0">
+            <a:spAutoFit/>
+          </a:bodyPr>
+          <a:lstStyle/>
           <a:p>
             <a:pPr>
-              <a:defRPr sz="2000" b="1">
-                <a:solidFill>
-                  <a:srgbClr val="38BDF8"/>
+              <a:defRPr sz="2200" b="1">
+                <a:solidFill>
+                  <a:srgbClr val="F8FAFC"/>
                 </a:solidFill>
                 <a:latin typeface="Helvetica Neue"/>
               </a:defRPr>
             </a:pPr>
             <a:r>
-              <a:t>12,500 km (6,750 nm)</a:t>
-            </a:r>
-          </a:p>
-        </p:txBody>
-      </p:sp>
-      <p:sp>
-        <p:nvSpPr>
-          <p:cNvPr id="10" name="Rounded Rectangle 9"/>
+              <a:t>Engine performance</a:t>
+            </a:r>
+          </a:p>
+        </p:txBody>
+      </p:sp>
+      <p:sp>
+        <p:nvSpPr>
+          <p:cNvPr id="4" name="Rounded Rectangle 3"/>
           <p:cNvSpPr/>
           <p:nvPr/>
         </p:nvSpPr>
         <p:spPr>
           <a:xfrm>
-            <a:off x="6126480" y="3931920"/>
-            <a:ext cx="2377440" cy="1737360"/>
+            <a:off x="822960" y="1371600"/>
+            <a:ext cx="6035040" cy="4754880"/>
           </a:xfrm>
           <a:prstGeom prst="roundRect">
             <a:avLst/>
           </a:prstGeom>
           <a:solidFill>
-            <a:srgbClr val="111C35"/>
+            <a:srgbClr val="111622"/>
           </a:solidFill>
-          <a:ln w="15240">
+          <a:ln w="9525">
             <a:solidFill>
-              <a:srgbClr val="1E3A8A"/>
+              <a:srgbClr val="1E293B"/>
             </a:solidFill>
           </a:ln>
         </p:spPr>
@@ -3517,75 +3894,50 @@
           </a:p>
         </p:txBody>
       </p:sp>
-      <p:sp>
-        <p:nvSpPr>
-          <p:cNvPr id="11" name="TextBox 10"/>
-          <p:cNvSpPr txBox="1"/>
+      <p:pic>
+        <p:nvPicPr>
+          <p:cNvPr id="5" name="Picture 4" descr="image3.png"/>
+          <p:cNvPicPr>
+            <a:picLocks noChangeAspect="1"/>
+          </p:cNvPicPr>
           <p:nvPr/>
-        </p:nvSpPr>
-        <p:spPr>
-          <a:xfrm>
-            <a:off x="6263640" y="4041648"/>
-            <a:ext cx="2103120" cy="1517904"/>
+        </p:nvPicPr>
+        <p:blipFill>
+          <a:blip r:embed="rId2"/>
+          <a:stretch>
+            <a:fillRect/>
+          </a:stretch>
+        </p:blipFill>
+        <p:spPr>
+          <a:xfrm>
+            <a:off x="1051560" y="1691640"/>
+            <a:ext cx="5577840" cy="3718560"/>
           </a:xfrm>
           <a:prstGeom prst="rect">
             <a:avLst/>
           </a:prstGeom>
-          <a:noFill/>
-        </p:spPr>
-        <p:txBody>
-          <a:bodyPr wrap="square" lIns="0" rIns="0" tIns="0" bIns="0">
-            <a:spAutoFit/>
-          </a:bodyPr>
-          <a:lstStyle/>
-          <a:p>
-            <a:pPr>
-              <a:defRPr sz="950" b="1">
-                <a:solidFill>
-                  <a:srgbClr val="94A3B8"/>
-                </a:solidFill>
-                <a:latin typeface="Arial"/>
-              </a:defRPr>
-            </a:pPr>
-            <a:r>
-              <a:t>CRUISE SPEED</a:t>
-            </a:r>
-          </a:p>
-          <a:p>
-            <a:pPr>
-              <a:defRPr sz="2000" b="1">
-                <a:solidFill>
-                  <a:srgbClr val="38BDF8"/>
-                </a:solidFill>
-                <a:latin typeface="Helvetica Neue"/>
-              </a:defRPr>
-            </a:pPr>
-            <a:r>
-              <a:t>Mach 0.85 at FL350</a:t>
-            </a:r>
-          </a:p>
-        </p:txBody>
-      </p:sp>
-      <p:sp>
-        <p:nvSpPr>
-          <p:cNvPr id="12" name="Rounded Rectangle 11"/>
+        </p:spPr>
+      </p:pic>
+      <p:sp>
+        <p:nvSpPr>
+          <p:cNvPr id="6" name="Rounded Rectangle 5"/>
           <p:cNvSpPr/>
           <p:nvPr/>
         </p:nvSpPr>
         <p:spPr>
           <a:xfrm>
-            <a:off x="8641080" y="3931920"/>
-            <a:ext cx="2377440" cy="1737360"/>
+            <a:off x="7132320" y="1371600"/>
+            <a:ext cx="4236415" cy="2240280"/>
           </a:xfrm>
           <a:prstGeom prst="roundRect">
             <a:avLst/>
           </a:prstGeom>
           <a:solidFill>
-            <a:srgbClr val="111C35"/>
+            <a:srgbClr val="111622"/>
           </a:solidFill>
-          <a:ln w="15240">
+          <a:ln w="9525">
             <a:solidFill>
-              <a:srgbClr val="1E3A8A"/>
+              <a:srgbClr val="1E293B"/>
             </a:solidFill>
           </a:ln>
         </p:spPr>
@@ -3613,14 +3965,14 @@
       </p:sp>
       <p:sp>
         <p:nvSpPr>
-          <p:cNvPr id="13" name="TextBox 12"/>
+          <p:cNvPr id="7" name="TextBox 6"/>
           <p:cNvSpPr txBox="1"/>
           <p:nvPr/>
         </p:nvSpPr>
         <p:spPr>
           <a:xfrm>
-            <a:off x="8778240" y="4041648"/>
-            <a:ext cx="2103120" cy="1517904"/>
+            <a:off x="7406640" y="1600200"/>
+            <a:ext cx="3657600" cy="1737360"/>
           </a:xfrm>
           <a:prstGeom prst="rect">
             <a:avLst/>
@@ -3628,13 +3980,13 @@
           <a:noFill/>
         </p:spPr>
         <p:txBody>
-          <a:bodyPr wrap="square" lIns="0" rIns="0" tIns="0" bIns="0">
+          <a:bodyPr wrap="none">
             <a:spAutoFit/>
           </a:bodyPr>
           <a:lstStyle/>
           <a:p>
             <a:pPr>
-              <a:defRPr sz="950" b="1">
+              <a:defRPr sz="1100" b="1">
                 <a:solidFill>
                   <a:srgbClr val="94A3B8"/>
                 </a:solidFill>
@@ -3642,142 +3994,63 @@
               </a:defRPr>
             </a:pPr>
             <a:r>
-              <a:t>WINGSPAN</a:t>
+              <a:t>2050 SFC TREND (JET-A)</a:t>
             </a:r>
           </a:p>
           <a:p>
             <a:pPr>
-              <a:defRPr sz="2000" b="1">
-                <a:solidFill>
-                  <a:srgbClr val="38BDF8"/>
+              <a:spcBef>
+                <a:spcPts val="400"/>
+              </a:spcBef>
+              <a:defRPr sz="3200" b="1">
+                <a:solidFill>
+                  <a:srgbClr val="F8FAFC"/>
                 </a:solidFill>
                 <a:latin typeface="Helvetica Neue"/>
               </a:defRPr>
             </a:pPr>
             <a:r>
-              <a:t>80.0 m (ICAO Code F)</a:t>
-            </a:r>
-          </a:p>
-        </p:txBody>
-      </p:sp>
-    </p:spTree>
-  </p:cSld>
-  <p:clrMapOvr>
-    <a:masterClrMapping/>
-  </p:clrMapOvr>
-</p:sld>
-</file>
-
-<file path=ppt/slides/slide10.xml><?xml version="1.0" encoding="utf-8"?>
-<p:sld xmlns:a="http://schemas.openxmlformats.org/drawingml/2006/main" xmlns:p="http://schemas.openxmlformats.org/presentationml/2006/main" xmlns:r="http://schemas.openxmlformats.org/officeDocument/2006/relationships">
-  <p:cSld>
-    <p:bg>
-      <p:bgPr>
-        <a:solidFill>
-          <a:srgbClr val="0A0F1D"/>
-        </a:solidFill>
-        <a:effectLst/>
-      </p:bgPr>
-    </p:bg>
-    <p:spTree>
-      <p:nvGrpSpPr>
-        <p:cNvPr id="1" name=""/>
-        <p:cNvGrpSpPr/>
-        <p:nvPr/>
-      </p:nvGrpSpPr>
-      <p:grpSpPr/>
-      <p:sp>
-        <p:nvSpPr>
-          <p:cNvPr id="2" name="TextBox 1"/>
-          <p:cNvSpPr txBox="1"/>
-          <p:nvPr/>
-        </p:nvSpPr>
-        <p:spPr>
-          <a:xfrm>
-            <a:off x="731520" y="365760"/>
-            <a:ext cx="10698480" cy="274320"/>
-          </a:xfrm>
-          <a:prstGeom prst="rect">
-            <a:avLst/>
-          </a:prstGeom>
-          <a:noFill/>
-        </p:spPr>
-        <p:txBody>
-          <a:bodyPr wrap="square" lIns="0" rIns="0" tIns="0" bIns="0">
-            <a:spAutoFit/>
-          </a:bodyPr>
-          <a:lstStyle/>
+              <a:t>12.0 mg/Ns</a:t>
+            </a:r>
+          </a:p>
           <a:p>
             <a:pPr>
-              <a:defRPr sz="1000" b="1">
-                <a:solidFill>
-                  <a:srgbClr val="38BDF8"/>
+              <a:spcBef>
+                <a:spcPts val="400"/>
+              </a:spcBef>
+              <a:defRPr sz="1100">
+                <a:solidFill>
+                  <a:srgbClr val="CBD5E1"/>
                 </a:solidFill>
                 <a:latin typeface="Arial"/>
               </a:defRPr>
             </a:pPr>
             <a:r>
-              <a:t>MMS236 AIRCRAFT DESIGN | GROUP 13</a:t>
-            </a:r>
-          </a:p>
-        </p:txBody>
-      </p:sp>
-      <p:sp>
-        <p:nvSpPr>
-          <p:cNvPr id="3" name="TextBox 2"/>
-          <p:cNvSpPr txBox="1"/>
-          <p:nvPr/>
-        </p:nvSpPr>
-        <p:spPr>
-          <a:xfrm>
-            <a:off x="731520" y="621792"/>
-            <a:ext cx="10698480" cy="548640"/>
-          </a:xfrm>
-          <a:prstGeom prst="rect">
-            <a:avLst/>
-          </a:prstGeom>
-          <a:noFill/>
-        </p:spPr>
-        <p:txBody>
-          <a:bodyPr wrap="square" lIns="0" rIns="0" tIns="0" bIns="0">
-            <a:spAutoFit/>
-          </a:bodyPr>
-          <a:lstStyle/>
-          <a:p>
-            <a:pPr>
-              <a:defRPr sz="2400" b="1">
-                <a:solidFill>
-                  <a:srgbClr val="FFFFFF"/>
-                </a:solidFill>
-                <a:latin typeface="Helvetica Neue"/>
-              </a:defRPr>
-            </a:pPr>
-            <a:r>
-              <a:t>Academic &amp; Industry References</a:t>
-            </a:r>
-          </a:p>
-        </p:txBody>
-      </p:sp>
-      <p:sp>
-        <p:nvSpPr>
-          <p:cNvPr id="4" name="Rounded Rectangle 3"/>
+              <a:t>Baseline historical turbofan efficiency trend</a:t>
+            </a:r>
+          </a:p>
+        </p:txBody>
+      </p:sp>
+      <p:sp>
+        <p:nvSpPr>
+          <p:cNvPr id="8" name="Rounded Rectangle 7"/>
           <p:cNvSpPr/>
           <p:nvPr/>
         </p:nvSpPr>
         <p:spPr>
           <a:xfrm>
-            <a:off x="731520" y="1280160"/>
-            <a:ext cx="10728655" cy="1097280"/>
+            <a:off x="7132320" y="3886200"/>
+            <a:ext cx="4236415" cy="2240280"/>
           </a:xfrm>
           <a:prstGeom prst="roundRect">
             <a:avLst/>
           </a:prstGeom>
           <a:solidFill>
-            <a:srgbClr val="111C35"/>
+            <a:srgbClr val="111622"/>
           </a:solidFill>
-          <a:ln w="15240">
+          <a:ln w="9525">
             <a:solidFill>
-              <a:srgbClr val="1E3A8A"/>
+              <a:srgbClr val="1E293B"/>
             </a:solidFill>
           </a:ln>
         </p:spPr>
@@ -3805,14 +4078,14 @@
       </p:sp>
       <p:sp>
         <p:nvSpPr>
-          <p:cNvPr id="5" name="TextBox 4"/>
+          <p:cNvPr id="9" name="TextBox 8"/>
           <p:cNvSpPr txBox="1"/>
           <p:nvPr/>
         </p:nvSpPr>
         <p:spPr>
           <a:xfrm>
-            <a:off x="960120" y="1389888"/>
-            <a:ext cx="10241280" cy="868680"/>
+            <a:off x="7406640" y="4114800"/>
+            <a:ext cx="3657600" cy="1737360"/>
           </a:xfrm>
           <a:prstGeom prst="rect">
             <a:avLst/>
@@ -3820,71 +4093,175 @@
           <a:noFill/>
         </p:spPr>
         <p:txBody>
-          <a:bodyPr wrap="square">
+          <a:bodyPr wrap="none">
             <a:spAutoFit/>
           </a:bodyPr>
           <a:lstStyle/>
           <a:p>
             <a:pPr>
-              <a:defRPr sz="1200" b="1">
+              <a:defRPr sz="1100" b="1">
                 <a:solidFill>
                   <a:srgbClr val="38BDF8"/>
                 </a:solidFill>
+                <a:latin typeface="Arial"/>
+              </a:defRPr>
+            </a:pPr>
+            <a:r>
+              <a:t>LH2 EQUIVALENT SFC</a:t>
+            </a:r>
+          </a:p>
+          <a:p>
+            <a:pPr>
+              <a:spcBef>
+                <a:spcPts val="400"/>
+              </a:spcBef>
+              <a:defRPr sz="3600" b="1">
+                <a:solidFill>
+                  <a:srgbClr val="38BDF8"/>
+                </a:solidFill>
                 <a:latin typeface="Helvetica Neue"/>
               </a:defRPr>
             </a:pPr>
             <a:r>
-              <a:t>NASA Technical Reports Server (NTRS)</a:t>
+              <a:t>4.8 mg/Ns</a:t>
             </a:r>
           </a:p>
           <a:p>
             <a:pPr>
-              <a:defRPr sz="1050">
-                <a:solidFill>
-                  <a:srgbClr val="E2E8F0"/>
+              <a:spcBef>
+                <a:spcPts val="400"/>
+              </a:spcBef>
+              <a:defRPr sz="1100">
+                <a:solidFill>
+                  <a:srgbClr val="CBD5E1"/>
                 </a:solidFill>
                 <a:latin typeface="Arial"/>
               </a:defRPr>
             </a:pPr>
             <a:r>
-              <a:t>NASA/CR-2012-217578: Aerodynamic Design and Performance Analysis of Advanced Blended-Wing-Body Transports</a:t>
-            </a:r>
-          </a:p>
+              <a:t>2.8× higher energy density (120 MJ/kg vs 42.8 MJ/kg)</a:t>
+            </a:r>
+          </a:p>
+        </p:txBody>
+      </p:sp>
+    </p:spTree>
+  </p:cSld>
+  <p:clrMapOvr>
+    <a:masterClrMapping/>
+  </p:clrMapOvr>
+</p:sld>
+</file>
+
+<file path=ppt/slides/slide5.xml><?xml version="1.0" encoding="utf-8"?>
+<p:sld xmlns:a="http://schemas.openxmlformats.org/drawingml/2006/main" xmlns:p="http://schemas.openxmlformats.org/presentationml/2006/main" xmlns:r="http://schemas.openxmlformats.org/officeDocument/2006/relationships">
+  <p:cSld>
+    <p:bg>
+      <p:bgPr>
+        <a:solidFill>
+          <a:srgbClr val="0A0D14"/>
+        </a:solidFill>
+        <a:effectLst/>
+      </p:bgPr>
+    </p:bg>
+    <p:spTree>
+      <p:nvGrpSpPr>
+        <p:cNvPr id="1" name=""/>
+        <p:cNvGrpSpPr/>
+        <p:nvPr/>
+      </p:nvGrpSpPr>
+      <p:grpSpPr/>
+      <p:sp>
+        <p:nvSpPr>
+          <p:cNvPr id="2" name="TextBox 1"/>
+          <p:cNvSpPr txBox="1"/>
+          <p:nvPr/>
+        </p:nvSpPr>
+        <p:spPr>
+          <a:xfrm>
+            <a:off x="822960" y="502920"/>
+            <a:ext cx="10515600" cy="228600"/>
+          </a:xfrm>
+          <a:prstGeom prst="rect">
+            <a:avLst/>
+          </a:prstGeom>
+          <a:noFill/>
+        </p:spPr>
+        <p:txBody>
+          <a:bodyPr wrap="square" lIns="0" rIns="0" tIns="0" bIns="0">
+            <a:spAutoFit/>
+          </a:bodyPr>
+          <a:lstStyle/>
           <a:p>
             <a:pPr>
-              <a:defRPr sz="950">
-                <a:solidFill>
-                  <a:srgbClr val="94A3B8"/>
+              <a:defRPr sz="950" b="1">
+                <a:solidFill>
+                  <a:srgbClr val="38BDF8"/>
                 </a:solidFill>
                 <a:latin typeface="Arial"/>
               </a:defRPr>
             </a:pPr>
             <a:r>
-              <a:t>Source: https://ntrs.nasa.gov/api/citations/20120001452/downloads/20120001452.pdf</a:t>
-            </a:r>
-          </a:p>
-        </p:txBody>
-      </p:sp>
-      <p:sp>
-        <p:nvSpPr>
-          <p:cNvPr id="6" name="Rounded Rectangle 5"/>
+              <a:t>MMS236  •  GROUP 13  •  AERODYNAMIC EFFICIENCY</a:t>
+            </a:r>
+          </a:p>
+        </p:txBody>
+      </p:sp>
+      <p:sp>
+        <p:nvSpPr>
+          <p:cNvPr id="3" name="TextBox 2"/>
+          <p:cNvSpPr txBox="1"/>
+          <p:nvPr/>
+        </p:nvSpPr>
+        <p:spPr>
+          <a:xfrm>
+            <a:off x="822960" y="749808"/>
+            <a:ext cx="10515600" cy="457200"/>
+          </a:xfrm>
+          <a:prstGeom prst="rect">
+            <a:avLst/>
+          </a:prstGeom>
+          <a:noFill/>
+        </p:spPr>
+        <p:txBody>
+          <a:bodyPr wrap="square" lIns="0" rIns="0" tIns="0" bIns="0">
+            <a:spAutoFit/>
+          </a:bodyPr>
+          <a:lstStyle/>
+          <a:p>
+            <a:pPr>
+              <a:defRPr sz="2200" b="1">
+                <a:solidFill>
+                  <a:srgbClr val="F8FAFC"/>
+                </a:solidFill>
+                <a:latin typeface="Helvetica Neue"/>
+              </a:defRPr>
+            </a:pPr>
+            <a:r>
+              <a:t>Aerodynamics</a:t>
+            </a:r>
+          </a:p>
+        </p:txBody>
+      </p:sp>
+      <p:sp>
+        <p:nvSpPr>
+          <p:cNvPr id="4" name="Rounded Rectangle 3"/>
           <p:cNvSpPr/>
           <p:nvPr/>
         </p:nvSpPr>
         <p:spPr>
           <a:xfrm>
-            <a:off x="731520" y="2514600"/>
-            <a:ext cx="10728655" cy="1097280"/>
+            <a:off x="822960" y="1371600"/>
+            <a:ext cx="5150815" cy="2240280"/>
           </a:xfrm>
           <a:prstGeom prst="roundRect">
             <a:avLst/>
           </a:prstGeom>
           <a:solidFill>
-            <a:srgbClr val="111C35"/>
+            <a:srgbClr val="111622"/>
           </a:solidFill>
-          <a:ln w="15240">
+          <a:ln w="9525">
             <a:solidFill>
-              <a:srgbClr val="1E3A8A"/>
+              <a:srgbClr val="1E293B"/>
             </a:solidFill>
           </a:ln>
         </p:spPr>
@@ -3912,14 +4289,14 @@
       </p:sp>
       <p:sp>
         <p:nvSpPr>
-          <p:cNvPr id="7" name="TextBox 6"/>
+          <p:cNvPr id="5" name="TextBox 4"/>
           <p:cNvSpPr txBox="1"/>
           <p:nvPr/>
         </p:nvSpPr>
         <p:spPr>
           <a:xfrm>
-            <a:off x="960120" y="2624328"/>
-            <a:ext cx="10241280" cy="868680"/>
+            <a:off x="1188720" y="1691640"/>
+            <a:ext cx="4389120" cy="1600200"/>
           </a:xfrm>
           <a:prstGeom prst="rect">
             <a:avLst/>
@@ -3927,71 +4304,77 @@
           <a:noFill/>
         </p:spPr>
         <p:txBody>
-          <a:bodyPr wrap="square">
+          <a:bodyPr wrap="none">
             <a:spAutoFit/>
           </a:bodyPr>
           <a:lstStyle/>
           <a:p>
             <a:pPr>
-              <a:defRPr sz="1200" b="1">
-                <a:solidFill>
-                  <a:srgbClr val="38BDF8"/>
+              <a:defRPr sz="1100" b="1">
+                <a:solidFill>
+                  <a:srgbClr val="94A3B8"/>
+                </a:solidFill>
+                <a:latin typeface="Arial"/>
+              </a:defRPr>
+            </a:pPr>
+            <a:r>
+              <a:t>ASPECT RATIO</a:t>
+            </a:r>
+          </a:p>
+          <a:p>
+            <a:pPr>
+              <a:spcBef>
+                <a:spcPts val="200"/>
+              </a:spcBef>
+              <a:defRPr sz="4000" b="1">
+                <a:solidFill>
+                  <a:srgbClr val="F8FAFC"/>
                 </a:solidFill>
                 <a:latin typeface="Helvetica Neue"/>
               </a:defRPr>
             </a:pPr>
             <a:r>
-              <a:t>International Journal of Hydrogen Energy (ScienceDirect)</a:t>
+              <a:t>9.5</a:t>
             </a:r>
           </a:p>
           <a:p>
             <a:pPr>
-              <a:defRPr sz="1050">
-                <a:solidFill>
-                  <a:srgbClr val="E2E8F0"/>
+              <a:spcBef>
+                <a:spcPts val="400"/>
+              </a:spcBef>
+              <a:defRPr sz="1200">
+                <a:solidFill>
+                  <a:srgbClr val="CBD5E1"/>
                 </a:solidFill>
                 <a:latin typeface="Arial"/>
               </a:defRPr>
             </a:pPr>
             <a:r>
-              <a:t>Cryogenic Hydrogen Fuel Storage, Boil-off Management, and Sizing for Long-Range Civil Transports (2024)</a:t>
-            </a:r>
-          </a:p>
-          <a:p>
-            <a:pPr>
-              <a:defRPr sz="950">
-                <a:solidFill>
-                  <a:srgbClr val="94A3B8"/>
-                </a:solidFill>
-                <a:latin typeface="Arial"/>
-              </a:defRPr>
-            </a:pPr>
-            <a:r>
-              <a:t>Source: https://www.sciencedirect.com/science/article/pii/S036031992404535X#bib87</a:t>
-            </a:r>
-          </a:p>
-        </p:txBody>
-      </p:sp>
-      <p:sp>
-        <p:nvSpPr>
-          <p:cNvPr id="8" name="Rounded Rectangle 7"/>
+              <a:t>Transonic planform optimum</a:t>
+            </a:r>
+          </a:p>
+        </p:txBody>
+      </p:sp>
+      <p:sp>
+        <p:nvSpPr>
+          <p:cNvPr id="6" name="Rounded Rectangle 5"/>
           <p:cNvSpPr/>
           <p:nvPr/>
         </p:nvSpPr>
         <p:spPr>
           <a:xfrm>
-            <a:off x="731520" y="3749039"/>
-            <a:ext cx="10728655" cy="1097280"/>
+            <a:off x="6217920" y="1371600"/>
+            <a:ext cx="5150815" cy="2240280"/>
           </a:xfrm>
           <a:prstGeom prst="roundRect">
             <a:avLst/>
           </a:prstGeom>
           <a:solidFill>
-            <a:srgbClr val="111C35"/>
+            <a:srgbClr val="111622"/>
           </a:solidFill>
-          <a:ln w="15240">
+          <a:ln w="9525">
             <a:solidFill>
-              <a:srgbClr val="1E3A8A"/>
+              <a:srgbClr val="1E293B"/>
             </a:solidFill>
           </a:ln>
         </p:spPr>
@@ -4019,14 +4402,14 @@
       </p:sp>
       <p:sp>
         <p:nvSpPr>
-          <p:cNvPr id="9" name="TextBox 8"/>
+          <p:cNvPr id="7" name="TextBox 6"/>
           <p:cNvSpPr txBox="1"/>
           <p:nvPr/>
         </p:nvSpPr>
         <p:spPr>
           <a:xfrm>
-            <a:off x="960120" y="3858767"/>
-            <a:ext cx="10241280" cy="868680"/>
+            <a:off x="6583680" y="1691640"/>
+            <a:ext cx="4389120" cy="1600200"/>
           </a:xfrm>
           <a:prstGeom prst="rect">
             <a:avLst/>
@@ -4034,13 +4417,29 @@
           <a:noFill/>
         </p:spPr>
         <p:txBody>
-          <a:bodyPr wrap="square">
+          <a:bodyPr wrap="none">
             <a:spAutoFit/>
           </a:bodyPr>
           <a:lstStyle/>
           <a:p>
             <a:pPr>
-              <a:defRPr sz="1200" b="1">
+              <a:defRPr sz="1100" b="1">
+                <a:solidFill>
+                  <a:srgbClr val="94A3B8"/>
+                </a:solidFill>
+                <a:latin typeface="Arial"/>
+              </a:defRPr>
+            </a:pPr>
+            <a:r>
+              <a:t>WETTED RATIO (Swet / Sref)</a:t>
+            </a:r>
+          </a:p>
+          <a:p>
+            <a:pPr>
+              <a:spcBef>
+                <a:spcPts val="200"/>
+              </a:spcBef>
+              <a:defRPr sz="4000" b="1">
                 <a:solidFill>
                   <a:srgbClr val="38BDF8"/>
                 </a:solidFill>
@@ -4048,57 +4447,47 @@
               </a:defRPr>
             </a:pPr>
             <a:r>
-              <a:t>Aircraft Design: A Conceptual Approach (D.P. Raymer, 6th Ed.)</a:t>
+              <a:t>2.2</a:t>
             </a:r>
           </a:p>
           <a:p>
             <a:pPr>
-              <a:defRPr sz="1050">
-                <a:solidFill>
-                  <a:srgbClr val="E2E8F0"/>
+              <a:spcBef>
+                <a:spcPts val="400"/>
+              </a:spcBef>
+              <a:defRPr sz="1200">
+                <a:solidFill>
+                  <a:srgbClr val="CBD5E1"/>
                 </a:solidFill>
                 <a:latin typeface="Arial"/>
               </a:defRPr>
             </a:pPr>
             <a:r>
-              <a:t>Statistical empty weight estimation, Breguet jet range sizing algorithms, and CS-25 reserve fuel compliance.</a:t>
-            </a:r>
-          </a:p>
-          <a:p>
-            <a:pPr>
-              <a:defRPr sz="950">
-                <a:solidFill>
-                  <a:srgbClr val="94A3B8"/>
-                </a:solidFill>
-                <a:latin typeface="Arial"/>
-              </a:defRPr>
-            </a:pPr>
-            <a:r>
-              <a:t>Source: AIAA Education Series (2018)</a:t>
-            </a:r>
-          </a:p>
-        </p:txBody>
-      </p:sp>
-      <p:sp>
-        <p:nvSpPr>
-          <p:cNvPr id="10" name="Rounded Rectangle 9"/>
+              <a:t>High volumetric packaging efficiency</a:t>
+            </a:r>
+          </a:p>
+        </p:txBody>
+      </p:sp>
+      <p:sp>
+        <p:nvSpPr>
+          <p:cNvPr id="8" name="Rounded Rectangle 7"/>
           <p:cNvSpPr/>
           <p:nvPr/>
         </p:nvSpPr>
         <p:spPr>
           <a:xfrm>
-            <a:off x="731520" y="4983480"/>
-            <a:ext cx="10728655" cy="1097280"/>
+            <a:off x="822960" y="3840480"/>
+            <a:ext cx="5150815" cy="2240280"/>
           </a:xfrm>
           <a:prstGeom prst="roundRect">
             <a:avLst/>
           </a:prstGeom>
           <a:solidFill>
-            <a:srgbClr val="111C35"/>
+            <a:srgbClr val="111622"/>
           </a:solidFill>
-          <a:ln w="15240">
+          <a:ln w="9525">
             <a:solidFill>
-              <a:srgbClr val="1E3A8A"/>
+              <a:srgbClr val="1E293B"/>
             </a:solidFill>
           </a:ln>
         </p:spPr>
@@ -4126,14 +4515,14 @@
       </p:sp>
       <p:sp>
         <p:nvSpPr>
-          <p:cNvPr id="11" name="TextBox 10"/>
+          <p:cNvPr id="9" name="TextBox 8"/>
           <p:cNvSpPr txBox="1"/>
           <p:nvPr/>
         </p:nvSpPr>
         <p:spPr>
           <a:xfrm>
-            <a:off x="960120" y="5093208"/>
-            <a:ext cx="10241280" cy="868680"/>
+            <a:off x="1188720" y="4160520"/>
+            <a:ext cx="4389120" cy="1600200"/>
           </a:xfrm>
           <a:prstGeom prst="rect">
             <a:avLst/>
@@ -4141,169 +4530,77 @@
           <a:noFill/>
         </p:spPr>
         <p:txBody>
-          <a:bodyPr wrap="square">
+          <a:bodyPr wrap="none">
             <a:spAutoFit/>
           </a:bodyPr>
           <a:lstStyle/>
           <a:p>
             <a:pPr>
-              <a:defRPr sz="1200" b="1">
-                <a:solidFill>
-                  <a:srgbClr val="38BDF8"/>
+              <a:defRPr sz="1100" b="1">
+                <a:solidFill>
+                  <a:srgbClr val="94A3B8"/>
+                </a:solidFill>
+                <a:latin typeface="Arial"/>
+              </a:defRPr>
+            </a:pPr>
+            <a:r>
+              <a:t>MAX EFFICIENCY (L/D Max)</a:t>
+            </a:r>
+          </a:p>
+          <a:p>
+            <a:pPr>
+              <a:spcBef>
+                <a:spcPts val="200"/>
+              </a:spcBef>
+              <a:defRPr sz="4000" b="1">
+                <a:solidFill>
+                  <a:srgbClr val="F8FAFC"/>
                 </a:solidFill>
                 <a:latin typeface="Helvetica Neue"/>
               </a:defRPr>
             </a:pPr>
             <a:r>
-              <a:t>Chalmers University of Technology MMS236 Lecture Series</a:t>
+              <a:t>30.8</a:t>
             </a:r>
           </a:p>
           <a:p>
             <a:pPr>
-              <a:defRPr sz="1050">
-                <a:solidFill>
-                  <a:srgbClr val="E2E8F0"/>
+              <a:spcBef>
+                <a:spcPts val="400"/>
+              </a:spcBef>
+              <a:defRPr sz="1200">
+                <a:solidFill>
+                  <a:srgbClr val="CBD5E1"/>
                 </a:solidFill>
                 <a:latin typeface="Arial"/>
               </a:defRPr>
             </a:pPr>
             <a:r>
-              <a:t>Lecture 2 (Atmospheric Modeling &amp; Sizing Loops), Lecture 4 (Propulsion Trends &amp; Cryogenic Hydrogen Aviation).</a:t>
-            </a:r>
-          </a:p>
-          <a:p>
-            <a:pPr>
-              <a:defRPr sz="950">
-                <a:solidFill>
-                  <a:srgbClr val="94A3B8"/>
-                </a:solidFill>
-                <a:latin typeface="Arial"/>
-              </a:defRPr>
-            </a:pPr>
-            <a:r>
-              <a:t>Source: Department of Mechanics and Maritime Sciences (2026)</a:t>
-            </a:r>
-          </a:p>
-        </p:txBody>
-      </p:sp>
-    </p:spTree>
-  </p:cSld>
-  <p:clrMapOvr>
-    <a:masterClrMapping/>
-  </p:clrMapOvr>
-</p:sld>
-</file>
-
-<file path=ppt/slides/slide2.xml><?xml version="1.0" encoding="utf-8"?>
-<p:sld xmlns:a="http://schemas.openxmlformats.org/drawingml/2006/main" xmlns:p="http://schemas.openxmlformats.org/presentationml/2006/main" xmlns:r="http://schemas.openxmlformats.org/officeDocument/2006/relationships">
-  <p:cSld>
-    <p:bg>
-      <p:bgPr>
-        <a:solidFill>
-          <a:srgbClr val="0A0F1D"/>
-        </a:solidFill>
-        <a:effectLst/>
-      </p:bgPr>
-    </p:bg>
-    <p:spTree>
-      <p:nvGrpSpPr>
-        <p:cNvPr id="1" name=""/>
-        <p:cNvGrpSpPr/>
-        <p:nvPr/>
-      </p:nvGrpSpPr>
-      <p:grpSpPr/>
-      <p:sp>
-        <p:nvSpPr>
-          <p:cNvPr id="2" name="TextBox 1"/>
-          <p:cNvSpPr txBox="1"/>
-          <p:nvPr/>
-        </p:nvSpPr>
-        <p:spPr>
-          <a:xfrm>
-            <a:off x="731520" y="365760"/>
-            <a:ext cx="10698480" cy="274320"/>
-          </a:xfrm>
-          <a:prstGeom prst="rect">
-            <a:avLst/>
-          </a:prstGeom>
-          <a:noFill/>
-        </p:spPr>
-        <p:txBody>
-          <a:bodyPr wrap="square" lIns="0" rIns="0" tIns="0" bIns="0">
-            <a:spAutoFit/>
-          </a:bodyPr>
-          <a:lstStyle/>
-          <a:p>
-            <a:pPr>
-              <a:defRPr sz="1000" b="1">
-                <a:solidFill>
-                  <a:srgbClr val="38BDF8"/>
-                </a:solidFill>
-                <a:latin typeface="Arial"/>
-              </a:defRPr>
-            </a:pPr>
-            <a:r>
-              <a:t>MMS236 AIRCRAFT DESIGN | GROUP 13</a:t>
-            </a:r>
-          </a:p>
-        </p:txBody>
-      </p:sp>
-      <p:sp>
-        <p:nvSpPr>
-          <p:cNvPr id="3" name="TextBox 2"/>
-          <p:cNvSpPr txBox="1"/>
-          <p:nvPr/>
-        </p:nvSpPr>
-        <p:spPr>
-          <a:xfrm>
-            <a:off x="731520" y="621792"/>
-            <a:ext cx="10698480" cy="548640"/>
-          </a:xfrm>
-          <a:prstGeom prst="rect">
-            <a:avLst/>
-          </a:prstGeom>
-          <a:noFill/>
-        </p:spPr>
-        <p:txBody>
-          <a:bodyPr wrap="square" lIns="0" rIns="0" tIns="0" bIns="0">
-            <a:spAutoFit/>
-          </a:bodyPr>
-          <a:lstStyle/>
-          <a:p>
-            <a:pPr>
-              <a:defRPr sz="2400" b="1">
-                <a:solidFill>
-                  <a:srgbClr val="FFFFFF"/>
-                </a:solidFill>
-                <a:latin typeface="Helvetica Neue"/>
-              </a:defRPr>
-            </a:pPr>
-            <a:r>
-              <a:t>Concept Origin: From Initial Sketch to Blended Body Architecture</a:t>
-            </a:r>
-          </a:p>
-        </p:txBody>
-      </p:sp>
-      <p:sp>
-        <p:nvSpPr>
-          <p:cNvPr id="4" name="Rounded Rectangle 3"/>
+              <a:t>Maximum loiter &amp; hold efficiency</a:t>
+            </a:r>
+          </a:p>
+        </p:txBody>
+      </p:sp>
+      <p:sp>
+        <p:nvSpPr>
+          <p:cNvPr id="10" name="Rounded Rectangle 9"/>
           <p:cNvSpPr/>
           <p:nvPr/>
         </p:nvSpPr>
         <p:spPr>
           <a:xfrm>
-            <a:off x="731520" y="1280160"/>
-            <a:ext cx="4937760" cy="5029200"/>
+            <a:off x="6217920" y="3840480"/>
+            <a:ext cx="5150815" cy="2240280"/>
           </a:xfrm>
           <a:prstGeom prst="roundRect">
             <a:avLst/>
           </a:prstGeom>
           <a:solidFill>
-            <a:srgbClr val="111C35"/>
+            <a:srgbClr val="111622"/>
           </a:solidFill>
-          <a:ln w="15240">
+          <a:ln w="9525">
             <a:solidFill>
-              <a:srgbClr val="1E3A8A"/>
+              <a:srgbClr val="1E293B"/>
             </a:solidFill>
           </a:ln>
         </p:spPr>
@@ -4329,50 +4626,192 @@
           </a:p>
         </p:txBody>
       </p:sp>
-      <p:pic>
-        <p:nvPicPr>
-          <p:cNvPr id="5" name="Picture 4" descr="image1.jpeg"/>
-          <p:cNvPicPr>
-            <a:picLocks noChangeAspect="1"/>
-          </p:cNvPicPr>
+      <p:sp>
+        <p:nvSpPr>
+          <p:cNvPr id="11" name="TextBox 10"/>
+          <p:cNvSpPr txBox="1"/>
           <p:nvPr/>
-        </p:nvPicPr>
-        <p:blipFill>
-          <a:blip r:embed="rId2"/>
-          <a:stretch>
-            <a:fillRect/>
-          </a:stretch>
-        </p:blipFill>
-        <p:spPr>
-          <a:xfrm>
-            <a:off x="914400" y="1463040"/>
-            <a:ext cx="4572000" cy="6462873"/>
+        </p:nvSpPr>
+        <p:spPr>
+          <a:xfrm>
+            <a:off x="6583680" y="4160520"/>
+            <a:ext cx="4389120" cy="1600200"/>
           </a:xfrm>
           <a:prstGeom prst="rect">
             <a:avLst/>
           </a:prstGeom>
-        </p:spPr>
-      </p:pic>
-      <p:sp>
-        <p:nvSpPr>
-          <p:cNvPr id="6" name="Rounded Rectangle 5"/>
+          <a:noFill/>
+        </p:spPr>
+        <p:txBody>
+          <a:bodyPr wrap="none">
+            <a:spAutoFit/>
+          </a:bodyPr>
+          <a:lstStyle/>
+          <a:p>
+            <a:pPr>
+              <a:defRPr sz="1100" b="1">
+                <a:solidFill>
+                  <a:srgbClr val="94A3B8"/>
+                </a:solidFill>
+                <a:latin typeface="Arial"/>
+              </a:defRPr>
+            </a:pPr>
+            <a:r>
+              <a:t>CRUISE EFFICIENCY (L/D Cruise)</a:t>
+            </a:r>
+          </a:p>
+          <a:p>
+            <a:pPr>
+              <a:spcBef>
+                <a:spcPts val="200"/>
+              </a:spcBef>
+              <a:defRPr sz="4000" b="1">
+                <a:solidFill>
+                  <a:srgbClr val="38BDF8"/>
+                </a:solidFill>
+                <a:latin typeface="Helvetica Neue"/>
+              </a:defRPr>
+            </a:pPr>
+            <a:r>
+              <a:t>26.7</a:t>
+            </a:r>
+          </a:p>
+          <a:p>
+            <a:pPr>
+              <a:spcBef>
+                <a:spcPts val="400"/>
+              </a:spcBef>
+              <a:defRPr sz="1200">
+                <a:solidFill>
+                  <a:srgbClr val="CBD5E1"/>
+                </a:solidFill>
+                <a:latin typeface="Arial"/>
+              </a:defRPr>
+            </a:pPr>
+            <a:r>
+              <a:t>Optimal Mach 0.85 long-range condition</a:t>
+            </a:r>
+          </a:p>
+        </p:txBody>
+      </p:sp>
+    </p:spTree>
+  </p:cSld>
+  <p:clrMapOvr>
+    <a:masterClrMapping/>
+  </p:clrMapOvr>
+</p:sld>
+</file>
+
+<file path=ppt/slides/slide6.xml><?xml version="1.0" encoding="utf-8"?>
+<p:sld xmlns:a="http://schemas.openxmlformats.org/drawingml/2006/main" xmlns:p="http://schemas.openxmlformats.org/presentationml/2006/main" xmlns:r="http://schemas.openxmlformats.org/officeDocument/2006/relationships">
+  <p:cSld>
+    <p:bg>
+      <p:bgPr>
+        <a:solidFill>
+          <a:srgbClr val="0A0D14"/>
+        </a:solidFill>
+        <a:effectLst/>
+      </p:bgPr>
+    </p:bg>
+    <p:spTree>
+      <p:nvGrpSpPr>
+        <p:cNvPr id="1" name=""/>
+        <p:cNvGrpSpPr/>
+        <p:nvPr/>
+      </p:nvGrpSpPr>
+      <p:grpSpPr/>
+      <p:sp>
+        <p:nvSpPr>
+          <p:cNvPr id="2" name="TextBox 1"/>
+          <p:cNvSpPr txBox="1"/>
+          <p:nvPr/>
+        </p:nvSpPr>
+        <p:spPr>
+          <a:xfrm>
+            <a:off x="822960" y="502920"/>
+            <a:ext cx="10515600" cy="228600"/>
+          </a:xfrm>
+          <a:prstGeom prst="rect">
+            <a:avLst/>
+          </a:prstGeom>
+          <a:noFill/>
+        </p:spPr>
+        <p:txBody>
+          <a:bodyPr wrap="square" lIns="0" rIns="0" tIns="0" bIns="0">
+            <a:spAutoFit/>
+          </a:bodyPr>
+          <a:lstStyle/>
+          <a:p>
+            <a:pPr>
+              <a:defRPr sz="950" b="1">
+                <a:solidFill>
+                  <a:srgbClr val="38BDF8"/>
+                </a:solidFill>
+                <a:latin typeface="Arial"/>
+              </a:defRPr>
+            </a:pPr>
+            <a:r>
+              <a:t>MMS236  •  GROUP 13  •  MASS SIZING</a:t>
+            </a:r>
+          </a:p>
+        </p:txBody>
+      </p:sp>
+      <p:sp>
+        <p:nvSpPr>
+          <p:cNvPr id="3" name="TextBox 2"/>
+          <p:cNvSpPr txBox="1"/>
+          <p:nvPr/>
+        </p:nvSpPr>
+        <p:spPr>
+          <a:xfrm>
+            <a:off x="822960" y="749808"/>
+            <a:ext cx="10515600" cy="457200"/>
+          </a:xfrm>
+          <a:prstGeom prst="rect">
+            <a:avLst/>
+          </a:prstGeom>
+          <a:noFill/>
+        </p:spPr>
+        <p:txBody>
+          <a:bodyPr wrap="square" lIns="0" rIns="0" tIns="0" bIns="0">
+            <a:spAutoFit/>
+          </a:bodyPr>
+          <a:lstStyle/>
+          <a:p>
+            <a:pPr>
+              <a:defRPr sz="2200" b="1">
+                <a:solidFill>
+                  <a:srgbClr val="F8FAFC"/>
+                </a:solidFill>
+                <a:latin typeface="Helvetica Neue"/>
+              </a:defRPr>
+            </a:pPr>
+            <a:r>
+              <a:t>MTOW</a:t>
+            </a:r>
+          </a:p>
+        </p:txBody>
+      </p:sp>
+      <p:sp>
+        <p:nvSpPr>
+          <p:cNvPr id="4" name="Rounded Rectangle 3"/>
           <p:cNvSpPr/>
           <p:nvPr/>
         </p:nvSpPr>
         <p:spPr>
           <a:xfrm>
-            <a:off x="5852160" y="1280160"/>
-            <a:ext cx="5608015" cy="5029200"/>
+            <a:off x="822960" y="1463040"/>
+            <a:ext cx="3413455" cy="4663440"/>
           </a:xfrm>
           <a:prstGeom prst="roundRect">
             <a:avLst/>
           </a:prstGeom>
           <a:solidFill>
-            <a:srgbClr val="111C35"/>
+            <a:srgbClr val="111622"/>
           </a:solidFill>
-          <a:ln w="15240">
+          <a:ln w="9525">
             <a:solidFill>
-              <a:srgbClr val="1E3A8A"/>
+              <a:srgbClr val="1E293B"/>
             </a:solidFill>
           </a:ln>
         </p:spPr>
@@ -4400,14 +4839,14 @@
       </p:sp>
       <p:sp>
         <p:nvSpPr>
-          <p:cNvPr id="7" name="TextBox 6"/>
+          <p:cNvPr id="5" name="TextBox 4"/>
           <p:cNvSpPr txBox="1"/>
           <p:nvPr/>
         </p:nvSpPr>
         <p:spPr>
           <a:xfrm>
-            <a:off x="6080760" y="1508760"/>
-            <a:ext cx="5166360" cy="4572000"/>
+            <a:off x="1143000" y="1828800"/>
+            <a:ext cx="2743200" cy="3931920"/>
           </a:xfrm>
           <a:prstGeom prst="rect">
             <a:avLst/>
@@ -4415,37 +4854,21 @@
           <a:noFill/>
         </p:spPr>
         <p:txBody>
-          <a:bodyPr wrap="square">
+          <a:bodyPr wrap="none">
             <a:spAutoFit/>
           </a:bodyPr>
           <a:lstStyle/>
           <a:p>
             <a:pPr>
-              <a:spcBef>
-                <a:spcPts val="0"/>
-              </a:spcBef>
-              <a:defRPr sz="1250" b="1">
-                <a:solidFill>
-                  <a:srgbClr val="38BDF8"/>
-                </a:solidFill>
-                <a:latin typeface="Helvetica Neue"/>
+              <a:defRPr sz="1100" b="1">
+                <a:solidFill>
+                  <a:srgbClr val="94A3B8"/>
+                </a:solidFill>
+                <a:latin typeface="Arial"/>
               </a:defRPr>
             </a:pPr>
             <a:r>
-              <a:t>1. Pure 80m Wingspan (ICAO Code F Gate Box)</a:t>
-            </a:r>
-          </a:p>
-          <a:p>
-            <a:pPr>
-              <a:defRPr sz="1100">
-                <a:solidFill>
-                  <a:srgbClr val="E2E8F0"/>
-                </a:solidFill>
-                <a:latin typeface="Arial"/>
-              </a:defRPr>
-            </a:pPr>
-            <a:r>
-              <a:t>Full span compliant with existing international airport gates (A380/B777X class) without requiring folding wings.</a:t>
+              <a:t>MAXIMUM TAKE-OFF WEIGHT</a:t>
             </a:r>
           </a:p>
           <a:p>
@@ -4453,36 +4876,23 @@
               <a:spcBef>
                 <a:spcPts val="800"/>
               </a:spcBef>
-              <a:defRPr sz="1250" b="1">
-                <a:solidFill>
-                  <a:srgbClr val="38BDF8"/>
+              <a:defRPr sz="2800" b="1">
+                <a:solidFill>
+                  <a:srgbClr val="F8FAFC"/>
                 </a:solidFill>
                 <a:latin typeface="Helvetica Neue"/>
               </a:defRPr>
             </a:pPr>
             <a:r>
-              <a:t>2. Muscular Lifting Centerbody (t/c = 19.5%)</a:t>
-            </a:r>
-          </a:p>
-          <a:p>
-            <a:pPr>
-              <a:defRPr sz="1100">
-                <a:solidFill>
-                  <a:srgbClr val="E2E8F0"/>
-                </a:solidFill>
-                <a:latin typeface="Arial"/>
-              </a:defRPr>
-            </a:pPr>
-            <a:r>
-              <a:t>A 7.41 m maximum centerbody depth easily houses a stand-up widebody passenger cabin and multi-layer cryogenic tanks.</a:t>
+              <a:t>235,460 kg</a:t>
             </a:r>
           </a:p>
           <a:p>
             <a:pPr>
               <a:spcBef>
-                <a:spcPts val="800"/>
+                <a:spcPts val="400"/>
               </a:spcBef>
-              <a:defRPr sz="1250" b="1">
+              <a:defRPr sz="1500" b="1">
                 <a:solidFill>
                   <a:srgbClr val="38BDF8"/>
                 </a:solidFill>
@@ -4490,200 +4900,47 @@
               </a:defRPr>
             </a:pPr>
             <a:r>
-              <a:t>3. Unified Single-Deck Theater Cabin (430 Pax)</a:t>
-            </a:r>
-          </a:p>
-          <a:p>
-            <a:pPr>
-              <a:defRPr sz="1100">
-                <a:solidFill>
-                  <a:srgbClr val="E2E8F0"/>
-                </a:solidFill>
-                <a:latin typeface="Arial"/>
-              </a:defRPr>
-            </a:pPr>
-            <a:r>
-              <a:t>Continuous 14.0 m wide central passenger deck with uninterrupted longitudinal aisles, eliminating claustrophobic isolated rows.</a:t>
+              <a:t>~235.5 tonnes</a:t>
             </a:r>
           </a:p>
           <a:p>
             <a:pPr>
               <a:spcBef>
-                <a:spcPts val="800"/>
+                <a:spcPts val="2800"/>
               </a:spcBef>
-              <a:defRPr sz="1250" b="1">
-                <a:solidFill>
-                  <a:srgbClr val="38BDF8"/>
-                </a:solidFill>
-                <a:latin typeface="Helvetica Neue"/>
+              <a:defRPr sz="1200">
+                <a:solidFill>
+                  <a:srgbClr val="64748B"/>
+                </a:solidFill>
+                <a:latin typeface="Arial"/>
               </a:defRPr>
             </a:pPr>
             <a:r>
-              <a:t>4. Symmetrical Outboard &amp; Aft Cryotanks (610 m³)</a:t>
-            </a:r>
-          </a:p>
-          <a:p>
-            <a:pPr>
-              <a:defRPr sz="1100">
-                <a:solidFill>
-                  <a:srgbClr val="E2E8F0"/>
-                </a:solidFill>
-                <a:latin typeface="Arial"/>
-              </a:defRPr>
-            </a:pPr>
-            <a:r>
-              <a:t>6 double-walled vacuum-insulated cylinders placed in wing shoulders and aft core to minimize CG excursion during fuel burn.</a:t>
-            </a:r>
-          </a:p>
-          <a:p>
-            <a:pPr>
-              <a:spcBef>
-                <a:spcPts val="800"/>
-              </a:spcBef>
-              <a:defRPr sz="1250" b="1">
-                <a:solidFill>
-                  <a:srgbClr val="38BDF8"/>
-                </a:solidFill>
-                <a:latin typeface="Helvetica Neue"/>
-              </a:defRPr>
-            </a:pPr>
-            <a:r>
-              <a:t>5. Upper-Deck Acoustically Shielded Turbofans</a:t>
-            </a:r>
-          </a:p>
-          <a:p>
-            <a:pPr>
-              <a:defRPr sz="1100">
-                <a:solidFill>
-                  <a:srgbClr val="E2E8F0"/>
-                </a:solidFill>
-                <a:latin typeface="Arial"/>
-              </a:defRPr>
-            </a:pPr>
-            <a:r>
-              <a:t>Twin geared turbofans mounted above the trailing deck to shield airport communities from engine fan and jet noise.</a:t>
-            </a:r>
-          </a:p>
-        </p:txBody>
-      </p:sp>
-    </p:spTree>
-  </p:cSld>
-  <p:clrMapOvr>
-    <a:masterClrMapping/>
-  </p:clrMapOvr>
-</p:sld>
-</file>
-
-<file path=ppt/slides/slide3.xml><?xml version="1.0" encoding="utf-8"?>
-<p:sld xmlns:a="http://schemas.openxmlformats.org/drawingml/2006/main" xmlns:p="http://schemas.openxmlformats.org/presentationml/2006/main" xmlns:r="http://schemas.openxmlformats.org/officeDocument/2006/relationships">
-  <p:cSld>
-    <p:bg>
-      <p:bgPr>
-        <a:solidFill>
-          <a:srgbClr val="0A0F1D"/>
-        </a:solidFill>
-        <a:effectLst/>
-      </p:bgPr>
-    </p:bg>
-    <p:spTree>
-      <p:nvGrpSpPr>
-        <p:cNvPr id="1" name=""/>
-        <p:cNvGrpSpPr/>
-        <p:nvPr/>
-      </p:nvGrpSpPr>
-      <p:grpSpPr/>
-      <p:sp>
-        <p:nvSpPr>
-          <p:cNvPr id="2" name="TextBox 1"/>
-          <p:cNvSpPr txBox="1"/>
-          <p:nvPr/>
-        </p:nvSpPr>
-        <p:spPr>
-          <a:xfrm>
-            <a:off x="731520" y="365760"/>
-            <a:ext cx="10698480" cy="274320"/>
-          </a:xfrm>
-          <a:prstGeom prst="rect">
-            <a:avLst/>
-          </a:prstGeom>
-          <a:noFill/>
-        </p:spPr>
-        <p:txBody>
-          <a:bodyPr wrap="square" lIns="0" rIns="0" tIns="0" bIns="0">
-            <a:spAutoFit/>
-          </a:bodyPr>
-          <a:lstStyle/>
-          <a:p>
-            <a:pPr>
-              <a:defRPr sz="1000" b="1">
-                <a:solidFill>
-                  <a:srgbClr val="38BDF8"/>
-                </a:solidFill>
-                <a:latin typeface="Arial"/>
-              </a:defRPr>
-            </a:pPr>
-            <a:r>
-              <a:t>MMS236 AIRCRAFT DESIGN | GROUP 13</a:t>
-            </a:r>
-          </a:p>
-        </p:txBody>
-      </p:sp>
-      <p:sp>
-        <p:nvSpPr>
-          <p:cNvPr id="3" name="TextBox 2"/>
-          <p:cNvSpPr txBox="1"/>
-          <p:nvPr/>
-        </p:nvSpPr>
-        <p:spPr>
-          <a:xfrm>
-            <a:off x="731520" y="621792"/>
-            <a:ext cx="10698480" cy="548640"/>
-          </a:xfrm>
-          <a:prstGeom prst="rect">
-            <a:avLst/>
-          </a:prstGeom>
-          <a:noFill/>
-        </p:spPr>
-        <p:txBody>
-          <a:bodyPr wrap="square" lIns="0" rIns="0" tIns="0" bIns="0">
-            <a:spAutoFit/>
-          </a:bodyPr>
-          <a:lstStyle/>
-          <a:p>
-            <a:pPr>
-              <a:defRPr sz="2400" b="1">
-                <a:solidFill>
-                  <a:srgbClr val="FFFFFF"/>
-                </a:solidFill>
-                <a:latin typeface="Helvetica Neue"/>
-              </a:defRPr>
-            </a:pPr>
-            <a:r>
-              <a:t>Mission Profile &amp; Flight Operational Envelope</a:t>
-            </a:r>
-          </a:p>
-        </p:txBody>
-      </p:sp>
-      <p:sp>
-        <p:nvSpPr>
-          <p:cNvPr id="4" name="Rounded Rectangle 3"/>
+              <a:t>Converged mission sizing</a:t>
+            </a:r>
+          </a:p>
+        </p:txBody>
+      </p:sp>
+      <p:sp>
+        <p:nvSpPr>
+          <p:cNvPr id="6" name="Rounded Rectangle 5"/>
           <p:cNvSpPr/>
           <p:nvPr/>
         </p:nvSpPr>
         <p:spPr>
           <a:xfrm>
-            <a:off x="731520" y="1234440"/>
-            <a:ext cx="10728655" cy="3108960"/>
+            <a:off x="4389120" y="1463040"/>
+            <a:ext cx="3413455" cy="4663440"/>
           </a:xfrm>
           <a:prstGeom prst="roundRect">
             <a:avLst/>
           </a:prstGeom>
           <a:solidFill>
-            <a:srgbClr val="111C35"/>
+            <a:srgbClr val="111622"/>
           </a:solidFill>
-          <a:ln w="15240">
+          <a:ln w="9525">
             <a:solidFill>
-              <a:srgbClr val="1E3A8A"/>
+              <a:srgbClr val="1E293B"/>
             </a:solidFill>
           </a:ln>
         </p:spPr>
@@ -4709,50 +4966,110 @@
           </a:p>
         </p:txBody>
       </p:sp>
-      <p:pic>
-        <p:nvPicPr>
-          <p:cNvPr id="5" name="Picture 4" descr="image2.jpeg"/>
-          <p:cNvPicPr>
-            <a:picLocks noChangeAspect="1"/>
-          </p:cNvPicPr>
+      <p:sp>
+        <p:nvSpPr>
+          <p:cNvPr id="7" name="TextBox 6"/>
+          <p:cNvSpPr txBox="1"/>
           <p:nvPr/>
-        </p:nvPicPr>
-        <p:blipFill>
-          <a:blip r:embed="rId2"/>
-          <a:stretch>
-            <a:fillRect/>
-          </a:stretch>
-        </p:blipFill>
-        <p:spPr>
-          <a:xfrm>
-            <a:off x="1371600" y="1325880"/>
-            <a:ext cx="9418320" cy="7370859"/>
+        </p:nvSpPr>
+        <p:spPr>
+          <a:xfrm>
+            <a:off x="4709160" y="1828800"/>
+            <a:ext cx="2743200" cy="3931920"/>
           </a:xfrm>
           <a:prstGeom prst="rect">
             <a:avLst/>
           </a:prstGeom>
-        </p:spPr>
-      </p:pic>
-      <p:sp>
-        <p:nvSpPr>
-          <p:cNvPr id="6" name="Rounded Rectangle 5"/>
+          <a:noFill/>
+        </p:spPr>
+        <p:txBody>
+          <a:bodyPr wrap="none">
+            <a:spAutoFit/>
+          </a:bodyPr>
+          <a:lstStyle/>
+          <a:p>
+            <a:pPr>
+              <a:defRPr sz="1100" b="1">
+                <a:solidFill>
+                  <a:srgbClr val="94A3B8"/>
+                </a:solidFill>
+                <a:latin typeface="Arial"/>
+              </a:defRPr>
+            </a:pPr>
+            <a:r>
+              <a:t>OPERATING EMPTY WEIGHT</a:t>
+            </a:r>
+          </a:p>
+          <a:p>
+            <a:pPr>
+              <a:spcBef>
+                <a:spcPts val="800"/>
+              </a:spcBef>
+              <a:defRPr sz="2800" b="1">
+                <a:solidFill>
+                  <a:srgbClr val="38BDF8"/>
+                </a:solidFill>
+                <a:latin typeface="Helvetica Neue"/>
+              </a:defRPr>
+            </a:pPr>
+            <a:r>
+              <a:t>155,600 kg</a:t>
+            </a:r>
+          </a:p>
+          <a:p>
+            <a:pPr>
+              <a:spcBef>
+                <a:spcPts val="400"/>
+              </a:spcBef>
+              <a:defRPr sz="1500" b="1">
+                <a:solidFill>
+                  <a:srgbClr val="CBD5E1"/>
+                </a:solidFill>
+                <a:latin typeface="Helvetica Neue"/>
+              </a:defRPr>
+            </a:pPr>
+            <a:r>
+              <a:t>We / W0 = 0.66</a:t>
+            </a:r>
+          </a:p>
+          <a:p>
+            <a:pPr>
+              <a:spcBef>
+                <a:spcPts val="2800"/>
+              </a:spcBef>
+              <a:defRPr sz="1200">
+                <a:solidFill>
+                  <a:srgbClr val="64748B"/>
+                </a:solidFill>
+                <a:latin typeface="Arial"/>
+              </a:defRPr>
+            </a:pPr>
+            <a:r>
+              <a:t>Raymer statistical method</a:t>
+            </a:r>
+          </a:p>
+        </p:txBody>
+      </p:sp>
+      <p:sp>
+        <p:nvSpPr>
+          <p:cNvPr id="8" name="Rounded Rectangle 7"/>
           <p:cNvSpPr/>
           <p:nvPr/>
         </p:nvSpPr>
         <p:spPr>
           <a:xfrm>
-            <a:off x="731520" y="4526280"/>
-            <a:ext cx="3383280" cy="1783080"/>
+            <a:off x="7955279" y="1463040"/>
+            <a:ext cx="3413455" cy="4663440"/>
           </a:xfrm>
           <a:prstGeom prst="roundRect">
             <a:avLst/>
           </a:prstGeom>
           <a:solidFill>
-            <a:srgbClr val="111C35"/>
+            <a:srgbClr val="111622"/>
           </a:solidFill>
-          <a:ln w="15240">
+          <a:ln w="9525">
             <a:solidFill>
-              <a:srgbClr val="1E3A8A"/>
+              <a:srgbClr val="1E293B"/>
             </a:solidFill>
           </a:ln>
         </p:spPr>
@@ -4780,14 +5097,14 @@
       </p:sp>
       <p:sp>
         <p:nvSpPr>
-          <p:cNvPr id="7" name="TextBox 6"/>
+          <p:cNvPr id="9" name="TextBox 8"/>
           <p:cNvSpPr txBox="1"/>
           <p:nvPr/>
         </p:nvSpPr>
         <p:spPr>
           <a:xfrm>
-            <a:off x="868680" y="4636008"/>
-            <a:ext cx="3108960" cy="1563624"/>
+            <a:off x="8275319" y="1828800"/>
+            <a:ext cx="2743200" cy="3931920"/>
           </a:xfrm>
           <a:prstGeom prst="rect">
             <a:avLst/>
@@ -4795,6 +5112,116 @@
           <a:noFill/>
         </p:spPr>
         <p:txBody>
+          <a:bodyPr wrap="none">
+            <a:spAutoFit/>
+          </a:bodyPr>
+          <a:lstStyle/>
+          <a:p>
+            <a:pPr>
+              <a:defRPr sz="1100" b="1">
+                <a:solidFill>
+                  <a:srgbClr val="94A3B8"/>
+                </a:solidFill>
+                <a:latin typeface="Arial"/>
+              </a:defRPr>
+            </a:pPr>
+            <a:r>
+              <a:t>CRYOGENIC LH2 TANKS</a:t>
+            </a:r>
+          </a:p>
+          <a:p>
+            <a:pPr>
+              <a:spcBef>
+                <a:spcPts val="800"/>
+              </a:spcBef>
+              <a:defRPr sz="2800" b="1">
+                <a:solidFill>
+                  <a:srgbClr val="F8FAFC"/>
+                </a:solidFill>
+                <a:latin typeface="Helvetica Neue"/>
+              </a:defRPr>
+            </a:pPr>
+            <a:r>
+              <a:t>35,400 kg</a:t>
+            </a:r>
+          </a:p>
+          <a:p>
+            <a:pPr>
+              <a:spcBef>
+                <a:spcPts val="400"/>
+              </a:spcBef>
+              <a:defRPr sz="1500" b="1">
+                <a:solidFill>
+                  <a:srgbClr val="38BDF8"/>
+                </a:solidFill>
+                <a:latin typeface="Helvetica Neue"/>
+              </a:defRPr>
+            </a:pPr>
+            <a:r>
+              <a:t>6 × 5,900 kg</a:t>
+            </a:r>
+          </a:p>
+          <a:p>
+            <a:pPr>
+              <a:spcBef>
+                <a:spcPts val="2800"/>
+              </a:spcBef>
+              <a:defRPr sz="1200">
+                <a:solidFill>
+                  <a:srgbClr val="64748B"/>
+                </a:solidFill>
+                <a:latin typeface="Arial"/>
+              </a:defRPr>
+            </a:pPr>
+            <a:r>
+              <a:t>Gravimetric index Gi = 0.50</a:t>
+            </a:r>
+          </a:p>
+        </p:txBody>
+      </p:sp>
+    </p:spTree>
+  </p:cSld>
+  <p:clrMapOvr>
+    <a:masterClrMapping/>
+  </p:clrMapOvr>
+</p:sld>
+</file>
+
+<file path=ppt/slides/slide7.xml><?xml version="1.0" encoding="utf-8"?>
+<p:sld xmlns:a="http://schemas.openxmlformats.org/drawingml/2006/main" xmlns:p="http://schemas.openxmlformats.org/presentationml/2006/main" xmlns:r="http://schemas.openxmlformats.org/officeDocument/2006/relationships">
+  <p:cSld>
+    <p:bg>
+      <p:bgPr>
+        <a:solidFill>
+          <a:srgbClr val="0A0D14"/>
+        </a:solidFill>
+        <a:effectLst/>
+      </p:bgPr>
+    </p:bg>
+    <p:spTree>
+      <p:nvGrpSpPr>
+        <p:cNvPr id="1" name=""/>
+        <p:cNvGrpSpPr/>
+        <p:nvPr/>
+      </p:nvGrpSpPr>
+      <p:grpSpPr/>
+      <p:sp>
+        <p:nvSpPr>
+          <p:cNvPr id="2" name="TextBox 1"/>
+          <p:cNvSpPr txBox="1"/>
+          <p:nvPr/>
+        </p:nvSpPr>
+        <p:spPr>
+          <a:xfrm>
+            <a:off x="822960" y="502920"/>
+            <a:ext cx="10515600" cy="228600"/>
+          </a:xfrm>
+          <a:prstGeom prst="rect">
+            <a:avLst/>
+          </a:prstGeom>
+          <a:noFill/>
+        </p:spPr>
+        <p:txBody>
           <a:bodyPr wrap="square" lIns="0" rIns="0" tIns="0" bIns="0">
             <a:spAutoFit/>
           </a:bodyPr>
@@ -4803,50 +5230,73 @@
             <a:pPr>
               <a:defRPr sz="950" b="1">
                 <a:solidFill>
-                  <a:srgbClr val="94A3B8"/>
+                  <a:srgbClr val="38BDF8"/>
                 </a:solidFill>
                 <a:latin typeface="Arial"/>
               </a:defRPr>
             </a:pPr>
             <a:r>
-              <a:t>MAIN CRUISE SEGMENT</a:t>
-            </a:r>
-          </a:p>
+              <a:t>MMS236  •  GROUP 13  •  CONFIGURATION</a:t>
+            </a:r>
+          </a:p>
+        </p:txBody>
+      </p:sp>
+      <p:sp>
+        <p:nvSpPr>
+          <p:cNvPr id="3" name="TextBox 2"/>
+          <p:cNvSpPr txBox="1"/>
+          <p:nvPr/>
+        </p:nvSpPr>
+        <p:spPr>
+          <a:xfrm>
+            <a:off x="822960" y="749808"/>
+            <a:ext cx="10515600" cy="457200"/>
+          </a:xfrm>
+          <a:prstGeom prst="rect">
+            <a:avLst/>
+          </a:prstGeom>
+          <a:noFill/>
+        </p:spPr>
+        <p:txBody>
+          <a:bodyPr wrap="square" lIns="0" rIns="0" tIns="0" bIns="0">
+            <a:spAutoFit/>
+          </a:bodyPr>
+          <a:lstStyle/>
           <a:p>
             <a:pPr>
-              <a:defRPr sz="2000" b="1">
-                <a:solidFill>
-                  <a:srgbClr val="38BDF8"/>
+              <a:defRPr sz="2200" b="1">
+                <a:solidFill>
+                  <a:srgbClr val="F8FAFC"/>
                 </a:solidFill>
                 <a:latin typeface="Helvetica Neue"/>
               </a:defRPr>
             </a:pPr>
             <a:r>
-              <a:t>12,500 km at FL350 (M0.85)</a:t>
-            </a:r>
-          </a:p>
-        </p:txBody>
-      </p:sp>
-      <p:sp>
-        <p:nvSpPr>
-          <p:cNvPr id="8" name="Rounded Rectangle 7"/>
+              <a:t>The concept</a:t>
+            </a:r>
+          </a:p>
+        </p:txBody>
+      </p:sp>
+      <p:sp>
+        <p:nvSpPr>
+          <p:cNvPr id="4" name="Rounded Rectangle 3"/>
           <p:cNvSpPr/>
           <p:nvPr/>
         </p:nvSpPr>
         <p:spPr>
           <a:xfrm>
-            <a:off x="4389120" y="4526280"/>
-            <a:ext cx="3383280" cy="1783080"/>
+            <a:off x="2011680" y="1371600"/>
+            <a:ext cx="8168335" cy="4754880"/>
           </a:xfrm>
           <a:prstGeom prst="roundRect">
             <a:avLst/>
           </a:prstGeom>
           <a:solidFill>
-            <a:srgbClr val="111C35"/>
+            <a:srgbClr val="111622"/>
           </a:solidFill>
-          <a:ln w="15240">
+          <a:ln w="9525">
             <a:solidFill>
-              <a:srgbClr val="1E3A8A"/>
+              <a:srgbClr val="1E293B"/>
             </a:solidFill>
           </a:ln>
         </p:spPr>
@@ -4872,16 +5322,40 @@
           </a:p>
         </p:txBody>
       </p:sp>
-      <p:sp>
-        <p:nvSpPr>
-          <p:cNvPr id="9" name="TextBox 8"/>
+      <p:pic>
+        <p:nvPicPr>
+          <p:cNvPr id="5" name="Picture 4" descr="image4.jpeg"/>
+          <p:cNvPicPr>
+            <a:picLocks noChangeAspect="1"/>
+          </p:cNvPicPr>
+          <p:nvPr/>
+        </p:nvPicPr>
+        <p:blipFill>
+          <a:blip r:embed="rId2"/>
+          <a:stretch>
+            <a:fillRect/>
+          </a:stretch>
+        </p:blipFill>
+        <p:spPr>
+          <a:xfrm>
+            <a:off x="2240280" y="1508760"/>
+            <a:ext cx="7711135" cy="5757647"/>
+          </a:xfrm>
+          <a:prstGeom prst="rect">
+            <a:avLst/>
+          </a:prstGeom>
+        </p:spPr>
+      </p:pic>
+      <p:sp>
+        <p:nvSpPr>
+          <p:cNvPr id="6" name="TextBox 5"/>
           <p:cNvSpPr txBox="1"/>
           <p:nvPr/>
         </p:nvSpPr>
         <p:spPr>
           <a:xfrm>
-            <a:off x="4526280" y="4636008"/>
-            <a:ext cx="3108960" cy="1563624"/>
+            <a:off x="822960" y="6263640"/>
+            <a:ext cx="10545775" cy="320040"/>
           </a:xfrm>
           <a:prstGeom prst="rect">
             <a:avLst/>
@@ -4889,6 +5363,68 @@
           <a:noFill/>
         </p:spPr>
         <p:txBody>
+          <a:bodyPr wrap="none">
+            <a:spAutoFit/>
+          </a:bodyPr>
+          <a:lstStyle/>
+          <a:p>
+            <a:pPr algn="ctr">
+              <a:defRPr sz="1100">
+                <a:solidFill>
+                  <a:srgbClr val="94A3B8"/>
+                </a:solidFill>
+                <a:latin typeface="Arial"/>
+              </a:defRPr>
+            </a:pPr>
+            <a:r>
+              <a:t>EXAELIA 80m Hydrogen BWB  •  430 Pax Theater Cabin  •  610 m³ Cryogenic Storage</a:t>
+            </a:r>
+          </a:p>
+        </p:txBody>
+      </p:sp>
+    </p:spTree>
+  </p:cSld>
+  <p:clrMapOvr>
+    <a:masterClrMapping/>
+  </p:clrMapOvr>
+</p:sld>
+</file>
+
+<file path=ppt/slides/slide8.xml><?xml version="1.0" encoding="utf-8"?>
+<p:sld xmlns:a="http://schemas.openxmlformats.org/drawingml/2006/main" xmlns:p="http://schemas.openxmlformats.org/presentationml/2006/main" xmlns:r="http://schemas.openxmlformats.org/officeDocument/2006/relationships">
+  <p:cSld>
+    <p:bg>
+      <p:bgPr>
+        <a:solidFill>
+          <a:srgbClr val="0A0D14"/>
+        </a:solidFill>
+        <a:effectLst/>
+      </p:bgPr>
+    </p:bg>
+    <p:spTree>
+      <p:nvGrpSpPr>
+        <p:cNvPr id="1" name=""/>
+        <p:cNvGrpSpPr/>
+        <p:nvPr/>
+      </p:nvGrpSpPr>
+      <p:grpSpPr/>
+      <p:sp>
+        <p:nvSpPr>
+          <p:cNvPr id="2" name="TextBox 1"/>
+          <p:cNvSpPr txBox="1"/>
+          <p:nvPr/>
+        </p:nvSpPr>
+        <p:spPr>
+          <a:xfrm>
+            <a:off x="822960" y="502920"/>
+            <a:ext cx="10515600" cy="228600"/>
+          </a:xfrm>
+          <a:prstGeom prst="rect">
+            <a:avLst/>
+          </a:prstGeom>
+          <a:noFill/>
+        </p:spPr>
+        <p:txBody>
           <a:bodyPr wrap="square" lIns="0" rIns="0" tIns="0" bIns="0">
             <a:spAutoFit/>
           </a:bodyPr>
@@ -4897,50 +5433,73 @@
             <a:pPr>
               <a:defRPr sz="950" b="1">
                 <a:solidFill>
-                  <a:srgbClr val="94A3B8"/>
+                  <a:srgbClr val="38BDF8"/>
                 </a:solidFill>
                 <a:latin typeface="Arial"/>
               </a:defRPr>
             </a:pPr>
             <a:r>
-              <a:t>ALTERNATE AIRPORT DIVERSION</a:t>
-            </a:r>
-          </a:p>
+              <a:t>MMS236  •  GROUP 13  •  PARAMETRIC CAD</a:t>
+            </a:r>
+          </a:p>
+        </p:txBody>
+      </p:sp>
+      <p:sp>
+        <p:nvSpPr>
+          <p:cNvPr id="3" name="TextBox 2"/>
+          <p:cNvSpPr txBox="1"/>
+          <p:nvPr/>
+        </p:nvSpPr>
+        <p:spPr>
+          <a:xfrm>
+            <a:off x="822960" y="749808"/>
+            <a:ext cx="10515600" cy="457200"/>
+          </a:xfrm>
+          <a:prstGeom prst="rect">
+            <a:avLst/>
+          </a:prstGeom>
+          <a:noFill/>
+        </p:spPr>
+        <p:txBody>
+          <a:bodyPr wrap="square" lIns="0" rIns="0" tIns="0" bIns="0">
+            <a:spAutoFit/>
+          </a:bodyPr>
+          <a:lstStyle/>
           <a:p>
             <a:pPr>
-              <a:defRPr sz="2000" b="1">
-                <a:solidFill>
-                  <a:srgbClr val="FACC15"/>
+              <a:defRPr sz="2200" b="1">
+                <a:solidFill>
+                  <a:srgbClr val="F8FAFC"/>
                 </a:solidFill>
                 <a:latin typeface="Helvetica Neue"/>
               </a:defRPr>
             </a:pPr>
             <a:r>
-              <a:t>200 nm at FL250 (CS-25)</a:t>
-            </a:r>
-          </a:p>
-        </p:txBody>
-      </p:sp>
-      <p:sp>
-        <p:nvSpPr>
-          <p:cNvPr id="10" name="Rounded Rectangle 9"/>
+              <a:t>3D CAD model</a:t>
+            </a:r>
+          </a:p>
+        </p:txBody>
+      </p:sp>
+      <p:sp>
+        <p:nvSpPr>
+          <p:cNvPr id="4" name="Rounded Rectangle 3"/>
           <p:cNvSpPr/>
           <p:nvPr/>
         </p:nvSpPr>
         <p:spPr>
           <a:xfrm>
-            <a:off x="8046720" y="4526280"/>
-            <a:ext cx="3413455" cy="1783080"/>
+            <a:off x="2011680" y="1371600"/>
+            <a:ext cx="8168335" cy="4754880"/>
           </a:xfrm>
           <a:prstGeom prst="roundRect">
             <a:avLst/>
           </a:prstGeom>
           <a:solidFill>
-            <a:srgbClr val="111C35"/>
+            <a:srgbClr val="111622"/>
           </a:solidFill>
-          <a:ln w="15240">
+          <a:ln w="9525">
             <a:solidFill>
-              <a:srgbClr val="1E3A8A"/>
+              <a:srgbClr val="1E293B"/>
             </a:solidFill>
           </a:ln>
         </p:spPr>
@@ -4966,16 +5525,40 @@
           </a:p>
         </p:txBody>
       </p:sp>
-      <p:sp>
-        <p:nvSpPr>
-          <p:cNvPr id="11" name="TextBox 10"/>
+      <p:pic>
+        <p:nvPicPr>
+          <p:cNvPr id="5" name="Picture 4" descr="exaelia_bwb_80m_3d_views.png"/>
+          <p:cNvPicPr>
+            <a:picLocks noChangeAspect="1"/>
+          </p:cNvPicPr>
+          <p:nvPr/>
+        </p:nvPicPr>
+        <p:blipFill>
+          <a:blip r:embed="rId2"/>
+          <a:stretch>
+            <a:fillRect/>
+          </a:stretch>
+        </p:blipFill>
+        <p:spPr>
+          <a:xfrm>
+            <a:off x="2240280" y="1508760"/>
+            <a:ext cx="7711135" cy="5478964"/>
+          </a:xfrm>
+          <a:prstGeom prst="rect">
+            <a:avLst/>
+          </a:prstGeom>
+        </p:spPr>
+      </p:pic>
+      <p:sp>
+        <p:nvSpPr>
+          <p:cNvPr id="6" name="TextBox 5"/>
           <p:cNvSpPr txBox="1"/>
           <p:nvPr/>
         </p:nvSpPr>
         <p:spPr>
           <a:xfrm>
-            <a:off x="8183880" y="4636008"/>
-            <a:ext cx="3139135" cy="1563624"/>
+            <a:off x="822960" y="6263640"/>
+            <a:ext cx="10545775" cy="320040"/>
           </a:xfrm>
           <a:prstGeom prst="rect">
             <a:avLst/>
@@ -4983,13 +5566,13 @@
           <a:noFill/>
         </p:spPr>
         <p:txBody>
-          <a:bodyPr wrap="square" lIns="0" rIns="0" tIns="0" bIns="0">
+          <a:bodyPr wrap="none">
             <a:spAutoFit/>
           </a:bodyPr>
           <a:lstStyle/>
           <a:p>
-            <a:pPr>
-              <a:defRPr sz="950" b="1">
+            <a:pPr algn="ctr">
+              <a:defRPr sz="1100">
                 <a:solidFill>
                   <a:srgbClr val="94A3B8"/>
                 </a:solidFill>
@@ -4997,20 +5580,7 @@
               </a:defRPr>
             </a:pPr>
             <a:r>
-              <a:t>STATUTORY LOITER &amp; CONTINGENCY</a:t>
-            </a:r>
-          </a:p>
-          <a:p>
-            <a:pPr>
-              <a:defRPr sz="2000" b="1">
-                <a:solidFill>
-                  <a:srgbClr val="10B981"/>
-                </a:solidFill>
-                <a:latin typeface="Helvetica Neue"/>
-              </a:defRPr>
-            </a:pPr>
-            <a:r>
-              <a:t>30 min + 3% at 1,500 ft (ICAO)</a:t>
+              <a:t>OpenVSP 3.51.3 Parametric Multi-View Render  •  Top, Isometric, Front &amp; Side Views</a:t>
             </a:r>
           </a:p>
         </p:txBody>
@@ -5023,13 +5593,13 @@
 </p:sld>
 </file>
 
-<file path=ppt/slides/slide4.xml><?xml version="1.0" encoding="utf-8"?>
+<file path=ppt/slides/slide9.xml><?xml version="1.0" encoding="utf-8"?>
 <p:sld xmlns:a="http://schemas.openxmlformats.org/drawingml/2006/main" xmlns:p="http://schemas.openxmlformats.org/presentationml/2006/main" xmlns:r="http://schemas.openxmlformats.org/officeDocument/2006/relationships">
   <p:cSld>
     <p:bg>
       <p:bgPr>
         <a:solidFill>
-          <a:srgbClr val="0A0F1D"/>
+          <a:srgbClr val="0A0D14"/>
         </a:solidFill>
         <a:effectLst/>
       </p:bgPr>
@@ -5049,8 +5619,8 @@
         </p:nvSpPr>
         <p:spPr>
           <a:xfrm>
-            <a:off x="731520" y="365760"/>
-            <a:ext cx="10698480" cy="274320"/>
+            <a:off x="822960" y="502920"/>
+            <a:ext cx="10515600" cy="228600"/>
           </a:xfrm>
           <a:prstGeom prst="rect">
             <a:avLst/>
@@ -5064,7 +5634,7 @@
           <a:lstStyle/>
           <a:p>
             <a:pPr>
-              <a:defRPr sz="1000" b="1">
+              <a:defRPr sz="950" b="1">
                 <a:solidFill>
                   <a:srgbClr val="38BDF8"/>
                 </a:solidFill>
@@ -5072,7 +5642,7 @@
               </a:defRPr>
             </a:pPr>
             <a:r>
-              <a:t>MMS236 AIRCRAFT DESIGN | GROUP 13</a:t>
+              <a:t>MMS236  •  GROUP 13  •  BIBLIOGRAPHY</a:t>
             </a:r>
           </a:p>
         </p:txBody>
@@ -5085,8 +5655,8 @@
         </p:nvSpPr>
         <p:spPr>
           <a:xfrm>
-            <a:off x="731520" y="621792"/>
-            <a:ext cx="10698480" cy="548640"/>
+            <a:off x="822960" y="749808"/>
+            <a:ext cx="10515600" cy="457200"/>
           </a:xfrm>
           <a:prstGeom prst="rect">
             <a:avLst/>
@@ -5100,15 +5670,15 @@
           <a:lstStyle/>
           <a:p>
             <a:pPr>
-              <a:defRPr sz="2400" b="1">
-                <a:solidFill>
-                  <a:srgbClr val="FFFFFF"/>
+              <a:defRPr sz="2200" b="1">
+                <a:solidFill>
+                  <a:srgbClr val="F8FAFC"/>
                 </a:solidFill>
                 <a:latin typeface="Helvetica Neue"/>
               </a:defRPr>
             </a:pPr>
             <a:r>
-              <a:t>Propulsion Modeling: Liquid Hydrogen SFC &amp; Energy Density</a:t>
+              <a:t>References</a:t>
             </a:r>
           </a:p>
         </p:txBody>
@@ -5121,18 +5691,18 @@
         </p:nvSpPr>
         <p:spPr>
           <a:xfrm>
-            <a:off x="731520" y="1280160"/>
-            <a:ext cx="5303520" cy="5029200"/>
+            <a:off x="822960" y="1645920"/>
+            <a:ext cx="10545775" cy="1828800"/>
           </a:xfrm>
           <a:prstGeom prst="roundRect">
             <a:avLst/>
           </a:prstGeom>
           <a:solidFill>
-            <a:srgbClr val="111C35"/>
+            <a:srgbClr val="111622"/>
           </a:solidFill>
-          <a:ln w="15240">
+          <a:ln w="9525">
             <a:solidFill>
-              <a:srgbClr val="1E3A8A"/>
+              <a:srgbClr val="1E293B"/>
             </a:solidFill>
           </a:ln>
         </p:spPr>
@@ -5158,30 +5728,74 @@
           </a:p>
         </p:txBody>
       </p:sp>
-      <p:pic>
-        <p:nvPicPr>
-          <p:cNvPr id="5" name="Picture 4" descr="image3.png"/>
-          <p:cNvPicPr>
-            <a:picLocks noChangeAspect="1"/>
-          </p:cNvPicPr>
+      <p:sp>
+        <p:nvSpPr>
+          <p:cNvPr id="5" name="TextBox 4"/>
+          <p:cNvSpPr txBox="1"/>
           <p:nvPr/>
-        </p:nvPicPr>
-        <p:blipFill>
-          <a:blip r:embed="rId2"/>
-          <a:stretch>
-            <a:fillRect/>
-          </a:stretch>
-        </p:blipFill>
-        <p:spPr>
-          <a:xfrm>
-            <a:off x="914400" y="1463040"/>
-            <a:ext cx="4937760" cy="3291840"/>
+        </p:nvSpPr>
+        <p:spPr>
+          <a:xfrm>
+            <a:off x="1188720" y="1920240"/>
+            <a:ext cx="9784080" cy="1280160"/>
           </a:xfrm>
           <a:prstGeom prst="rect">
             <a:avLst/>
           </a:prstGeom>
-        </p:spPr>
-      </p:pic>
+          <a:noFill/>
+        </p:spPr>
+        <p:txBody>
+          <a:bodyPr wrap="none">
+            <a:spAutoFit/>
+          </a:bodyPr>
+          <a:lstStyle/>
+          <a:p>
+            <a:pPr>
+              <a:defRPr sz="1200" b="1">
+                <a:solidFill>
+                  <a:srgbClr val="38BDF8"/>
+                </a:solidFill>
+                <a:latin typeface="Arial"/>
+              </a:defRPr>
+            </a:pPr>
+            <a:r>
+              <a:t>NASA Technical Reports Server (NTRS)</a:t>
+            </a:r>
+          </a:p>
+          <a:p>
+            <a:pPr>
+              <a:spcBef>
+                <a:spcPts val="400"/>
+              </a:spcBef>
+              <a:defRPr sz="1600" b="1">
+                <a:solidFill>
+                  <a:srgbClr val="F8FAFC"/>
+                </a:solidFill>
+                <a:latin typeface="Helvetica Neue"/>
+              </a:defRPr>
+            </a:pPr>
+            <a:r>
+              <a:t>Aerodynamic Design and Performance Analysis of Advanced Blended-Wing-Body Transports</a:t>
+            </a:r>
+          </a:p>
+          <a:p>
+            <a:pPr>
+              <a:spcBef>
+                <a:spcPts val="400"/>
+              </a:spcBef>
+              <a:defRPr sz="1050">
+                <a:solidFill>
+                  <a:srgbClr val="94A3B8"/>
+                </a:solidFill>
+                <a:latin typeface="Courier New"/>
+              </a:defRPr>
+            </a:pPr>
+            <a:r>
+              <a:t>https://ntrs.nasa.gov/api/citations/20120001452/downloads/20120001452.pdf</a:t>
+            </a:r>
+          </a:p>
+        </p:txBody>
+      </p:sp>
       <p:sp>
         <p:nvSpPr>
           <p:cNvPr id="6" name="Rounded Rectangle 5"/>
@@ -5190,18 +5804,18 @@
         </p:nvSpPr>
         <p:spPr>
           <a:xfrm>
-            <a:off x="6217920" y="1280160"/>
-            <a:ext cx="5242255" cy="5029200"/>
+            <a:off x="822960" y="3749039"/>
+            <a:ext cx="10545775" cy="1828800"/>
           </a:xfrm>
           <a:prstGeom prst="roundRect">
             <a:avLst/>
           </a:prstGeom>
           <a:solidFill>
-            <a:srgbClr val="111C35"/>
+            <a:srgbClr val="111622"/>
           </a:solidFill>
-          <a:ln w="15240">
+          <a:ln w="9525">
             <a:solidFill>
-              <a:srgbClr val="1E3A8A"/>
+              <a:srgbClr val="1E293B"/>
             </a:solidFill>
           </a:ln>
         </p:spPr>
@@ -5235,8 +5849,8 @@
         </p:nvSpPr>
         <p:spPr>
           <a:xfrm>
-            <a:off x="6446520" y="1508760"/>
-            <a:ext cx="4800600" cy="4572000"/>
+            <a:off x="1188720" y="4023359"/>
+            <a:ext cx="9784080" cy="1280160"/>
           </a:xfrm>
           <a:prstGeom prst="rect">
             <a:avLst/>
@@ -5244,2064 +5858,53 @@
           <a:noFill/>
         </p:spPr>
         <p:txBody>
-          <a:bodyPr wrap="square">
+          <a:bodyPr wrap="none">
             <a:spAutoFit/>
           </a:bodyPr>
           <a:lstStyle/>
           <a:p>
             <a:pPr>
-              <a:spcBef>
-                <a:spcPts val="0"/>
-              </a:spcBef>
-              <a:defRPr sz="1300" b="1">
-                <a:solidFill>
-                  <a:srgbClr val="FACC15"/>
-                </a:solidFill>
-                <a:latin typeface="Helvetica Neue"/>
+              <a:defRPr sz="1200" b="1">
+                <a:solidFill>
+                  <a:srgbClr val="38BDF8"/>
+                </a:solidFill>
+                <a:latin typeface="Arial"/>
               </a:defRPr>
             </a:pPr>
             <a:r>
-              <a:t>Year 2050 EIS Turbofan Baseline (Jet-A):</a:t>
-            </a:r>
-          </a:p>
-          <a:p>
-            <a:pPr>
-              <a:defRPr sz="1100">
-                <a:solidFill>
-                  <a:srgbClr val="E2E8F0"/>
-                </a:solidFill>
-                <a:latin typeface="Arial"/>
-              </a:defRPr>
-            </a:pPr>
-            <a:r>
-              <a:t>Following historical efficiency trends (CFM56 ➔ GE90 ➔ Leap-1A):</a:t>
-            </a:r>
-            <a:br/>
-            <a:r>
-              <a:t>• Jet-A Cruise SFC: ~12.0 to 13.5 mg/(N·s)</a:t>
-            </a:r>
-            <a:br/>
-            <a:r>
-              <a:t>• Jet-A Loiter SFC: ~11.0 mg/(N·s)</a:t>
+              <a:t>International Journal of Hydrogen Energy (ScienceDirect)</a:t>
             </a:r>
           </a:p>
           <a:p>
             <a:pPr>
               <a:spcBef>
-                <a:spcPts val="1000"/>
+                <a:spcPts val="400"/>
               </a:spcBef>
-              <a:defRPr sz="1300" b="1">
-                <a:solidFill>
-                  <a:srgbClr val="FACC15"/>
+              <a:defRPr sz="1600" b="1">
+                <a:solidFill>
+                  <a:srgbClr val="F8FAFC"/>
                 </a:solidFill>
                 <a:latin typeface="Helvetica Neue"/>
               </a:defRPr>
             </a:pPr>
             <a:r>
-              <a:t>Thermal Energy Equivalence Principle:</a:t>
-            </a:r>
-          </a:p>
-          <a:p>
-            <a:pPr>
-              <a:defRPr sz="1100">
-                <a:solidFill>
-                  <a:srgbClr val="E2E8F0"/>
-                </a:solidFill>
-                <a:latin typeface="Arial"/>
-              </a:defRPr>
-            </a:pPr>
-            <a:r>
-              <a:t>Hydrogen releases 2.80× higher energy per kg than kerosene:</a:t>
-            </a:r>
-            <a:br/>
-            <a:r>
-              <a:t>• LHV (Jet-A) = 42.8 MJ/kg</a:t>
-            </a:r>
-            <a:br/>
-            <a:r>
-              <a:t>• LHV (LH2) = 120.0 MJ/kg</a:t>
-            </a:r>
-            <a:br/>
-            <a:r>
-              <a:t>• Energy Ratio: 42.8 / 120.0 = 0.3567</a:t>
+              <a:t>Civil Liquid Hydrogen Aircraft Design, Sizing and Cryogenic Storage Integration</a:t>
             </a:r>
           </a:p>
           <a:p>
             <a:pPr>
               <a:spcBef>
-                <a:spcPts val="1000"/>
-              </a:spcBef>
-              <a:defRPr sz="1300" b="1">
-                <a:solidFill>
-                  <a:srgbClr val="FACC15"/>
-                </a:solidFill>
-                <a:latin typeface="Helvetica Neue"/>
-              </a:defRPr>
-            </a:pPr>
-            <a:r>
-              <a:t>Converted Liquid Hydrogen SFC:</a:t>
-            </a:r>
-          </a:p>
-          <a:p>
-            <a:pPr>
-              <a:defRPr sz="1100">
-                <a:solidFill>
-                  <a:srgbClr val="E2E8F0"/>
-                </a:solidFill>
-                <a:latin typeface="Arial"/>
-              </a:defRPr>
-            </a:pPr>
-            <a:r>
-              <a:t>• LH2 Cruise SFC = 12.0 × 0.3567 ≈ 4.80 to 4.815 mg/(N·s)</a:t>
-            </a:r>
-            <a:br/>
-            <a:r>
-              <a:t>• LH2 Loiter SFC = 11.0 × 0.3567 ≈ 3.92 mg/(N·s)</a:t>
-            </a:r>
-            <a:br/>
-            <a:r>
-              <a:t>➔ Over 60% lower fuel mass flow rate than conventional Jet-A!</a:t>
-            </a:r>
-          </a:p>
-        </p:txBody>
-      </p:sp>
-    </p:spTree>
-  </p:cSld>
-  <p:clrMapOvr>
-    <a:masterClrMapping/>
-  </p:clrMapOvr>
-</p:sld>
-</file>
-
-<file path=ppt/slides/slide5.xml><?xml version="1.0" encoding="utf-8"?>
-<p:sld xmlns:a="http://schemas.openxmlformats.org/drawingml/2006/main" xmlns:p="http://schemas.openxmlformats.org/presentationml/2006/main" xmlns:r="http://schemas.openxmlformats.org/officeDocument/2006/relationships">
-  <p:cSld>
-    <p:bg>
-      <p:bgPr>
-        <a:solidFill>
-          <a:srgbClr val="0A0F1D"/>
-        </a:solidFill>
-        <a:effectLst/>
-      </p:bgPr>
-    </p:bg>
-    <p:spTree>
-      <p:nvGrpSpPr>
-        <p:cNvPr id="1" name=""/>
-        <p:cNvGrpSpPr/>
-        <p:nvPr/>
-      </p:nvGrpSpPr>
-      <p:grpSpPr/>
-      <p:sp>
-        <p:nvSpPr>
-          <p:cNvPr id="2" name="TextBox 1"/>
-          <p:cNvSpPr txBox="1"/>
-          <p:nvPr/>
-        </p:nvSpPr>
-        <p:spPr>
-          <a:xfrm>
-            <a:off x="731520" y="365760"/>
-            <a:ext cx="10698480" cy="274320"/>
-          </a:xfrm>
-          <a:prstGeom prst="rect">
-            <a:avLst/>
-          </a:prstGeom>
-          <a:noFill/>
-        </p:spPr>
-        <p:txBody>
-          <a:bodyPr wrap="square" lIns="0" rIns="0" tIns="0" bIns="0">
-            <a:spAutoFit/>
-          </a:bodyPr>
-          <a:lstStyle/>
-          <a:p>
-            <a:pPr>
-              <a:defRPr sz="1000" b="1">
-                <a:solidFill>
-                  <a:srgbClr val="38BDF8"/>
-                </a:solidFill>
-                <a:latin typeface="Arial"/>
-              </a:defRPr>
-            </a:pPr>
-            <a:r>
-              <a:t>MMS236 AIRCRAFT DESIGN | GROUP 13</a:t>
-            </a:r>
-          </a:p>
-        </p:txBody>
-      </p:sp>
-      <p:sp>
-        <p:nvSpPr>
-          <p:cNvPr id="3" name="TextBox 2"/>
-          <p:cNvSpPr txBox="1"/>
-          <p:nvPr/>
-        </p:nvSpPr>
-        <p:spPr>
-          <a:xfrm>
-            <a:off x="731520" y="621792"/>
-            <a:ext cx="10698480" cy="548640"/>
-          </a:xfrm>
-          <a:prstGeom prst="rect">
-            <a:avLst/>
-          </a:prstGeom>
-          <a:noFill/>
-        </p:spPr>
-        <p:txBody>
-          <a:bodyPr wrap="square" lIns="0" rIns="0" tIns="0" bIns="0">
-            <a:spAutoFit/>
-          </a:bodyPr>
-          <a:lstStyle/>
-          <a:p>
-            <a:pPr>
-              <a:defRPr sz="2400" b="1">
-                <a:solidFill>
-                  <a:srgbClr val="FFFFFF"/>
-                </a:solidFill>
-                <a:latin typeface="Helvetica Neue"/>
-              </a:defRPr>
-            </a:pPr>
-            <a:r>
-              <a:t>Aerodynamic Efficiency &amp; Drag Polar Optimization</a:t>
-            </a:r>
-          </a:p>
-        </p:txBody>
-      </p:sp>
-      <p:sp>
-        <p:nvSpPr>
-          <p:cNvPr id="4" name="Rounded Rectangle 3"/>
-          <p:cNvSpPr/>
-          <p:nvPr/>
-        </p:nvSpPr>
-        <p:spPr>
-          <a:xfrm>
-            <a:off x="731520" y="1280160"/>
-            <a:ext cx="2560320" cy="1554480"/>
-          </a:xfrm>
-          <a:prstGeom prst="roundRect">
-            <a:avLst/>
-          </a:prstGeom>
-          <a:solidFill>
-            <a:srgbClr val="111C35"/>
-          </a:solidFill>
-          <a:ln w="15240">
-            <a:solidFill>
-              <a:srgbClr val="1E3A8A"/>
-            </a:solidFill>
-          </a:ln>
-        </p:spPr>
-        <p:style>
-          <a:lnRef idx="1">
-            <a:schemeClr val="accent1"/>
-          </a:lnRef>
-          <a:fillRef idx="3">
-            <a:schemeClr val="accent1"/>
-          </a:fillRef>
-          <a:effectRef idx="2">
-            <a:schemeClr val="accent1"/>
-          </a:effectRef>
-          <a:fontRef idx="minor">
-            <a:schemeClr val="lt1"/>
-          </a:fontRef>
-        </p:style>
-        <p:txBody>
-          <a:bodyPr rtlCol="0" anchor="ctr"/>
-          <a:lstStyle/>
-          <a:p>
-            <a:pPr algn="ctr"/>
-          </a:p>
-        </p:txBody>
-      </p:sp>
-      <p:sp>
-        <p:nvSpPr>
-          <p:cNvPr id="5" name="TextBox 4"/>
-          <p:cNvSpPr txBox="1"/>
-          <p:nvPr/>
-        </p:nvSpPr>
-        <p:spPr>
-          <a:xfrm>
-            <a:off x="868680" y="1389888"/>
-            <a:ext cx="2286000" cy="1335024"/>
-          </a:xfrm>
-          <a:prstGeom prst="rect">
-            <a:avLst/>
-          </a:prstGeom>
-          <a:noFill/>
-        </p:spPr>
-        <p:txBody>
-          <a:bodyPr wrap="square" lIns="0" rIns="0" tIns="0" bIns="0">
-            <a:spAutoFit/>
-          </a:bodyPr>
-          <a:lstStyle/>
-          <a:p>
-            <a:pPr>
-              <a:defRPr sz="950" b="1">
-                <a:solidFill>
-                  <a:srgbClr val="94A3B8"/>
-                </a:solidFill>
-                <a:latin typeface="Arial"/>
-              </a:defRPr>
-            </a:pPr>
-            <a:r>
-              <a:t>ASPECT RATIO (AR)</a:t>
-            </a:r>
-          </a:p>
-          <a:p>
-            <a:pPr>
-              <a:defRPr sz="2000" b="1">
-                <a:solidFill>
-                  <a:srgbClr val="38BDF8"/>
-                </a:solidFill>
-                <a:latin typeface="Helvetica Neue"/>
-              </a:defRPr>
-            </a:pPr>
-            <a:r>
-              <a:t>9.50 Transonic Optimum</a:t>
-            </a:r>
-          </a:p>
-        </p:txBody>
-      </p:sp>
-      <p:sp>
-        <p:nvSpPr>
-          <p:cNvPr id="6" name="Rounded Rectangle 5"/>
-          <p:cNvSpPr/>
-          <p:nvPr/>
-        </p:nvSpPr>
-        <p:spPr>
-          <a:xfrm>
-            <a:off x="3456432" y="1280160"/>
-            <a:ext cx="2560320" cy="1554480"/>
-          </a:xfrm>
-          <a:prstGeom prst="roundRect">
-            <a:avLst/>
-          </a:prstGeom>
-          <a:solidFill>
-            <a:srgbClr val="111C35"/>
-          </a:solidFill>
-          <a:ln w="15240">
-            <a:solidFill>
-              <a:srgbClr val="1E3A8A"/>
-            </a:solidFill>
-          </a:ln>
-        </p:spPr>
-        <p:style>
-          <a:lnRef idx="1">
-            <a:schemeClr val="accent1"/>
-          </a:lnRef>
-          <a:fillRef idx="3">
-            <a:schemeClr val="accent1"/>
-          </a:fillRef>
-          <a:effectRef idx="2">
-            <a:schemeClr val="accent1"/>
-          </a:effectRef>
-          <a:fontRef idx="minor">
-            <a:schemeClr val="lt1"/>
-          </a:fontRef>
-        </p:style>
-        <p:txBody>
-          <a:bodyPr rtlCol="0" anchor="ctr"/>
-          <a:lstStyle/>
-          <a:p>
-            <a:pPr algn="ctr"/>
-          </a:p>
-        </p:txBody>
-      </p:sp>
-      <p:sp>
-        <p:nvSpPr>
-          <p:cNvPr id="7" name="TextBox 6"/>
-          <p:cNvSpPr txBox="1"/>
-          <p:nvPr/>
-        </p:nvSpPr>
-        <p:spPr>
-          <a:xfrm>
-            <a:off x="3593592" y="1389888"/>
-            <a:ext cx="2286000" cy="1335024"/>
-          </a:xfrm>
-          <a:prstGeom prst="rect">
-            <a:avLst/>
-          </a:prstGeom>
-          <a:noFill/>
-        </p:spPr>
-        <p:txBody>
-          <a:bodyPr wrap="square" lIns="0" rIns="0" tIns="0" bIns="0">
-            <a:spAutoFit/>
-          </a:bodyPr>
-          <a:lstStyle/>
-          <a:p>
-            <a:pPr>
-              <a:defRPr sz="950" b="1">
-                <a:solidFill>
-                  <a:srgbClr val="94A3B8"/>
-                </a:solidFill>
-                <a:latin typeface="Arial"/>
-              </a:defRPr>
-            </a:pPr>
-            <a:r>
-              <a:t>WETTED RATIO (SWET/SREF)</a:t>
-            </a:r>
-          </a:p>
-          <a:p>
-            <a:pPr>
-              <a:defRPr sz="2000" b="1">
-                <a:solidFill>
-                  <a:srgbClr val="10B981"/>
-                </a:solidFill>
-                <a:latin typeface="Helvetica Neue"/>
-              </a:defRPr>
-            </a:pPr>
-            <a:r>
-              <a:t>2.20 High Volume Hull</a:t>
-            </a:r>
-          </a:p>
-        </p:txBody>
-      </p:sp>
-      <p:sp>
-        <p:nvSpPr>
-          <p:cNvPr id="8" name="Rounded Rectangle 7"/>
-          <p:cNvSpPr/>
-          <p:nvPr/>
-        </p:nvSpPr>
-        <p:spPr>
-          <a:xfrm>
-            <a:off x="6181344" y="1280160"/>
-            <a:ext cx="2560320" cy="1554480"/>
-          </a:xfrm>
-          <a:prstGeom prst="roundRect">
-            <a:avLst/>
-          </a:prstGeom>
-          <a:solidFill>
-            <a:srgbClr val="111C35"/>
-          </a:solidFill>
-          <a:ln w="15240">
-            <a:solidFill>
-              <a:srgbClr val="1E3A8A"/>
-            </a:solidFill>
-          </a:ln>
-        </p:spPr>
-        <p:style>
-          <a:lnRef idx="1">
-            <a:schemeClr val="accent1"/>
-          </a:lnRef>
-          <a:fillRef idx="3">
-            <a:schemeClr val="accent1"/>
-          </a:fillRef>
-          <a:effectRef idx="2">
-            <a:schemeClr val="accent1"/>
-          </a:effectRef>
-          <a:fontRef idx="minor">
-            <a:schemeClr val="lt1"/>
-          </a:fontRef>
-        </p:style>
-        <p:txBody>
-          <a:bodyPr rtlCol="0" anchor="ctr"/>
-          <a:lstStyle/>
-          <a:p>
-            <a:pPr algn="ctr"/>
-          </a:p>
-        </p:txBody>
-      </p:sp>
-      <p:sp>
-        <p:nvSpPr>
-          <p:cNvPr id="9" name="TextBox 8"/>
-          <p:cNvSpPr txBox="1"/>
-          <p:nvPr/>
-        </p:nvSpPr>
-        <p:spPr>
-          <a:xfrm>
-            <a:off x="6318504" y="1389888"/>
-            <a:ext cx="2286000" cy="1335024"/>
-          </a:xfrm>
-          <a:prstGeom prst="rect">
-            <a:avLst/>
-          </a:prstGeom>
-          <a:noFill/>
-        </p:spPr>
-        <p:txBody>
-          <a:bodyPr wrap="square" lIns="0" rIns="0" tIns="0" bIns="0">
-            <a:spAutoFit/>
-          </a:bodyPr>
-          <a:lstStyle/>
-          <a:p>
-            <a:pPr>
-              <a:defRPr sz="950" b="1">
-                <a:solidFill>
-                  <a:srgbClr val="94A3B8"/>
-                </a:solidFill>
-                <a:latin typeface="Arial"/>
-              </a:defRPr>
-            </a:pPr>
-            <a:r>
-              <a:t>MAX EFFICIENCY (L/D MAX)</a:t>
-            </a:r>
-          </a:p>
-          <a:p>
-            <a:pPr>
-              <a:defRPr sz="2000" b="1">
-                <a:solidFill>
-                  <a:srgbClr val="FACC15"/>
-                </a:solidFill>
-                <a:latin typeface="Helvetica Neue"/>
-              </a:defRPr>
-            </a:pPr>
-            <a:r>
-              <a:t>30.8 Loiter &amp; Hold Phase</a:t>
-            </a:r>
-          </a:p>
-        </p:txBody>
-      </p:sp>
-      <p:sp>
-        <p:nvSpPr>
-          <p:cNvPr id="10" name="Rounded Rectangle 9"/>
-          <p:cNvSpPr/>
-          <p:nvPr/>
-        </p:nvSpPr>
-        <p:spPr>
-          <a:xfrm>
-            <a:off x="8906256" y="1280160"/>
-            <a:ext cx="2560320" cy="1554480"/>
-          </a:xfrm>
-          <a:prstGeom prst="roundRect">
-            <a:avLst/>
-          </a:prstGeom>
-          <a:solidFill>
-            <a:srgbClr val="111C35"/>
-          </a:solidFill>
-          <a:ln w="15240">
-            <a:solidFill>
-              <a:srgbClr val="1E3A8A"/>
-            </a:solidFill>
-          </a:ln>
-        </p:spPr>
-        <p:style>
-          <a:lnRef idx="1">
-            <a:schemeClr val="accent1"/>
-          </a:lnRef>
-          <a:fillRef idx="3">
-            <a:schemeClr val="accent1"/>
-          </a:fillRef>
-          <a:effectRef idx="2">
-            <a:schemeClr val="accent1"/>
-          </a:effectRef>
-          <a:fontRef idx="minor">
-            <a:schemeClr val="lt1"/>
-          </a:fontRef>
-        </p:style>
-        <p:txBody>
-          <a:bodyPr rtlCol="0" anchor="ctr"/>
-          <a:lstStyle/>
-          <a:p>
-            <a:pPr algn="ctr"/>
-          </a:p>
-        </p:txBody>
-      </p:sp>
-      <p:sp>
-        <p:nvSpPr>
-          <p:cNvPr id="11" name="TextBox 10"/>
-          <p:cNvSpPr txBox="1"/>
-          <p:nvPr/>
-        </p:nvSpPr>
-        <p:spPr>
-          <a:xfrm>
-            <a:off x="9043416" y="1389888"/>
-            <a:ext cx="2286000" cy="1335024"/>
-          </a:xfrm>
-          <a:prstGeom prst="rect">
-            <a:avLst/>
-          </a:prstGeom>
-          <a:noFill/>
-        </p:spPr>
-        <p:txBody>
-          <a:bodyPr wrap="square" lIns="0" rIns="0" tIns="0" bIns="0">
-            <a:spAutoFit/>
-          </a:bodyPr>
-          <a:lstStyle/>
-          <a:p>
-            <a:pPr>
-              <a:defRPr sz="950" b="1">
-                <a:solidFill>
-                  <a:srgbClr val="94A3B8"/>
-                </a:solidFill>
-                <a:latin typeface="Arial"/>
-              </a:defRPr>
-            </a:pPr>
-            <a:r>
-              <a:t>CRUISE EFFICIENCY (L/D)</a:t>
-            </a:r>
-          </a:p>
-          <a:p>
-            <a:pPr>
-              <a:defRPr sz="2000" b="1">
-                <a:solidFill>
-                  <a:srgbClr val="38BDF8"/>
-                </a:solidFill>
-                <a:latin typeface="Helvetica Neue"/>
-              </a:defRPr>
-            </a:pPr>
-            <a:r>
-              <a:t>26.7 Mach 0.85 Range Max</a:t>
-            </a:r>
-          </a:p>
-        </p:txBody>
-      </p:sp>
-      <p:sp>
-        <p:nvSpPr>
-          <p:cNvPr id="12" name="Rounded Rectangle 11"/>
-          <p:cNvSpPr/>
-          <p:nvPr/>
-        </p:nvSpPr>
-        <p:spPr>
-          <a:xfrm>
-            <a:off x="731520" y="3017520"/>
-            <a:ext cx="5257800" cy="3291840"/>
-          </a:xfrm>
-          <a:prstGeom prst="roundRect">
-            <a:avLst/>
-          </a:prstGeom>
-          <a:solidFill>
-            <a:srgbClr val="111C35"/>
-          </a:solidFill>
-          <a:ln w="15240">
-            <a:solidFill>
-              <a:srgbClr val="1E3A8A"/>
-            </a:solidFill>
-          </a:ln>
-        </p:spPr>
-        <p:style>
-          <a:lnRef idx="1">
-            <a:schemeClr val="accent1"/>
-          </a:lnRef>
-          <a:fillRef idx="3">
-            <a:schemeClr val="accent1"/>
-          </a:fillRef>
-          <a:effectRef idx="2">
-            <a:schemeClr val="accent1"/>
-          </a:effectRef>
-          <a:fontRef idx="minor">
-            <a:schemeClr val="lt1"/>
-          </a:fontRef>
-        </p:style>
-        <p:txBody>
-          <a:bodyPr rtlCol="0" anchor="ctr"/>
-          <a:lstStyle/>
-          <a:p>
-            <a:pPr algn="ctr"/>
-          </a:p>
-        </p:txBody>
-      </p:sp>
-      <p:sp>
-        <p:nvSpPr>
-          <p:cNvPr id="13" name="TextBox 12"/>
-          <p:cNvSpPr txBox="1"/>
-          <p:nvPr/>
-        </p:nvSpPr>
-        <p:spPr>
-          <a:xfrm>
-            <a:off x="914400" y="3200400"/>
-            <a:ext cx="4892040" cy="2926080"/>
-          </a:xfrm>
-          <a:prstGeom prst="rect">
-            <a:avLst/>
-          </a:prstGeom>
-          <a:noFill/>
-        </p:spPr>
-        <p:txBody>
-          <a:bodyPr wrap="square">
-            <a:spAutoFit/>
-          </a:bodyPr>
-          <a:lstStyle/>
-          <a:p>
-            <a:pPr>
-              <a:defRPr sz="1300" b="1">
-                <a:solidFill>
-                  <a:srgbClr val="38BDF8"/>
-                </a:solidFill>
-                <a:latin typeface="Helvetica Neue"/>
-              </a:defRPr>
-            </a:pPr>
-            <a:r>
-              <a:t>Parabolic Drag Polar Formulation:</a:t>
-            </a:r>
-          </a:p>
-          <a:p>
-            <a:pPr>
-              <a:defRPr sz="1100">
-                <a:solidFill>
-                  <a:srgbClr val="E2E8F0"/>
-                </a:solidFill>
-                <a:latin typeface="Arial"/>
-              </a:defRPr>
-            </a:pPr>
-            <a:r>
-              <a:t>• Zero-Lift Drag (CD0): 0.0150 (smooth composite BWB surface)</a:t>
-            </a:r>
-            <a:br/>
-            <a:r>
-              <a:t>• Oswald Span Factor (e): 0.85 with 70° canted winglets</a:t>
-            </a:r>
-            <a:br/>
-            <a:r>
-              <a:t>• Optimal Lift-to-Drag Ratio:</a:t>
-            </a:r>
-            <a:br/>
-            <a:r>
-              <a:t>   (L/D)_max = 0.5 × sqrt(π × AR × e / CD0)</a:t>
-            </a:r>
-            <a:br/>
-            <a:r>
-              <a:t>• Long-Range Cruise Condition:</a:t>
-            </a:r>
-            <a:br/>
-            <a:r>
-              <a:t>   (L/D)_cruise = 0.866 × (L/D)_max (maximizes V × L/D range factor)</a:t>
-            </a:r>
-          </a:p>
-        </p:txBody>
-      </p:sp>
-      <p:sp>
-        <p:nvSpPr>
-          <p:cNvPr id="14" name="Rounded Rectangle 13"/>
-          <p:cNvSpPr/>
-          <p:nvPr/>
-        </p:nvSpPr>
-        <p:spPr>
-          <a:xfrm>
-            <a:off x="6172200" y="3017520"/>
-            <a:ext cx="5285232" cy="3291840"/>
-          </a:xfrm>
-          <a:prstGeom prst="roundRect">
-            <a:avLst/>
-          </a:prstGeom>
-          <a:solidFill>
-            <a:srgbClr val="111C35"/>
-          </a:solidFill>
-          <a:ln w="15240">
-            <a:solidFill>
-              <a:srgbClr val="1E3A8A"/>
-            </a:solidFill>
-          </a:ln>
-        </p:spPr>
-        <p:style>
-          <a:lnRef idx="1">
-            <a:schemeClr val="accent1"/>
-          </a:lnRef>
-          <a:fillRef idx="3">
-            <a:schemeClr val="accent1"/>
-          </a:fillRef>
-          <a:effectRef idx="2">
-            <a:schemeClr val="accent1"/>
-          </a:effectRef>
-          <a:fontRef idx="minor">
-            <a:schemeClr val="lt1"/>
-          </a:fontRef>
-        </p:style>
-        <p:txBody>
-          <a:bodyPr rtlCol="0" anchor="ctr"/>
-          <a:lstStyle/>
-          <a:p>
-            <a:pPr algn="ctr"/>
-          </a:p>
-        </p:txBody>
-      </p:sp>
-      <p:sp>
-        <p:nvSpPr>
-          <p:cNvPr id="15" name="TextBox 14"/>
-          <p:cNvSpPr txBox="1"/>
-          <p:nvPr/>
-        </p:nvSpPr>
-        <p:spPr>
-          <a:xfrm>
-            <a:off x="6355080" y="3200400"/>
-            <a:ext cx="4919472" cy="2926080"/>
-          </a:xfrm>
-          <a:prstGeom prst="rect">
-            <a:avLst/>
-          </a:prstGeom>
-          <a:noFill/>
-        </p:spPr>
-        <p:txBody>
-          <a:bodyPr wrap="square">
-            <a:spAutoFit/>
-          </a:bodyPr>
-          <a:lstStyle/>
-          <a:p>
-            <a:pPr>
-              <a:defRPr sz="1300" b="1">
-                <a:solidFill>
-                  <a:srgbClr val="FACC15"/>
-                </a:solidFill>
-                <a:latin typeface="Helvetica Neue"/>
-              </a:defRPr>
-            </a:pPr>
-            <a:r>
-              <a:t>Blended Wing Body Advantages:</a:t>
-            </a:r>
-          </a:p>
-          <a:p>
-            <a:pPr>
-              <a:defRPr sz="1100">
-                <a:solidFill>
-                  <a:srgbClr val="E2E8F0"/>
-                </a:solidFill>
-                <a:latin typeface="Arial"/>
-              </a:defRPr>
-            </a:pPr>
-            <a:r>
-              <a:t>• Lifting Fuselage: Centerbody generates ~45% of total aircraft lift, reducing required wing loading.</a:t>
-            </a:r>
-            <a:br/>
-            <a:r>
-              <a:t>• Lower Wetted Area per Passenger: Reduces parasitic drag per seat by ~20% compared to circular tube-and-wing.</a:t>
-            </a:r>
-            <a:br/>
-            <a:r>
-              <a:t>• Spanwise Camber &amp; Winglets: Endplates lower induced drag while remaining strictly within the 80m Code F gate limit.</a:t>
-            </a:r>
-          </a:p>
-        </p:txBody>
-      </p:sp>
-    </p:spTree>
-  </p:cSld>
-  <p:clrMapOvr>
-    <a:masterClrMapping/>
-  </p:clrMapOvr>
-</p:sld>
-</file>
-
-<file path=ppt/slides/slide6.xml><?xml version="1.0" encoding="utf-8"?>
-<p:sld xmlns:a="http://schemas.openxmlformats.org/drawingml/2006/main" xmlns:p="http://schemas.openxmlformats.org/presentationml/2006/main" xmlns:r="http://schemas.openxmlformats.org/officeDocument/2006/relationships">
-  <p:cSld>
-    <p:bg>
-      <p:bgPr>
-        <a:solidFill>
-          <a:srgbClr val="0A0F1D"/>
-        </a:solidFill>
-        <a:effectLst/>
-      </p:bgPr>
-    </p:bg>
-    <p:spTree>
-      <p:nvGrpSpPr>
-        <p:cNvPr id="1" name=""/>
-        <p:cNvGrpSpPr/>
-        <p:nvPr/>
-      </p:nvGrpSpPr>
-      <p:grpSpPr/>
-      <p:sp>
-        <p:nvSpPr>
-          <p:cNvPr id="2" name="TextBox 1"/>
-          <p:cNvSpPr txBox="1"/>
-          <p:nvPr/>
-        </p:nvSpPr>
-        <p:spPr>
-          <a:xfrm>
-            <a:off x="731520" y="365760"/>
-            <a:ext cx="10698480" cy="274320"/>
-          </a:xfrm>
-          <a:prstGeom prst="rect">
-            <a:avLst/>
-          </a:prstGeom>
-          <a:noFill/>
-        </p:spPr>
-        <p:txBody>
-          <a:bodyPr wrap="square" lIns="0" rIns="0" tIns="0" bIns="0">
-            <a:spAutoFit/>
-          </a:bodyPr>
-          <a:lstStyle/>
-          <a:p>
-            <a:pPr>
-              <a:defRPr sz="1000" b="1">
-                <a:solidFill>
-                  <a:srgbClr val="38BDF8"/>
-                </a:solidFill>
-                <a:latin typeface="Arial"/>
-              </a:defRPr>
-            </a:pPr>
-            <a:r>
-              <a:t>MMS236 AIRCRAFT DESIGN | GROUP 13</a:t>
-            </a:r>
-          </a:p>
-        </p:txBody>
-      </p:sp>
-      <p:sp>
-        <p:nvSpPr>
-          <p:cNvPr id="3" name="TextBox 2"/>
-          <p:cNvSpPr txBox="1"/>
-          <p:nvPr/>
-        </p:nvSpPr>
-        <p:spPr>
-          <a:xfrm>
-            <a:off x="731520" y="621792"/>
-            <a:ext cx="10698480" cy="548640"/>
-          </a:xfrm>
-          <a:prstGeom prst="rect">
-            <a:avLst/>
-          </a:prstGeom>
-          <a:noFill/>
-        </p:spPr>
-        <p:txBody>
-          <a:bodyPr wrap="square" lIns="0" rIns="0" tIns="0" bIns="0">
-            <a:spAutoFit/>
-          </a:bodyPr>
-          <a:lstStyle/>
-          <a:p>
-            <a:pPr>
-              <a:defRPr sz="2400" b="1">
-                <a:solidFill>
-                  <a:srgbClr val="FFFFFF"/>
-                </a:solidFill>
-                <a:latin typeface="Helvetica Neue"/>
-              </a:defRPr>
-            </a:pPr>
-            <a:r>
-              <a:t>Aircraft Weight Buildup &amp; Sizing Convergence</a:t>
-            </a:r>
-          </a:p>
-        </p:txBody>
-      </p:sp>
-      <p:sp>
-        <p:nvSpPr>
-          <p:cNvPr id="4" name="Rounded Rectangle 3"/>
-          <p:cNvSpPr/>
-          <p:nvPr/>
-        </p:nvSpPr>
-        <p:spPr>
-          <a:xfrm>
-            <a:off x="731520" y="1280160"/>
-            <a:ext cx="6217920" cy="5029200"/>
-          </a:xfrm>
-          <a:prstGeom prst="roundRect">
-            <a:avLst/>
-          </a:prstGeom>
-          <a:solidFill>
-            <a:srgbClr val="111C35"/>
-          </a:solidFill>
-          <a:ln w="15240">
-            <a:solidFill>
-              <a:srgbClr val="1E3A8A"/>
-            </a:solidFill>
-          </a:ln>
-        </p:spPr>
-        <p:style>
-          <a:lnRef idx="1">
-            <a:schemeClr val="accent1"/>
-          </a:lnRef>
-          <a:fillRef idx="3">
-            <a:schemeClr val="accent1"/>
-          </a:fillRef>
-          <a:effectRef idx="2">
-            <a:schemeClr val="accent1"/>
-          </a:effectRef>
-          <a:fontRef idx="minor">
-            <a:schemeClr val="lt1"/>
-          </a:fontRef>
-        </p:style>
-        <p:txBody>
-          <a:bodyPr rtlCol="0" anchor="ctr"/>
-          <a:lstStyle/>
-          <a:p>
-            <a:pPr algn="ctr"/>
-          </a:p>
-        </p:txBody>
-      </p:sp>
-      <p:sp>
-        <p:nvSpPr>
-          <p:cNvPr id="5" name="TextBox 4"/>
-          <p:cNvSpPr txBox="1"/>
-          <p:nvPr/>
-        </p:nvSpPr>
-        <p:spPr>
-          <a:xfrm>
-            <a:off x="914400" y="1463040"/>
-            <a:ext cx="5852160" cy="4663440"/>
-          </a:xfrm>
-          <a:prstGeom prst="rect">
-            <a:avLst/>
-          </a:prstGeom>
-          <a:noFill/>
-        </p:spPr>
-        <p:txBody>
-          <a:bodyPr wrap="square">
-            <a:spAutoFit/>
-          </a:bodyPr>
-          <a:lstStyle/>
-          <a:p>
-            <a:pPr>
-              <a:defRPr sz="1350" b="1">
-                <a:solidFill>
-                  <a:srgbClr val="38BDF8"/>
-                </a:solidFill>
-                <a:latin typeface="Helvetica Neue"/>
-              </a:defRPr>
-            </a:pPr>
-            <a:r>
-              <a:t>Mass Breakdown (Converged Sizing Model):</a:t>
-            </a:r>
-          </a:p>
-          <a:p>
-            <a:pPr>
-              <a:defRPr sz="1050" b="1">
-                <a:solidFill>
-                  <a:srgbClr val="FACC15"/>
-                </a:solidFill>
-                <a:latin typeface="Arial"/>
-              </a:defRPr>
-            </a:pPr>
-            <a:r>
-              <a:t>• Maximum Take-Off Weight (MTOW)       : 235,460 kg (235.5 t)  (100.0%)</a:t>
-            </a:r>
-          </a:p>
-          <a:p>
-            <a:pPr>
-              <a:defRPr sz="1050" b="1">
-                <a:solidFill>
-                  <a:srgbClr val="FACC15"/>
-                </a:solidFill>
-                <a:latin typeface="Arial"/>
-              </a:defRPr>
-            </a:pPr>
-            <a:r>
-              <a:t>• Operating Empty Weight (OEW / We)    : 155,600 kg (155.6 t)  (66.0%)</a:t>
-            </a:r>
-          </a:p>
-          <a:p>
-            <a:pPr>
-              <a:defRPr sz="1050" b="0">
-                <a:solidFill>
-                  <a:srgbClr val="E2E8F0"/>
-                </a:solidFill>
-                <a:latin typeface="Courier New"/>
-              </a:defRPr>
-            </a:pPr>
-            <a:r>
-              <a:t>•   • Baseline Airframe &amp; Systems      : 120,200 kg (120.2 t)  (51.0%)</a:t>
-            </a:r>
-          </a:p>
-          <a:p>
-            <a:pPr>
-              <a:defRPr sz="1050" b="0">
-                <a:solidFill>
-                  <a:srgbClr val="E2E8F0"/>
-                </a:solidFill>
-                <a:latin typeface="Courier New"/>
-              </a:defRPr>
-            </a:pPr>
-            <a:r>
-              <a:t>•   • Cryogenic LH2 Tanks (6 Tanks)    : 35,400 kg (35.4 t)  (15.0%)</a:t>
-            </a:r>
-          </a:p>
-          <a:p>
-            <a:pPr>
-              <a:defRPr sz="1050" b="0">
-                <a:solidFill>
-                  <a:srgbClr val="E2E8F0"/>
-                </a:solidFill>
-                <a:latin typeface="Arial"/>
-              </a:defRPr>
-            </a:pPr>
-            <a:r>
-              <a:t>• Design Payload (430 Pax + Cargo)     : 53,750 kg (53.8 t)  (22.8%)</a:t>
-            </a:r>
-          </a:p>
-          <a:p>
-            <a:pPr>
-              <a:defRPr sz="1050" b="0">
-                <a:solidFill>
-                  <a:srgbClr val="E2E8F0"/>
-                </a:solidFill>
-                <a:latin typeface="Arial"/>
-              </a:defRPr>
-            </a:pPr>
-            <a:r>
-              <a:t>• Usable Liquid Hydrogen Fuel          : 24,850 to 39,330 kg  (~11–17%)</a:t>
-            </a:r>
-          </a:p>
-          <a:p>
-            <a:pPr>
-              <a:defRPr sz="1050" b="0">
-                <a:solidFill>
-                  <a:srgbClr val="E2E8F0"/>
-                </a:solidFill>
-                <a:latin typeface="Arial"/>
-              </a:defRPr>
-            </a:pPr>
-            <a:r>
-              <a:t>• Flight &amp; Cabin Crew (12 Crew)        :  1,260 kg (1.26 t)  (0.5%)</a:t>
-            </a:r>
-          </a:p>
-        </p:txBody>
-      </p:sp>
-      <p:sp>
-        <p:nvSpPr>
-          <p:cNvPr id="6" name="Rounded Rectangle 5"/>
-          <p:cNvSpPr/>
-          <p:nvPr/>
-        </p:nvSpPr>
-        <p:spPr>
-          <a:xfrm>
-            <a:off x="7132320" y="1280160"/>
-            <a:ext cx="4327855" cy="5029200"/>
-          </a:xfrm>
-          <a:prstGeom prst="roundRect">
-            <a:avLst/>
-          </a:prstGeom>
-          <a:solidFill>
-            <a:srgbClr val="111C35"/>
-          </a:solidFill>
-          <a:ln w="15240">
-            <a:solidFill>
-              <a:srgbClr val="1E3A8A"/>
-            </a:solidFill>
-          </a:ln>
-        </p:spPr>
-        <p:style>
-          <a:lnRef idx="1">
-            <a:schemeClr val="accent1"/>
-          </a:lnRef>
-          <a:fillRef idx="3">
-            <a:schemeClr val="accent1"/>
-          </a:fillRef>
-          <a:effectRef idx="2">
-            <a:schemeClr val="accent1"/>
-          </a:effectRef>
-          <a:fontRef idx="minor">
-            <a:schemeClr val="lt1"/>
-          </a:fontRef>
-        </p:style>
-        <p:txBody>
-          <a:bodyPr rtlCol="0" anchor="ctr"/>
-          <a:lstStyle/>
-          <a:p>
-            <a:pPr algn="ctr"/>
-          </a:p>
-        </p:txBody>
-      </p:sp>
-      <p:sp>
-        <p:nvSpPr>
-          <p:cNvPr id="7" name="TextBox 6"/>
-          <p:cNvSpPr txBox="1"/>
-          <p:nvPr/>
-        </p:nvSpPr>
-        <p:spPr>
-          <a:xfrm>
-            <a:off x="7315200" y="1463040"/>
-            <a:ext cx="3962095" cy="4663440"/>
-          </a:xfrm>
-          <a:prstGeom prst="rect">
-            <a:avLst/>
-          </a:prstGeom>
-          <a:noFill/>
-        </p:spPr>
-        <p:txBody>
-          <a:bodyPr wrap="square">
-            <a:spAutoFit/>
-          </a:bodyPr>
-          <a:lstStyle/>
-          <a:p>
-            <a:pPr>
-              <a:defRPr sz="1350" b="1">
-                <a:solidFill>
-                  <a:srgbClr val="10B981"/>
-                </a:solidFill>
-                <a:latin typeface="Helvetica Neue"/>
-              </a:defRPr>
-            </a:pPr>
-            <a:r>
-              <a:t>Cryotank Gravimetric Sizing:</a:t>
-            </a:r>
-          </a:p>
-          <a:p>
-            <a:pPr>
-              <a:defRPr sz="1100">
-                <a:solidFill>
-                  <a:srgbClr val="E2E8F0"/>
-                </a:solidFill>
-                <a:latin typeface="Arial"/>
-              </a:defRPr>
-            </a:pPr>
-            <a:r>
-              <a:t>• Gravimetric Index (Gi = 0.50):</a:t>
-            </a:r>
-            <a:br/>
-            <a:r>
-              <a:t>   Gi = M_fuel / (M_fuel + M_tank)</a:t>
-            </a:r>
-            <a:br/>
-            <a:r>
-              <a:t>   Dry tank structural mass equals fuel mass.</a:t>
-            </a:r>
-            <a:br/>
-            <a:br/>
-            <a:r>
-              <a:t>• 6 Cylindrical Vessels:</a:t>
-            </a:r>
-            <a:br/>
-            <a:r>
-              <a:t>   4 Wing Shoulder + 2 Aft Core tanks.</a:t>
-            </a:r>
-            <a:br/>
-            <a:r>
-              <a:t>   Average Dry Mass = 5,900 kg / tank.</a:t>
-            </a:r>
-            <a:br/>
-            <a:br/>
-            <a:r>
-              <a:t>• Thermal &amp; Pressure Boundary:</a:t>
-            </a:r>
-            <a:br/>
-            <a:r>
-              <a:t>   - 20.3 K (-253 °C) liquid temperature</a:t>
-            </a:r>
-            <a:br/>
-            <a:r>
-              <a:t>   - 2.0 bar operating pressure</a:t>
-            </a:r>
-            <a:br/>
-            <a:r>
-              <a:t>   - Double-walled Multi-Layer Insulation (MLI) with evacuated vacuum jacket.</a:t>
-            </a:r>
-          </a:p>
-        </p:txBody>
-      </p:sp>
-    </p:spTree>
-  </p:cSld>
-  <p:clrMapOvr>
-    <a:masterClrMapping/>
-  </p:clrMapOvr>
-</p:sld>
-</file>
-
-<file path=ppt/slides/slide7.xml><?xml version="1.0" encoding="utf-8"?>
-<p:sld xmlns:a="http://schemas.openxmlformats.org/drawingml/2006/main" xmlns:p="http://schemas.openxmlformats.org/presentationml/2006/main" xmlns:r="http://schemas.openxmlformats.org/officeDocument/2006/relationships">
-  <p:cSld>
-    <p:bg>
-      <p:bgPr>
-        <a:solidFill>
-          <a:srgbClr val="0A0F1D"/>
-        </a:solidFill>
-        <a:effectLst/>
-      </p:bgPr>
-    </p:bg>
-    <p:spTree>
-      <p:nvGrpSpPr>
-        <p:cNvPr id="1" name=""/>
-        <p:cNvGrpSpPr/>
-        <p:nvPr/>
-      </p:nvGrpSpPr>
-      <p:grpSpPr/>
-      <p:sp>
-        <p:nvSpPr>
-          <p:cNvPr id="2" name="TextBox 1"/>
-          <p:cNvSpPr txBox="1"/>
-          <p:nvPr/>
-        </p:nvSpPr>
-        <p:spPr>
-          <a:xfrm>
-            <a:off x="731520" y="365760"/>
-            <a:ext cx="10698480" cy="274320"/>
-          </a:xfrm>
-          <a:prstGeom prst="rect">
-            <a:avLst/>
-          </a:prstGeom>
-          <a:noFill/>
-        </p:spPr>
-        <p:txBody>
-          <a:bodyPr wrap="square" lIns="0" rIns="0" tIns="0" bIns="0">
-            <a:spAutoFit/>
-          </a:bodyPr>
-          <a:lstStyle/>
-          <a:p>
-            <a:pPr>
-              <a:defRPr sz="1000" b="1">
-                <a:solidFill>
-                  <a:srgbClr val="38BDF8"/>
-                </a:solidFill>
-                <a:latin typeface="Arial"/>
-              </a:defRPr>
-            </a:pPr>
-            <a:r>
-              <a:t>MMS236 AIRCRAFT DESIGN | GROUP 13</a:t>
-            </a:r>
-          </a:p>
-        </p:txBody>
-      </p:sp>
-      <p:sp>
-        <p:nvSpPr>
-          <p:cNvPr id="3" name="TextBox 2"/>
-          <p:cNvSpPr txBox="1"/>
-          <p:nvPr/>
-        </p:nvSpPr>
-        <p:spPr>
-          <a:xfrm>
-            <a:off x="731520" y="621792"/>
-            <a:ext cx="10698480" cy="548640"/>
-          </a:xfrm>
-          <a:prstGeom prst="rect">
-            <a:avLst/>
-          </a:prstGeom>
-          <a:noFill/>
-        </p:spPr>
-        <p:txBody>
-          <a:bodyPr wrap="square" lIns="0" rIns="0" tIns="0" bIns="0">
-            <a:spAutoFit/>
-          </a:bodyPr>
-          <a:lstStyle/>
-          <a:p>
-            <a:pPr>
-              <a:defRPr sz="2400" b="1">
-                <a:solidFill>
-                  <a:srgbClr val="FFFFFF"/>
-                </a:solidFill>
-                <a:latin typeface="Helvetica Neue"/>
-              </a:defRPr>
-            </a:pPr>
-            <a:r>
-              <a:t>The Concept: 80m Blended Wing Body Digital Blueprint</a:t>
-            </a:r>
-          </a:p>
-        </p:txBody>
-      </p:sp>
-      <p:sp>
-        <p:nvSpPr>
-          <p:cNvPr id="4" name="Rounded Rectangle 3"/>
-          <p:cNvSpPr/>
-          <p:nvPr/>
-        </p:nvSpPr>
-        <p:spPr>
-          <a:xfrm>
-            <a:off x="731520" y="1234440"/>
-            <a:ext cx="10728655" cy="5120640"/>
-          </a:xfrm>
-          <a:prstGeom prst="roundRect">
-            <a:avLst/>
-          </a:prstGeom>
-          <a:solidFill>
-            <a:srgbClr val="111C35"/>
-          </a:solidFill>
-          <a:ln w="15240">
-            <a:solidFill>
-              <a:srgbClr val="1E3A8A"/>
-            </a:solidFill>
-          </a:ln>
-        </p:spPr>
-        <p:style>
-          <a:lnRef idx="1">
-            <a:schemeClr val="accent1"/>
-          </a:lnRef>
-          <a:fillRef idx="3">
-            <a:schemeClr val="accent1"/>
-          </a:fillRef>
-          <a:effectRef idx="2">
-            <a:schemeClr val="accent1"/>
-          </a:effectRef>
-          <a:fontRef idx="minor">
-            <a:schemeClr val="lt1"/>
-          </a:fontRef>
-        </p:style>
-        <p:txBody>
-          <a:bodyPr rtlCol="0" anchor="ctr"/>
-          <a:lstStyle/>
-          <a:p>
-            <a:pPr algn="ctr"/>
-          </a:p>
-        </p:txBody>
-      </p:sp>
-      <p:pic>
-        <p:nvPicPr>
-          <p:cNvPr id="5" name="Picture 4" descr="image4.jpeg"/>
-          <p:cNvPicPr>
-            <a:picLocks noChangeAspect="1"/>
-          </p:cNvPicPr>
-          <p:nvPr/>
-        </p:nvPicPr>
-        <p:blipFill>
-          <a:blip r:embed="rId2"/>
-          <a:stretch>
-            <a:fillRect/>
-          </a:stretch>
-        </p:blipFill>
-        <p:spPr>
-          <a:xfrm>
-            <a:off x="1005840" y="1325880"/>
-            <a:ext cx="10180015" cy="7601078"/>
-          </a:xfrm>
-          <a:prstGeom prst="rect">
-            <a:avLst/>
-          </a:prstGeom>
-        </p:spPr>
-      </p:pic>
-    </p:spTree>
-  </p:cSld>
-  <p:clrMapOvr>
-    <a:masterClrMapping/>
-  </p:clrMapOvr>
-</p:sld>
-</file>
-
-<file path=ppt/slides/slide8.xml><?xml version="1.0" encoding="utf-8"?>
-<p:sld xmlns:a="http://schemas.openxmlformats.org/drawingml/2006/main" xmlns:p="http://schemas.openxmlformats.org/presentationml/2006/main" xmlns:r="http://schemas.openxmlformats.org/officeDocument/2006/relationships">
-  <p:cSld>
-    <p:bg>
-      <p:bgPr>
-        <a:solidFill>
-          <a:srgbClr val="0A0F1D"/>
-        </a:solidFill>
-        <a:effectLst/>
-      </p:bgPr>
-    </p:bg>
-    <p:spTree>
-      <p:nvGrpSpPr>
-        <p:cNvPr id="1" name=""/>
-        <p:cNvGrpSpPr/>
-        <p:nvPr/>
-      </p:nvGrpSpPr>
-      <p:grpSpPr/>
-      <p:sp>
-        <p:nvSpPr>
-          <p:cNvPr id="2" name="TextBox 1"/>
-          <p:cNvSpPr txBox="1"/>
-          <p:nvPr/>
-        </p:nvSpPr>
-        <p:spPr>
-          <a:xfrm>
-            <a:off x="731520" y="365760"/>
-            <a:ext cx="10698480" cy="274320"/>
-          </a:xfrm>
-          <a:prstGeom prst="rect">
-            <a:avLst/>
-          </a:prstGeom>
-          <a:noFill/>
-        </p:spPr>
-        <p:txBody>
-          <a:bodyPr wrap="square" lIns="0" rIns="0" tIns="0" bIns="0">
-            <a:spAutoFit/>
-          </a:bodyPr>
-          <a:lstStyle/>
-          <a:p>
-            <a:pPr>
-              <a:defRPr sz="1000" b="1">
-                <a:solidFill>
-                  <a:srgbClr val="38BDF8"/>
-                </a:solidFill>
-                <a:latin typeface="Arial"/>
-              </a:defRPr>
-            </a:pPr>
-            <a:r>
-              <a:t>MMS236 AIRCRAFT DESIGN | GROUP 13</a:t>
-            </a:r>
-          </a:p>
-        </p:txBody>
-      </p:sp>
-      <p:sp>
-        <p:nvSpPr>
-          <p:cNvPr id="3" name="TextBox 2"/>
-          <p:cNvSpPr txBox="1"/>
-          <p:nvPr/>
-        </p:nvSpPr>
-        <p:spPr>
-          <a:xfrm>
-            <a:off x="731520" y="621792"/>
-            <a:ext cx="10698480" cy="548640"/>
-          </a:xfrm>
-          <a:prstGeom prst="rect">
-            <a:avLst/>
-          </a:prstGeom>
-          <a:noFill/>
-        </p:spPr>
-        <p:txBody>
-          <a:bodyPr wrap="square" lIns="0" rIns="0" tIns="0" bIns="0">
-            <a:spAutoFit/>
-          </a:bodyPr>
-          <a:lstStyle/>
-          <a:p>
-            <a:pPr>
-              <a:defRPr sz="2400" b="1">
-                <a:solidFill>
-                  <a:srgbClr val="FFFFFF"/>
-                </a:solidFill>
-                <a:latin typeface="Helvetica Neue"/>
-              </a:defRPr>
-            </a:pPr>
-            <a:r>
-              <a:t>3D Parametric CAD Model &amp; Surface Mesh (OpenVSP 3.51.3)</a:t>
-            </a:r>
-          </a:p>
-        </p:txBody>
-      </p:sp>
-      <p:sp>
-        <p:nvSpPr>
-          <p:cNvPr id="4" name="Rounded Rectangle 3"/>
-          <p:cNvSpPr/>
-          <p:nvPr/>
-        </p:nvSpPr>
-        <p:spPr>
-          <a:xfrm>
-            <a:off x="731520" y="1234440"/>
-            <a:ext cx="10728655" cy="5120640"/>
-          </a:xfrm>
-          <a:prstGeom prst="roundRect">
-            <a:avLst/>
-          </a:prstGeom>
-          <a:solidFill>
-            <a:srgbClr val="111C35"/>
-          </a:solidFill>
-          <a:ln w="15240">
-            <a:solidFill>
-              <a:srgbClr val="1E3A8A"/>
-            </a:solidFill>
-          </a:ln>
-        </p:spPr>
-        <p:style>
-          <a:lnRef idx="1">
-            <a:schemeClr val="accent1"/>
-          </a:lnRef>
-          <a:fillRef idx="3">
-            <a:schemeClr val="accent1"/>
-          </a:fillRef>
-          <a:effectRef idx="2">
-            <a:schemeClr val="accent1"/>
-          </a:effectRef>
-          <a:fontRef idx="minor">
-            <a:schemeClr val="lt1"/>
-          </a:fontRef>
-        </p:style>
-        <p:txBody>
-          <a:bodyPr rtlCol="0" anchor="ctr"/>
-          <a:lstStyle/>
-          <a:p>
-            <a:pPr algn="ctr"/>
-          </a:p>
-        </p:txBody>
-      </p:sp>
-      <p:pic>
-        <p:nvPicPr>
-          <p:cNvPr id="5" name="Picture 4" descr="exaelia_bwb_80m_3d_views.png"/>
-          <p:cNvPicPr>
-            <a:picLocks noChangeAspect="1"/>
-          </p:cNvPicPr>
-          <p:nvPr/>
-        </p:nvPicPr>
-        <p:blipFill>
-          <a:blip r:embed="rId2"/>
-          <a:stretch>
-            <a:fillRect/>
-          </a:stretch>
-        </p:blipFill>
-        <p:spPr>
-          <a:xfrm>
-            <a:off x="960120" y="1325880"/>
-            <a:ext cx="10271455" cy="7298139"/>
-          </a:xfrm>
-          <a:prstGeom prst="rect">
-            <a:avLst/>
-          </a:prstGeom>
-        </p:spPr>
-      </p:pic>
-    </p:spTree>
-  </p:cSld>
-  <p:clrMapOvr>
-    <a:masterClrMapping/>
-  </p:clrMapOvr>
-</p:sld>
-</file>
-
-<file path=ppt/slides/slide9.xml><?xml version="1.0" encoding="utf-8"?>
-<p:sld xmlns:a="http://schemas.openxmlformats.org/drawingml/2006/main" xmlns:p="http://schemas.openxmlformats.org/presentationml/2006/main" xmlns:r="http://schemas.openxmlformats.org/officeDocument/2006/relationships">
-  <p:cSld>
-    <p:bg>
-      <p:bgPr>
-        <a:solidFill>
-          <a:srgbClr val="0A0F1D"/>
-        </a:solidFill>
-        <a:effectLst/>
-      </p:bgPr>
-    </p:bg>
-    <p:spTree>
-      <p:nvGrpSpPr>
-        <p:cNvPr id="1" name=""/>
-        <p:cNvGrpSpPr/>
-        <p:nvPr/>
-      </p:nvGrpSpPr>
-      <p:grpSpPr/>
-      <p:sp>
-        <p:nvSpPr>
-          <p:cNvPr id="2" name="TextBox 1"/>
-          <p:cNvSpPr txBox="1"/>
-          <p:nvPr/>
-        </p:nvSpPr>
-        <p:spPr>
-          <a:xfrm>
-            <a:off x="731520" y="365760"/>
-            <a:ext cx="10698480" cy="274320"/>
-          </a:xfrm>
-          <a:prstGeom prst="rect">
-            <a:avLst/>
-          </a:prstGeom>
-          <a:noFill/>
-        </p:spPr>
-        <p:txBody>
-          <a:bodyPr wrap="square" lIns="0" rIns="0" tIns="0" bIns="0">
-            <a:spAutoFit/>
-          </a:bodyPr>
-          <a:lstStyle/>
-          <a:p>
-            <a:pPr>
-              <a:defRPr sz="1000" b="1">
-                <a:solidFill>
-                  <a:srgbClr val="38BDF8"/>
-                </a:solidFill>
-                <a:latin typeface="Arial"/>
-              </a:defRPr>
-            </a:pPr>
-            <a:r>
-              <a:t>MMS236 AIRCRAFT DESIGN | GROUP 13</a:t>
-            </a:r>
-          </a:p>
-        </p:txBody>
-      </p:sp>
-      <p:sp>
-        <p:nvSpPr>
-          <p:cNvPr id="3" name="TextBox 2"/>
-          <p:cNvSpPr txBox="1"/>
-          <p:nvPr/>
-        </p:nvSpPr>
-        <p:spPr>
-          <a:xfrm>
-            <a:off x="731520" y="621792"/>
-            <a:ext cx="10698480" cy="548640"/>
-          </a:xfrm>
-          <a:prstGeom prst="rect">
-            <a:avLst/>
-          </a:prstGeom>
-          <a:noFill/>
-        </p:spPr>
-        <p:txBody>
-          <a:bodyPr wrap="square" lIns="0" rIns="0" tIns="0" bIns="0">
-            <a:spAutoFit/>
-          </a:bodyPr>
-          <a:lstStyle/>
-          <a:p>
-            <a:pPr>
-              <a:defRPr sz="2400" b="1">
-                <a:solidFill>
-                  <a:srgbClr val="FFFFFF"/>
-                </a:solidFill>
-                <a:latin typeface="Helvetica Neue"/>
-              </a:defRPr>
-            </a:pPr>
-            <a:r>
-              <a:t>Design Innovations &amp; Future Work (Design Task 2)</a:t>
-            </a:r>
-          </a:p>
-        </p:txBody>
-      </p:sp>
-      <p:sp>
-        <p:nvSpPr>
-          <p:cNvPr id="4" name="Rounded Rectangle 3"/>
-          <p:cNvSpPr/>
-          <p:nvPr/>
-        </p:nvSpPr>
-        <p:spPr>
-          <a:xfrm>
-            <a:off x="731520" y="1280160"/>
-            <a:ext cx="3456432" cy="3108960"/>
-          </a:xfrm>
-          <a:prstGeom prst="roundRect">
-            <a:avLst/>
-          </a:prstGeom>
-          <a:solidFill>
-            <a:srgbClr val="111C35"/>
-          </a:solidFill>
-          <a:ln w="15240">
-            <a:solidFill>
-              <a:srgbClr val="1E3A8A"/>
-            </a:solidFill>
-          </a:ln>
-        </p:spPr>
-        <p:style>
-          <a:lnRef idx="1">
-            <a:schemeClr val="accent1"/>
-          </a:lnRef>
-          <a:fillRef idx="3">
-            <a:schemeClr val="accent1"/>
-          </a:fillRef>
-          <a:effectRef idx="2">
-            <a:schemeClr val="accent1"/>
-          </a:effectRef>
-          <a:fontRef idx="minor">
-            <a:schemeClr val="lt1"/>
-          </a:fontRef>
-        </p:style>
-        <p:txBody>
-          <a:bodyPr rtlCol="0" anchor="ctr"/>
-          <a:lstStyle/>
-          <a:p>
-            <a:pPr algn="ctr"/>
-          </a:p>
-        </p:txBody>
-      </p:sp>
-      <p:sp>
-        <p:nvSpPr>
-          <p:cNvPr id="5" name="TextBox 4"/>
-          <p:cNvSpPr txBox="1"/>
-          <p:nvPr/>
-        </p:nvSpPr>
-        <p:spPr>
-          <a:xfrm>
-            <a:off x="914400" y="1417320"/>
-            <a:ext cx="3090672" cy="2834640"/>
-          </a:xfrm>
-          <a:prstGeom prst="rect">
-            <a:avLst/>
-          </a:prstGeom>
-          <a:noFill/>
-        </p:spPr>
-        <p:txBody>
-          <a:bodyPr wrap="square">
-            <a:spAutoFit/>
-          </a:bodyPr>
-          <a:lstStyle/>
-          <a:p>
-            <a:pPr>
-              <a:defRPr sz="1300" b="1">
-                <a:solidFill>
-                  <a:srgbClr val="38BDF8"/>
-                </a:solidFill>
-                <a:latin typeface="Helvetica Neue"/>
-              </a:defRPr>
-            </a:pPr>
-            <a:r>
-              <a:t>1. Unified Passenger Deck</a:t>
-            </a:r>
-          </a:p>
-          <a:p>
-            <a:pPr>
-              <a:spcBef>
-                <a:spcPts val="600"/>
+                <a:spcPts val="400"/>
               </a:spcBef>
               <a:defRPr sz="1050">
                 <a:solidFill>
-                  <a:srgbClr val="E2E8F0"/>
-                </a:solidFill>
-                <a:latin typeface="Arial"/>
+                  <a:srgbClr val="94A3B8"/>
+                </a:solidFill>
+                <a:latin typeface="Courier New"/>
               </a:defRPr>
             </a:pPr>
             <a:r>
-              <a:t>• 430 Pax widebody theater layout (20m × 14m × 2.4m).</a:t>
-            </a:r>
-            <a:br/>
-            <a:r>
-              <a:t>• 4 continuous aisles with rapid emergency evacuation egress.</a:t>
-            </a:r>
-            <a:br/>
-            <a:r>
-              <a:t>• Eliminates isolated rows while preserving generous stand-up headroom.</a:t>
-            </a:r>
-          </a:p>
-        </p:txBody>
-      </p:sp>
-      <p:sp>
-        <p:nvSpPr>
-          <p:cNvPr id="6" name="Rounded Rectangle 5"/>
-          <p:cNvSpPr/>
-          <p:nvPr/>
-        </p:nvSpPr>
-        <p:spPr>
-          <a:xfrm>
-            <a:off x="4370832" y="1280160"/>
-            <a:ext cx="3456432" cy="3108960"/>
-          </a:xfrm>
-          <a:prstGeom prst="roundRect">
-            <a:avLst/>
-          </a:prstGeom>
-          <a:solidFill>
-            <a:srgbClr val="111C35"/>
-          </a:solidFill>
-          <a:ln w="15240">
-            <a:solidFill>
-              <a:srgbClr val="1E3A8A"/>
-            </a:solidFill>
-          </a:ln>
-        </p:spPr>
-        <p:style>
-          <a:lnRef idx="1">
-            <a:schemeClr val="accent1"/>
-          </a:lnRef>
-          <a:fillRef idx="3">
-            <a:schemeClr val="accent1"/>
-          </a:fillRef>
-          <a:effectRef idx="2">
-            <a:schemeClr val="accent1"/>
-          </a:effectRef>
-          <a:fontRef idx="minor">
-            <a:schemeClr val="lt1"/>
-          </a:fontRef>
-        </p:style>
-        <p:txBody>
-          <a:bodyPr rtlCol="0" anchor="ctr"/>
-          <a:lstStyle/>
-          <a:p>
-            <a:pPr algn="ctr"/>
-          </a:p>
-        </p:txBody>
-      </p:sp>
-      <p:sp>
-        <p:nvSpPr>
-          <p:cNvPr id="7" name="TextBox 6"/>
-          <p:cNvSpPr txBox="1"/>
-          <p:nvPr/>
-        </p:nvSpPr>
-        <p:spPr>
-          <a:xfrm>
-            <a:off x="4553712" y="1417320"/>
-            <a:ext cx="3090672" cy="2834640"/>
-          </a:xfrm>
-          <a:prstGeom prst="rect">
-            <a:avLst/>
-          </a:prstGeom>
-          <a:noFill/>
-        </p:spPr>
-        <p:txBody>
-          <a:bodyPr wrap="square">
-            <a:spAutoFit/>
-          </a:bodyPr>
-          <a:lstStyle/>
-          <a:p>
-            <a:pPr>
-              <a:defRPr sz="1300" b="1">
-                <a:solidFill>
-                  <a:srgbClr val="10B981"/>
-                </a:solidFill>
-                <a:latin typeface="Helvetica Neue"/>
-              </a:defRPr>
-            </a:pPr>
-            <a:r>
-              <a:t>2. Balanced Fuel Packaging</a:t>
-            </a:r>
-          </a:p>
-          <a:p>
-            <a:pPr>
-              <a:spcBef>
-                <a:spcPts val="600"/>
-              </a:spcBef>
-              <a:defRPr sz="1050">
-                <a:solidFill>
-                  <a:srgbClr val="E2E8F0"/>
-                </a:solidFill>
-                <a:latin typeface="Arial"/>
-              </a:defRPr>
-            </a:pPr>
-            <a:r>
-              <a:t>• 6 symmetrical cryotanks placed in wing shoulders and aft core.</a:t>
-            </a:r>
-            <a:br/>
-            <a:r>
-              <a:t>• Minimal CG travel during flight, avoiding trim drag penalties.</a:t>
-            </a:r>
-            <a:br/>
-            <a:r>
-              <a:t>• Total storage volume: 610 m³ liquid hydrogen.</a:t>
-            </a:r>
-          </a:p>
-        </p:txBody>
-      </p:sp>
-      <p:sp>
-        <p:nvSpPr>
-          <p:cNvPr id="8" name="Rounded Rectangle 7"/>
-          <p:cNvSpPr/>
-          <p:nvPr/>
-        </p:nvSpPr>
-        <p:spPr>
-          <a:xfrm>
-            <a:off x="8010144" y="1280160"/>
-            <a:ext cx="3456432" cy="3108960"/>
-          </a:xfrm>
-          <a:prstGeom prst="roundRect">
-            <a:avLst/>
-          </a:prstGeom>
-          <a:solidFill>
-            <a:srgbClr val="111C35"/>
-          </a:solidFill>
-          <a:ln w="15240">
-            <a:solidFill>
-              <a:srgbClr val="1E3A8A"/>
-            </a:solidFill>
-          </a:ln>
-        </p:spPr>
-        <p:style>
-          <a:lnRef idx="1">
-            <a:schemeClr val="accent1"/>
-          </a:lnRef>
-          <a:fillRef idx="3">
-            <a:schemeClr val="accent1"/>
-          </a:fillRef>
-          <a:effectRef idx="2">
-            <a:schemeClr val="accent1"/>
-          </a:effectRef>
-          <a:fontRef idx="minor">
-            <a:schemeClr val="lt1"/>
-          </a:fontRef>
-        </p:style>
-        <p:txBody>
-          <a:bodyPr rtlCol="0" anchor="ctr"/>
-          <a:lstStyle/>
-          <a:p>
-            <a:pPr algn="ctr"/>
-          </a:p>
-        </p:txBody>
-      </p:sp>
-      <p:sp>
-        <p:nvSpPr>
-          <p:cNvPr id="9" name="TextBox 8"/>
-          <p:cNvSpPr txBox="1"/>
-          <p:nvPr/>
-        </p:nvSpPr>
-        <p:spPr>
-          <a:xfrm>
-            <a:off x="8193024" y="1417320"/>
-            <a:ext cx="3090672" cy="2834640"/>
-          </a:xfrm>
-          <a:prstGeom prst="rect">
-            <a:avLst/>
-          </a:prstGeom>
-          <a:noFill/>
-        </p:spPr>
-        <p:txBody>
-          <a:bodyPr wrap="square">
-            <a:spAutoFit/>
-          </a:bodyPr>
-          <a:lstStyle/>
-          <a:p>
-            <a:pPr>
-              <a:defRPr sz="1300" b="1">
-                <a:solidFill>
-                  <a:srgbClr val="FACC15"/>
-                </a:solidFill>
-                <a:latin typeface="Helvetica Neue"/>
-              </a:defRPr>
-            </a:pPr>
-            <a:r>
-              <a:t>3. Acoustic Shielding &amp; Ops</a:t>
-            </a:r>
-          </a:p>
-          <a:p>
-            <a:pPr>
-              <a:spcBef>
-                <a:spcPts val="600"/>
-              </a:spcBef>
-              <a:defRPr sz="1050">
-                <a:solidFill>
-                  <a:srgbClr val="E2E8F0"/>
-                </a:solidFill>
-                <a:latin typeface="Arial"/>
-              </a:defRPr>
-            </a:pPr>
-            <a:r>
-              <a:t>• Twin top-mounted turbofans shielded by upper aft deck.</a:t>
-            </a:r>
-            <a:br/>
-            <a:r>
-              <a:t>• 80m span strictly respects ICAO Code F airport infrastructure.</a:t>
-            </a:r>
-            <a:br/>
-            <a:r>
-              <a:t>• 3-point heavy landing gear ensures ground clearance.</a:t>
-            </a:r>
-          </a:p>
-        </p:txBody>
-      </p:sp>
-      <p:sp>
-        <p:nvSpPr>
-          <p:cNvPr id="10" name="Rounded Rectangle 9"/>
-          <p:cNvSpPr/>
-          <p:nvPr/>
-        </p:nvSpPr>
-        <p:spPr>
-          <a:xfrm>
-            <a:off x="731520" y="4572000"/>
-            <a:ext cx="10728655" cy="1737360"/>
-          </a:xfrm>
-          <a:prstGeom prst="roundRect">
-            <a:avLst/>
-          </a:prstGeom>
-          <a:solidFill>
-            <a:srgbClr val="111C35"/>
-          </a:solidFill>
-          <a:ln w="15240">
-            <a:solidFill>
-              <a:srgbClr val="1E3A8A"/>
-            </a:solidFill>
-          </a:ln>
-        </p:spPr>
-        <p:style>
-          <a:lnRef idx="1">
-            <a:schemeClr val="accent1"/>
-          </a:lnRef>
-          <a:fillRef idx="3">
-            <a:schemeClr val="accent1"/>
-          </a:fillRef>
-          <a:effectRef idx="2">
-            <a:schemeClr val="accent1"/>
-          </a:effectRef>
-          <a:fontRef idx="minor">
-            <a:schemeClr val="lt1"/>
-          </a:fontRef>
-        </p:style>
-        <p:txBody>
-          <a:bodyPr rtlCol="0" anchor="ctr"/>
-          <a:lstStyle/>
-          <a:p>
-            <a:pPr algn="ctr"/>
-          </a:p>
-        </p:txBody>
-      </p:sp>
-      <p:sp>
-        <p:nvSpPr>
-          <p:cNvPr id="11" name="TextBox 10"/>
-          <p:cNvSpPr txBox="1"/>
-          <p:nvPr/>
-        </p:nvSpPr>
-        <p:spPr>
-          <a:xfrm>
-            <a:off x="914400" y="4709160"/>
-            <a:ext cx="10362895" cy="1463040"/>
-          </a:xfrm>
-          <a:prstGeom prst="rect">
-            <a:avLst/>
-          </a:prstGeom>
-          <a:noFill/>
-        </p:spPr>
-        <p:txBody>
-          <a:bodyPr wrap="square">
-            <a:spAutoFit/>
-          </a:bodyPr>
-          <a:lstStyle/>
-          <a:p>
-            <a:pPr>
-              <a:defRPr sz="1250" b="1">
-                <a:solidFill>
-                  <a:srgbClr val="FFFFFF"/>
-                </a:solidFill>
-                <a:latin typeface="Helvetica Neue"/>
-              </a:defRPr>
-            </a:pPr>
-            <a:r>
-              <a:t>Roadmap for Design Task 2 (DT2 Detailed Aerodynamics &amp; Structure):</a:t>
-            </a:r>
-          </a:p>
-          <a:p>
-            <a:pPr>
-              <a:defRPr sz="1050">
-                <a:solidFill>
-                  <a:srgbClr val="E2E8F0"/>
-                </a:solidFill>
-                <a:latin typeface="Arial"/>
-              </a:defRPr>
-            </a:pPr>
-            <a:r>
-              <a:t>• 3D High-Fidelity CFD in Siemens STAR-CCM+ to validate transonic cruise polars (M0.85, Re = 45M).</a:t>
-            </a:r>
-            <a:br/>
-            <a:r>
-              <a:t>• Finite Element Structural Optimization for multi-bubble pressurized cabin bulkheads and wing spars.</a:t>
-            </a:r>
-            <a:br/>
-            <a:r>
-              <a:t>• Dynamic Stability &amp; Control evaluation with winglet rudders and elevon sizing.</a:t>
+              <a:t>https://www.sciencedirect.com/science/article/pii/S036031992404535X#bib87</a:t>
             </a:r>
           </a:p>
         </p:txBody>

--- a/Aircraft_Design_DT1_EXAELIA_Group13.pptx
+++ b/Aircraft_Design_DT1_EXAELIA_Group13.pptx
@@ -3451,8 +3451,8 @@
         </p:nvSpPr>
         <p:spPr>
           <a:xfrm>
-            <a:off x="4114800" y="1371600"/>
-            <a:ext cx="3962095" cy="4754880"/>
+            <a:off x="4297680" y="1371600"/>
+            <a:ext cx="3596335" cy="4572000"/>
           </a:xfrm>
           <a:prstGeom prst="roundRect">
             <a:avLst/>
@@ -3504,8 +3504,8 @@
         </p:blipFill>
         <p:spPr>
           <a:xfrm>
-            <a:off x="4297680" y="1508760"/>
-            <a:ext cx="3596335" cy="5083696"/>
+            <a:off x="4480560" y="1463040"/>
+            <a:ext cx="3104975" cy="4389120"/>
           </a:xfrm>
           <a:prstGeom prst="rect">
             <a:avLst/>
@@ -3520,7 +3520,7 @@
         </p:nvSpPr>
         <p:spPr>
           <a:xfrm>
-            <a:off x="822960" y="6263640"/>
+            <a:off x="822960" y="6172200"/>
             <a:ext cx="10545775" cy="320040"/>
           </a:xfrm>
           <a:prstGeom prst="rect">
@@ -3654,8 +3654,8 @@
         </p:nvSpPr>
         <p:spPr>
           <a:xfrm>
-            <a:off x="2560320" y="1371600"/>
-            <a:ext cx="7071055" cy="4663440"/>
+            <a:off x="3017520" y="1371600"/>
+            <a:ext cx="6156655" cy="4572000"/>
           </a:xfrm>
           <a:prstGeom prst="roundRect">
             <a:avLst/>
@@ -3707,8 +3707,8 @@
         </p:blipFill>
         <p:spPr>
           <a:xfrm>
-            <a:off x="2834640" y="1536192"/>
-            <a:ext cx="6522415" cy="5104499"/>
+            <a:off x="3346704" y="1508760"/>
+            <a:ext cx="5491480" cy="4297680"/>
           </a:xfrm>
           <a:prstGeom prst="rect">
             <a:avLst/>
@@ -3723,7 +3723,7 @@
         </p:nvSpPr>
         <p:spPr>
           <a:xfrm>
-            <a:off x="822960" y="6263640"/>
+            <a:off x="822960" y="6172200"/>
             <a:ext cx="10545775" cy="320040"/>
           </a:xfrm>
           <a:prstGeom prst="rect">
@@ -3858,7 +3858,7 @@
         <p:spPr>
           <a:xfrm>
             <a:off x="822960" y="1371600"/>
-            <a:ext cx="6035040" cy="4754880"/>
+            <a:ext cx="6035040" cy="4572000"/>
           </a:xfrm>
           <a:prstGeom prst="roundRect">
             <a:avLst/>
@@ -3910,7 +3910,7 @@
         </p:blipFill>
         <p:spPr>
           <a:xfrm>
-            <a:off x="1051560" y="1691640"/>
+            <a:off x="1051560" y="1600200"/>
             <a:ext cx="5577840" cy="3718560"/>
           </a:xfrm>
           <a:prstGeom prst="rect">
@@ -3927,7 +3927,7 @@
         <p:spPr>
           <a:xfrm>
             <a:off x="7132320" y="1371600"/>
-            <a:ext cx="4236415" cy="2240280"/>
+            <a:ext cx="4236415" cy="2148840"/>
           </a:xfrm>
           <a:prstGeom prst="roundRect">
             <a:avLst/>
@@ -3971,7 +3971,7 @@
         </p:nvSpPr>
         <p:spPr>
           <a:xfrm>
-            <a:off x="7406640" y="1600200"/>
+            <a:off x="7406640" y="1554480"/>
             <a:ext cx="3657600" cy="1737360"/>
           </a:xfrm>
           <a:prstGeom prst="rect">
@@ -4000,9 +4000,9 @@
           <a:p>
             <a:pPr>
               <a:spcBef>
-                <a:spcPts val="400"/>
+                <a:spcPts val="300"/>
               </a:spcBef>
-              <a:defRPr sz="3200" b="1">
+              <a:defRPr sz="3000" b="1">
                 <a:solidFill>
                   <a:srgbClr val="F8FAFC"/>
                 </a:solidFill>
@@ -4016,7 +4016,7 @@
           <a:p>
             <a:pPr>
               <a:spcBef>
-                <a:spcPts val="400"/>
+                <a:spcPts val="300"/>
               </a:spcBef>
               <a:defRPr sz="1100">
                 <a:solidFill>
@@ -4039,8 +4039,8 @@
         </p:nvSpPr>
         <p:spPr>
           <a:xfrm>
-            <a:off x="7132320" y="3886200"/>
-            <a:ext cx="4236415" cy="2240280"/>
+            <a:off x="7132320" y="3794760"/>
+            <a:ext cx="4236415" cy="2148840"/>
           </a:xfrm>
           <a:prstGeom prst="roundRect">
             <a:avLst/>
@@ -4084,7 +4084,7 @@
         </p:nvSpPr>
         <p:spPr>
           <a:xfrm>
-            <a:off x="7406640" y="4114800"/>
+            <a:off x="7406640" y="3977639"/>
             <a:ext cx="3657600" cy="1737360"/>
           </a:xfrm>
           <a:prstGeom prst="rect">
@@ -4113,9 +4113,9 @@
           <a:p>
             <a:pPr>
               <a:spcBef>
-                <a:spcPts val="400"/>
+                <a:spcPts val="300"/>
               </a:spcBef>
-              <a:defRPr sz="3600" b="1">
+              <a:defRPr sz="3400" b="1">
                 <a:solidFill>
                   <a:srgbClr val="38BDF8"/>
                 </a:solidFill>
@@ -4129,7 +4129,7 @@
           <a:p>
             <a:pPr>
               <a:spcBef>
-                <a:spcPts val="400"/>
+                <a:spcPts val="300"/>
               </a:spcBef>
               <a:defRPr sz="1100">
                 <a:solidFill>
@@ -4251,7 +4251,7 @@
         <p:spPr>
           <a:xfrm>
             <a:off x="822960" y="1371600"/>
-            <a:ext cx="5150815" cy="2240280"/>
+            <a:ext cx="5150815" cy="2148840"/>
           </a:xfrm>
           <a:prstGeom prst="roundRect">
             <a:avLst/>
@@ -4295,7 +4295,7 @@
         </p:nvSpPr>
         <p:spPr>
           <a:xfrm>
-            <a:off x="1188720" y="1691640"/>
+            <a:off x="1188720" y="1645920"/>
             <a:ext cx="4389120" cy="1600200"/>
           </a:xfrm>
           <a:prstGeom prst="rect">
@@ -4326,7 +4326,7 @@
               <a:spcBef>
                 <a:spcPts val="200"/>
               </a:spcBef>
-              <a:defRPr sz="4000" b="1">
+              <a:defRPr sz="3800" b="1">
                 <a:solidFill>
                   <a:srgbClr val="F8FAFC"/>
                 </a:solidFill>
@@ -4340,9 +4340,9 @@
           <a:p>
             <a:pPr>
               <a:spcBef>
-                <a:spcPts val="400"/>
+                <a:spcPts val="300"/>
               </a:spcBef>
-              <a:defRPr sz="1200">
+              <a:defRPr sz="1150">
                 <a:solidFill>
                   <a:srgbClr val="CBD5E1"/>
                 </a:solidFill>
@@ -4364,7 +4364,7 @@
         <p:spPr>
           <a:xfrm>
             <a:off x="6217920" y="1371600"/>
-            <a:ext cx="5150815" cy="2240280"/>
+            <a:ext cx="5150815" cy="2148840"/>
           </a:xfrm>
           <a:prstGeom prst="roundRect">
             <a:avLst/>
@@ -4408,7 +4408,7 @@
         </p:nvSpPr>
         <p:spPr>
           <a:xfrm>
-            <a:off x="6583680" y="1691640"/>
+            <a:off x="6583680" y="1645920"/>
             <a:ext cx="4389120" cy="1600200"/>
           </a:xfrm>
           <a:prstGeom prst="rect">
@@ -4439,7 +4439,7 @@
               <a:spcBef>
                 <a:spcPts val="200"/>
               </a:spcBef>
-              <a:defRPr sz="4000" b="1">
+              <a:defRPr sz="3800" b="1">
                 <a:solidFill>
                   <a:srgbClr val="38BDF8"/>
                 </a:solidFill>
@@ -4453,9 +4453,9 @@
           <a:p>
             <a:pPr>
               <a:spcBef>
-                <a:spcPts val="400"/>
+                <a:spcPts val="300"/>
               </a:spcBef>
-              <a:defRPr sz="1200">
+              <a:defRPr sz="1150">
                 <a:solidFill>
                   <a:srgbClr val="CBD5E1"/>
                 </a:solidFill>
@@ -4476,8 +4476,8 @@
         </p:nvSpPr>
         <p:spPr>
           <a:xfrm>
-            <a:off x="822960" y="3840480"/>
-            <a:ext cx="5150815" cy="2240280"/>
+            <a:off x="822960" y="3749039"/>
+            <a:ext cx="5150815" cy="2148840"/>
           </a:xfrm>
           <a:prstGeom prst="roundRect">
             <a:avLst/>
@@ -4521,7 +4521,7 @@
         </p:nvSpPr>
         <p:spPr>
           <a:xfrm>
-            <a:off x="1188720" y="4160520"/>
+            <a:off x="1188720" y="4023359"/>
             <a:ext cx="4389120" cy="1600200"/>
           </a:xfrm>
           <a:prstGeom prst="rect">
@@ -4552,7 +4552,7 @@
               <a:spcBef>
                 <a:spcPts val="200"/>
               </a:spcBef>
-              <a:defRPr sz="4000" b="1">
+              <a:defRPr sz="3800" b="1">
                 <a:solidFill>
                   <a:srgbClr val="F8FAFC"/>
                 </a:solidFill>
@@ -4566,9 +4566,9 @@
           <a:p>
             <a:pPr>
               <a:spcBef>
-                <a:spcPts val="400"/>
+                <a:spcPts val="300"/>
               </a:spcBef>
-              <a:defRPr sz="1200">
+              <a:defRPr sz="1150">
                 <a:solidFill>
                   <a:srgbClr val="CBD5E1"/>
                 </a:solidFill>
@@ -4589,8 +4589,8 @@
         </p:nvSpPr>
         <p:spPr>
           <a:xfrm>
-            <a:off x="6217920" y="3840480"/>
-            <a:ext cx="5150815" cy="2240280"/>
+            <a:off x="6217920" y="3749039"/>
+            <a:ext cx="5150815" cy="2148840"/>
           </a:xfrm>
           <a:prstGeom prst="roundRect">
             <a:avLst/>
@@ -4634,7 +4634,7 @@
         </p:nvSpPr>
         <p:spPr>
           <a:xfrm>
-            <a:off x="6583680" y="4160520"/>
+            <a:off x="6583680" y="4023359"/>
             <a:ext cx="4389120" cy="1600200"/>
           </a:xfrm>
           <a:prstGeom prst="rect">
@@ -4665,7 +4665,7 @@
               <a:spcBef>
                 <a:spcPts val="200"/>
               </a:spcBef>
-              <a:defRPr sz="4000" b="1">
+              <a:defRPr sz="3800" b="1">
                 <a:solidFill>
                   <a:srgbClr val="38BDF8"/>
                 </a:solidFill>
@@ -4679,9 +4679,9 @@
           <a:p>
             <a:pPr>
               <a:spcBef>
-                <a:spcPts val="400"/>
+                <a:spcPts val="300"/>
               </a:spcBef>
-              <a:defRPr sz="1200">
+              <a:defRPr sz="1150">
                 <a:solidFill>
                   <a:srgbClr val="CBD5E1"/>
                 </a:solidFill>
@@ -4800,8 +4800,8 @@
         </p:nvSpPr>
         <p:spPr>
           <a:xfrm>
-            <a:off x="822960" y="1463040"/>
-            <a:ext cx="3413455" cy="4663440"/>
+            <a:off x="822960" y="1371600"/>
+            <a:ext cx="3413455" cy="4572000"/>
           </a:xfrm>
           <a:prstGeom prst="roundRect">
             <a:avLst/>
@@ -4845,8 +4845,8 @@
         </p:nvSpPr>
         <p:spPr>
           <a:xfrm>
-            <a:off x="1143000" y="1828800"/>
-            <a:ext cx="2743200" cy="3931920"/>
+            <a:off x="1143000" y="1737360"/>
+            <a:ext cx="2743200" cy="3840480"/>
           </a:xfrm>
           <a:prstGeom prst="rect">
             <a:avLst/>
@@ -4929,8 +4929,8 @@
         </p:nvSpPr>
         <p:spPr>
           <a:xfrm>
-            <a:off x="4389120" y="1463040"/>
-            <a:ext cx="3413455" cy="4663440"/>
+            <a:off x="4389120" y="1371600"/>
+            <a:ext cx="3413455" cy="4572000"/>
           </a:xfrm>
           <a:prstGeom prst="roundRect">
             <a:avLst/>
@@ -4974,8 +4974,8 @@
         </p:nvSpPr>
         <p:spPr>
           <a:xfrm>
-            <a:off x="4709160" y="1828800"/>
-            <a:ext cx="2743200" cy="3931920"/>
+            <a:off x="4709160" y="1737360"/>
+            <a:ext cx="2743200" cy="3840480"/>
           </a:xfrm>
           <a:prstGeom prst="rect">
             <a:avLst/>
@@ -5058,8 +5058,8 @@
         </p:nvSpPr>
         <p:spPr>
           <a:xfrm>
-            <a:off x="7955279" y="1463040"/>
-            <a:ext cx="3413455" cy="4663440"/>
+            <a:off x="7955279" y="1371600"/>
+            <a:ext cx="3413455" cy="4572000"/>
           </a:xfrm>
           <a:prstGeom prst="roundRect">
             <a:avLst/>
@@ -5103,8 +5103,8 @@
         </p:nvSpPr>
         <p:spPr>
           <a:xfrm>
-            <a:off x="8275319" y="1828800"/>
-            <a:ext cx="2743200" cy="3931920"/>
+            <a:off x="8275319" y="1737360"/>
+            <a:ext cx="2743200" cy="3840480"/>
           </a:xfrm>
           <a:prstGeom prst="rect">
             <a:avLst/>
@@ -5285,8 +5285,8 @@
         </p:nvSpPr>
         <p:spPr>
           <a:xfrm>
-            <a:off x="2011680" y="1371600"/>
-            <a:ext cx="8168335" cy="4754880"/>
+            <a:off x="2743200" y="1371600"/>
+            <a:ext cx="6705295" cy="4572000"/>
           </a:xfrm>
           <a:prstGeom prst="roundRect">
             <a:avLst/>
@@ -5338,8 +5338,8 @@
         </p:blipFill>
         <p:spPr>
           <a:xfrm>
-            <a:off x="2240280" y="1508760"/>
-            <a:ext cx="7711135" cy="5757647"/>
+            <a:off x="3154680" y="1463040"/>
+            <a:ext cx="5878286" cy="4389120"/>
           </a:xfrm>
           <a:prstGeom prst="rect">
             <a:avLst/>
@@ -5354,7 +5354,7 @@
         </p:nvSpPr>
         <p:spPr>
           <a:xfrm>
-            <a:off x="822960" y="6263640"/>
+            <a:off x="822960" y="6172200"/>
             <a:ext cx="10545775" cy="320040"/>
           </a:xfrm>
           <a:prstGeom prst="rect">
@@ -5488,8 +5488,8 @@
         </p:nvSpPr>
         <p:spPr>
           <a:xfrm>
-            <a:off x="2011680" y="1371600"/>
-            <a:ext cx="8168335" cy="4754880"/>
+            <a:off x="2651760" y="1371600"/>
+            <a:ext cx="6888175" cy="4572000"/>
           </a:xfrm>
           <a:prstGeom prst="roundRect">
             <a:avLst/>
@@ -5541,8 +5541,8 @@
         </p:blipFill>
         <p:spPr>
           <a:xfrm>
-            <a:off x="2240280" y="1508760"/>
-            <a:ext cx="7711135" cy="5478964"/>
+            <a:off x="3008376" y="1463040"/>
+            <a:ext cx="6177280" cy="4389120"/>
           </a:xfrm>
           <a:prstGeom prst="rect">
             <a:avLst/>
@@ -5557,7 +5557,7 @@
         </p:nvSpPr>
         <p:spPr>
           <a:xfrm>
-            <a:off x="822960" y="6263640"/>
+            <a:off x="822960" y="6172200"/>
             <a:ext cx="10545775" cy="320040"/>
           </a:xfrm>
           <a:prstGeom prst="rect">

--- a/Aircraft_Design_DT1_EXAELIA_Group13.pptx
+++ b/Aircraft_Design_DT1_EXAELIA_Group13.pptx
@@ -3091,7 +3091,7 @@
     <p:bg>
       <p:bgPr>
         <a:solidFill>
-          <a:srgbClr val="000000"/>
+          <a:srgbClr val="FFFFFF"/>
         </a:solidFill>
         <a:effectLst/>
       </p:bgPr>
@@ -3128,7 +3128,7 @@
             <a:pPr>
               <a:defRPr sz="1100" b="1">
                 <a:solidFill>
-                  <a:srgbClr val="A1A1AA"/>
+                  <a:srgbClr val="64748B"/>
                 </a:solidFill>
                 <a:latin typeface="Arial"/>
               </a:defRPr>
@@ -3164,7 +3164,7 @@
             <a:pPr>
               <a:defRPr sz="4800" b="1">
                 <a:solidFill>
-                  <a:srgbClr val="FFFFFF"/>
+                  <a:srgbClr val="0F172A"/>
                 </a:solidFill>
                 <a:latin typeface="Helvetica Neue"/>
               </a:defRPr>
@@ -3200,7 +3200,7 @@
             <a:pPr>
               <a:defRPr sz="1800">
                 <a:solidFill>
-                  <a:srgbClr val="E4E4E7"/>
+                  <a:srgbClr val="334155"/>
                 </a:solidFill>
                 <a:latin typeface="Helvetica Neue"/>
               </a:defRPr>
@@ -3236,7 +3236,7 @@
             <a:pPr>
               <a:defRPr sz="1400" b="1">
                 <a:solidFill>
-                  <a:srgbClr val="FFFFFF"/>
+                  <a:srgbClr val="0F172A"/>
                 </a:solidFill>
                 <a:latin typeface="Arial"/>
               </a:defRPr>
@@ -3252,7 +3252,7 @@
               </a:spcBef>
               <a:defRPr sz="1300" b="1">
                 <a:solidFill>
-                  <a:srgbClr val="A1A1AA"/>
+                  <a:srgbClr val="64748B"/>
                 </a:solidFill>
                 <a:latin typeface="Arial"/>
               </a:defRPr>
@@ -3278,11 +3278,11 @@
             <a:avLst/>
           </a:prstGeom>
           <a:solidFill>
-            <a:srgbClr val="121214"/>
+            <a:srgbClr val="F8FAFC"/>
           </a:solidFill>
           <a:ln w="9525">
             <a:solidFill>
-              <a:srgbClr val="27272A"/>
+              <a:srgbClr val="E2E8F0"/>
             </a:solidFill>
           </a:ln>
         </p:spPr>
@@ -3333,7 +3333,7 @@
             <a:pPr algn="ctr">
               <a:defRPr sz="1250" b="1">
                 <a:solidFill>
-                  <a:srgbClr val="FFFFFF"/>
+                  <a:srgbClr val="0F172A"/>
                 </a:solidFill>
                 <a:latin typeface="Arial"/>
               </a:defRPr>
@@ -3358,7 +3358,7 @@
     <p:bg>
       <p:bgPr>
         <a:solidFill>
-          <a:srgbClr val="000000"/>
+          <a:srgbClr val="FFFFFF"/>
         </a:solidFill>
         <a:effectLst/>
       </p:bgPr>
@@ -3395,7 +3395,7 @@
             <a:pPr>
               <a:defRPr sz="950" b="1">
                 <a:solidFill>
-                  <a:srgbClr val="A1A1AA"/>
+                  <a:srgbClr val="64748B"/>
                 </a:solidFill>
                 <a:latin typeface="Arial"/>
               </a:defRPr>
@@ -3431,7 +3431,7 @@
             <a:pPr>
               <a:defRPr sz="2400" b="1">
                 <a:solidFill>
-                  <a:srgbClr val="FFFFFF"/>
+                  <a:srgbClr val="0F172A"/>
                 </a:solidFill>
                 <a:latin typeface="Helvetica Neue"/>
               </a:defRPr>
@@ -3439,12 +3439,57 @@
             <a:r>
               <a:t>Blended wing body</a:t>
             </a:r>
+          </a:p>
+        </p:txBody>
+      </p:sp>
+      <p:sp>
+        <p:nvSpPr>
+          <p:cNvPr id="4" name="Rounded Rectangle 3"/>
+          <p:cNvSpPr/>
+          <p:nvPr/>
+        </p:nvSpPr>
+        <p:spPr>
+          <a:xfrm>
+            <a:off x="4114800" y="1280160"/>
+            <a:ext cx="3962095" cy="4846320"/>
+          </a:xfrm>
+          <a:prstGeom prst="roundRect">
+            <a:avLst/>
+          </a:prstGeom>
+          <a:solidFill>
+            <a:srgbClr val="F8FAFC"/>
+          </a:solidFill>
+          <a:ln w="9525">
+            <a:solidFill>
+              <a:srgbClr val="E2E8F0"/>
+            </a:solidFill>
+          </a:ln>
+        </p:spPr>
+        <p:style>
+          <a:lnRef idx="1">
+            <a:schemeClr val="accent1"/>
+          </a:lnRef>
+          <a:fillRef idx="3">
+            <a:schemeClr val="accent1"/>
+          </a:fillRef>
+          <a:effectRef idx="2">
+            <a:schemeClr val="accent1"/>
+          </a:effectRef>
+          <a:fontRef idx="minor">
+            <a:schemeClr val="lt1"/>
+          </a:fontRef>
+        </p:style>
+        <p:txBody>
+          <a:bodyPr rtlCol="0" anchor="ctr"/>
+          <a:lstStyle/>
+          <a:p>
+            <a:pPr algn="ctr"/>
           </a:p>
         </p:txBody>
       </p:sp>
       <p:pic>
         <p:nvPicPr>
-          <p:cNvPr id="4" name="Picture 3" descr="slide2_sketch_bw.png"/>
+          <p:cNvPr id="5" name="Picture 4" descr="slide_2_Content Placeholder 4.jpg"/>
           <p:cNvPicPr>
             <a:picLocks noChangeAspect="1"/>
           </p:cNvPicPr>
@@ -3458,7 +3503,7 @@
         </p:blipFill>
         <p:spPr>
           <a:xfrm>
-            <a:off x="4389120" y="1325880"/>
+            <a:off x="4443984" y="1371600"/>
             <a:ext cx="3299036" cy="4663440"/>
           </a:xfrm>
           <a:prstGeom prst="rect">
@@ -3468,13 +3513,13 @@
       </p:pic>
       <p:sp>
         <p:nvSpPr>
-          <p:cNvPr id="5" name="TextBox 4"/>
+          <p:cNvPr id="6" name="TextBox 5"/>
           <p:cNvSpPr txBox="1"/>
           <p:nvPr/>
         </p:nvSpPr>
         <p:spPr>
           <a:xfrm>
-            <a:off x="822960" y="6217920"/>
+            <a:off x="822960" y="6263640"/>
             <a:ext cx="10545775" cy="320040"/>
           </a:xfrm>
           <a:prstGeom prst="rect">
@@ -3491,7 +3536,7 @@
             <a:pPr algn="ctr">
               <a:defRPr sz="1100">
                 <a:solidFill>
-                  <a:srgbClr val="A1A1AA"/>
+                  <a:srgbClr val="64748B"/>
                 </a:solidFill>
                 <a:latin typeface="Arial"/>
               </a:defRPr>
@@ -3516,7 +3561,7 @@
     <p:bg>
       <p:bgPr>
         <a:solidFill>
-          <a:srgbClr val="000000"/>
+          <a:srgbClr val="FFFFFF"/>
         </a:solidFill>
         <a:effectLst/>
       </p:bgPr>
@@ -3553,7 +3598,7 @@
             <a:pPr>
               <a:defRPr sz="950" b="1">
                 <a:solidFill>
-                  <a:srgbClr val="A1A1AA"/>
+                  <a:srgbClr val="64748B"/>
                 </a:solidFill>
                 <a:latin typeface="Arial"/>
               </a:defRPr>
@@ -3589,7 +3634,7 @@
             <a:pPr>
               <a:defRPr sz="2400" b="1">
                 <a:solidFill>
-                  <a:srgbClr val="FFFFFF"/>
+                  <a:srgbClr val="0F172A"/>
                 </a:solidFill>
                 <a:latin typeface="Helvetica Neue"/>
               </a:defRPr>
@@ -3602,7 +3647,7 @@
       </p:sp>
       <p:pic>
         <p:nvPicPr>
-          <p:cNvPr id="4" name="Picture 3" descr="slide3_mission_bw.png"/>
+          <p:cNvPr id="4" name="Picture 3" descr="slide_3_Content Placeholder 8.jpg"/>
           <p:cNvPicPr>
             <a:picLocks noChangeAspect="1"/>
           </p:cNvPicPr>
@@ -3616,8 +3661,8 @@
         </p:blipFill>
         <p:spPr>
           <a:xfrm>
-            <a:off x="1280160" y="1325880"/>
-            <a:ext cx="9631375" cy="4402914"/>
+            <a:off x="3236976" y="1325880"/>
+            <a:ext cx="5725160" cy="4480560"/>
           </a:xfrm>
           <a:prstGeom prst="rect">
             <a:avLst/>
@@ -3632,7 +3677,7 @@
         </p:nvSpPr>
         <p:spPr>
           <a:xfrm>
-            <a:off x="822960" y="6217920"/>
+            <a:off x="822960" y="6263640"/>
             <a:ext cx="10545775" cy="320040"/>
           </a:xfrm>
           <a:prstGeom prst="rect">
@@ -3649,7 +3694,7 @@
             <a:pPr algn="ctr">
               <a:defRPr sz="1100">
                 <a:solidFill>
-                  <a:srgbClr val="A1A1AA"/>
+                  <a:srgbClr val="64748B"/>
                 </a:solidFill>
                 <a:latin typeface="Arial"/>
               </a:defRPr>
@@ -3674,7 +3719,7 @@
     <p:bg>
       <p:bgPr>
         <a:solidFill>
-          <a:srgbClr val="000000"/>
+          <a:srgbClr val="FFFFFF"/>
         </a:solidFill>
         <a:effectLst/>
       </p:bgPr>
@@ -3711,7 +3756,7 @@
             <a:pPr>
               <a:defRPr sz="950" b="1">
                 <a:solidFill>
-                  <a:srgbClr val="A1A1AA"/>
+                  <a:srgbClr val="64748B"/>
                 </a:solidFill>
                 <a:latin typeface="Arial"/>
               </a:defRPr>
@@ -3747,7 +3792,7 @@
             <a:pPr>
               <a:defRPr sz="2400" b="1">
                 <a:solidFill>
-                  <a:srgbClr val="FFFFFF"/>
+                  <a:srgbClr val="0F172A"/>
                 </a:solidFill>
                 <a:latin typeface="Helvetica Neue"/>
               </a:defRPr>
@@ -3760,7 +3805,7 @@
       </p:sp>
       <p:pic>
         <p:nvPicPr>
-          <p:cNvPr id="4" name="Picture 3" descr="slide4_sfc_bw.png"/>
+          <p:cNvPr id="4" name="Picture 3" descr="slide_4_Picture 6.png"/>
           <p:cNvPicPr>
             <a:picLocks noChangeAspect="1"/>
           </p:cNvPicPr>
@@ -3774,8 +3819,8 @@
         </p:blipFill>
         <p:spPr>
           <a:xfrm>
-            <a:off x="822960" y="1325880"/>
-            <a:ext cx="6217920" cy="4318000"/>
+            <a:off x="822960" y="1463040"/>
+            <a:ext cx="6217920" cy="4145280"/>
           </a:xfrm>
           <a:prstGeom prst="rect">
             <a:avLst/>
@@ -3790,18 +3835,18 @@
         </p:nvSpPr>
         <p:spPr>
           <a:xfrm>
-            <a:off x="7315200" y="1371600"/>
-            <a:ext cx="4053535" cy="2194560"/>
+            <a:off x="7315200" y="1463040"/>
+            <a:ext cx="4053535" cy="2148840"/>
           </a:xfrm>
           <a:prstGeom prst="roundRect">
             <a:avLst/>
           </a:prstGeom>
           <a:solidFill>
-            <a:srgbClr val="121214"/>
+            <a:srgbClr val="F8FAFC"/>
           </a:solidFill>
           <a:ln w="9525">
             <a:solidFill>
-              <a:srgbClr val="27272A"/>
+              <a:srgbClr val="E2E8F0"/>
             </a:solidFill>
           </a:ln>
         </p:spPr>
@@ -3835,8 +3880,8 @@
         </p:nvSpPr>
         <p:spPr>
           <a:xfrm>
-            <a:off x="7589520" y="1600200"/>
-            <a:ext cx="3474720" cy="1737360"/>
+            <a:off x="7589520" y="1691640"/>
+            <a:ext cx="3474720" cy="1691640"/>
           </a:xfrm>
           <a:prstGeom prst="rect">
             <a:avLst/>
@@ -3852,7 +3897,7 @@
             <a:pPr>
               <a:defRPr sz="1100" b="1">
                 <a:solidFill>
-                  <a:srgbClr val="A1A1AA"/>
+                  <a:srgbClr val="64748B"/>
                 </a:solidFill>
                 <a:latin typeface="Arial"/>
               </a:defRPr>
@@ -3868,7 +3913,7 @@
               </a:spcBef>
               <a:defRPr sz="2800" b="1">
                 <a:solidFill>
-                  <a:srgbClr val="FFFFFF"/>
+                  <a:srgbClr val="0F172A"/>
                 </a:solidFill>
                 <a:latin typeface="Helvetica Neue"/>
               </a:defRPr>
@@ -3884,7 +3929,7 @@
               </a:spcBef>
               <a:defRPr sz="1100">
                 <a:solidFill>
-                  <a:srgbClr val="E4E4E7"/>
+                  <a:srgbClr val="334155"/>
                 </a:solidFill>
                 <a:latin typeface="Arial"/>
               </a:defRPr>
@@ -3904,17 +3949,17 @@
         <p:spPr>
           <a:xfrm>
             <a:off x="7315200" y="3794760"/>
-            <a:ext cx="4053535" cy="2194560"/>
+            <a:ext cx="4053535" cy="2148840"/>
           </a:xfrm>
           <a:prstGeom prst="roundRect">
             <a:avLst/>
           </a:prstGeom>
           <a:solidFill>
-            <a:srgbClr val="121214"/>
+            <a:srgbClr val="F8FAFC"/>
           </a:solidFill>
           <a:ln w="9525">
             <a:solidFill>
-              <a:srgbClr val="27272A"/>
+              <a:srgbClr val="E2E8F0"/>
             </a:solidFill>
           </a:ln>
         </p:spPr>
@@ -3949,7 +3994,7 @@
         <p:spPr>
           <a:xfrm>
             <a:off x="7589520" y="4023360"/>
-            <a:ext cx="3474720" cy="1737360"/>
+            <a:ext cx="3474720" cy="1691640"/>
           </a:xfrm>
           <a:prstGeom prst="rect">
             <a:avLst/>
@@ -3965,7 +4010,7 @@
             <a:pPr>
               <a:defRPr sz="1100" b="1">
                 <a:solidFill>
-                  <a:srgbClr val="A1A1AA"/>
+                  <a:srgbClr val="64748B"/>
                 </a:solidFill>
                 <a:latin typeface="Arial"/>
               </a:defRPr>
@@ -3981,7 +4026,7 @@
               </a:spcBef>
               <a:defRPr sz="3200" b="1">
                 <a:solidFill>
-                  <a:srgbClr val="FFFFFF"/>
+                  <a:srgbClr val="0F172A"/>
                 </a:solidFill>
                 <a:latin typeface="Helvetica Neue"/>
               </a:defRPr>
@@ -3997,7 +4042,7 @@
               </a:spcBef>
               <a:defRPr sz="1100">
                 <a:solidFill>
-                  <a:srgbClr val="E4E4E7"/>
+                  <a:srgbClr val="334155"/>
                 </a:solidFill>
                 <a:latin typeface="Arial"/>
               </a:defRPr>
@@ -4022,7 +4067,7 @@
     <p:bg>
       <p:bgPr>
         <a:solidFill>
-          <a:srgbClr val="000000"/>
+          <a:srgbClr val="FFFFFF"/>
         </a:solidFill>
         <a:effectLst/>
       </p:bgPr>
@@ -4059,7 +4104,7 @@
             <a:pPr>
               <a:defRPr sz="950" b="1">
                 <a:solidFill>
-                  <a:srgbClr val="A1A1AA"/>
+                  <a:srgbClr val="64748B"/>
                 </a:solidFill>
                 <a:latin typeface="Arial"/>
               </a:defRPr>
@@ -4095,7 +4140,7 @@
             <a:pPr>
               <a:defRPr sz="2400" b="1">
                 <a:solidFill>
-                  <a:srgbClr val="FFFFFF"/>
+                  <a:srgbClr val="0F172A"/>
                 </a:solidFill>
                 <a:latin typeface="Helvetica Neue"/>
               </a:defRPr>
@@ -4121,11 +4166,11 @@
             <a:avLst/>
           </a:prstGeom>
           <a:solidFill>
-            <a:srgbClr val="121214"/>
+            <a:srgbClr val="F8FAFC"/>
           </a:solidFill>
           <a:ln w="9525">
             <a:solidFill>
-              <a:srgbClr val="27272A"/>
+              <a:srgbClr val="E2E8F0"/>
             </a:solidFill>
           </a:ln>
         </p:spPr>
@@ -4176,7 +4221,7 @@
             <a:pPr>
               <a:defRPr sz="1100" b="1">
                 <a:solidFill>
-                  <a:srgbClr val="A1A1AA"/>
+                  <a:srgbClr val="64748B"/>
                 </a:solidFill>
                 <a:latin typeface="Arial"/>
               </a:defRPr>
@@ -4190,9 +4235,9 @@
               <a:spcBef>
                 <a:spcPts val="200"/>
               </a:spcBef>
-              <a:defRPr sz="4000" b="1">
-                <a:solidFill>
-                  <a:srgbClr val="FFFFFF"/>
+              <a:defRPr sz="4200" b="1">
+                <a:solidFill>
+                  <a:srgbClr val="0F172A"/>
                 </a:solidFill>
                 <a:latin typeface="Helvetica Neue"/>
               </a:defRPr>
@@ -4208,7 +4253,7 @@
               </a:spcBef>
               <a:defRPr sz="1150">
                 <a:solidFill>
-                  <a:srgbClr val="E4E4E7"/>
+                  <a:srgbClr val="334155"/>
                 </a:solidFill>
                 <a:latin typeface="Arial"/>
               </a:defRPr>
@@ -4234,11 +4279,11 @@
             <a:avLst/>
           </a:prstGeom>
           <a:solidFill>
-            <a:srgbClr val="121214"/>
+            <a:srgbClr val="F8FAFC"/>
           </a:solidFill>
           <a:ln w="9525">
             <a:solidFill>
-              <a:srgbClr val="27272A"/>
+              <a:srgbClr val="E2E8F0"/>
             </a:solidFill>
           </a:ln>
         </p:spPr>
@@ -4289,7 +4334,7 @@
             <a:pPr>
               <a:defRPr sz="1100" b="1">
                 <a:solidFill>
-                  <a:srgbClr val="A1A1AA"/>
+                  <a:srgbClr val="64748B"/>
                 </a:solidFill>
                 <a:latin typeface="Arial"/>
               </a:defRPr>
@@ -4303,9 +4348,9 @@
               <a:spcBef>
                 <a:spcPts val="200"/>
               </a:spcBef>
-              <a:defRPr sz="4000" b="1">
-                <a:solidFill>
-                  <a:srgbClr val="FFFFFF"/>
+              <a:defRPr sz="4200" b="1">
+                <a:solidFill>
+                  <a:srgbClr val="0F172A"/>
                 </a:solidFill>
                 <a:latin typeface="Helvetica Neue"/>
               </a:defRPr>
@@ -4321,7 +4366,7 @@
               </a:spcBef>
               <a:defRPr sz="1150">
                 <a:solidFill>
-                  <a:srgbClr val="E4E4E7"/>
+                  <a:srgbClr val="334155"/>
                 </a:solidFill>
                 <a:latin typeface="Arial"/>
               </a:defRPr>
@@ -4347,11 +4392,11 @@
             <a:avLst/>
           </a:prstGeom>
           <a:solidFill>
-            <a:srgbClr val="121214"/>
+            <a:srgbClr val="F8FAFC"/>
           </a:solidFill>
           <a:ln w="9525">
             <a:solidFill>
-              <a:srgbClr val="27272A"/>
+              <a:srgbClr val="E2E8F0"/>
             </a:solidFill>
           </a:ln>
         </p:spPr>
@@ -4402,7 +4447,7 @@
             <a:pPr>
               <a:defRPr sz="1100" b="1">
                 <a:solidFill>
-                  <a:srgbClr val="A1A1AA"/>
+                  <a:srgbClr val="64748B"/>
                 </a:solidFill>
                 <a:latin typeface="Arial"/>
               </a:defRPr>
@@ -4416,9 +4461,9 @@
               <a:spcBef>
                 <a:spcPts val="200"/>
               </a:spcBef>
-              <a:defRPr sz="4000" b="1">
-                <a:solidFill>
-                  <a:srgbClr val="FFFFFF"/>
+              <a:defRPr sz="4200" b="1">
+                <a:solidFill>
+                  <a:srgbClr val="0F172A"/>
                 </a:solidFill>
                 <a:latin typeface="Helvetica Neue"/>
               </a:defRPr>
@@ -4434,7 +4479,7 @@
               </a:spcBef>
               <a:defRPr sz="1150">
                 <a:solidFill>
-                  <a:srgbClr val="E4E4E7"/>
+                  <a:srgbClr val="334155"/>
                 </a:solidFill>
                 <a:latin typeface="Arial"/>
               </a:defRPr>
@@ -4460,11 +4505,11 @@
             <a:avLst/>
           </a:prstGeom>
           <a:solidFill>
-            <a:srgbClr val="121214"/>
+            <a:srgbClr val="F8FAFC"/>
           </a:solidFill>
           <a:ln w="9525">
             <a:solidFill>
-              <a:srgbClr val="27272A"/>
+              <a:srgbClr val="E2E8F0"/>
             </a:solidFill>
           </a:ln>
         </p:spPr>
@@ -4515,7 +4560,7 @@
             <a:pPr>
               <a:defRPr sz="1100" b="1">
                 <a:solidFill>
-                  <a:srgbClr val="A1A1AA"/>
+                  <a:srgbClr val="64748B"/>
                 </a:solidFill>
                 <a:latin typeface="Arial"/>
               </a:defRPr>
@@ -4529,9 +4574,9 @@
               <a:spcBef>
                 <a:spcPts val="200"/>
               </a:spcBef>
-              <a:defRPr sz="4000" b="1">
-                <a:solidFill>
-                  <a:srgbClr val="FFFFFF"/>
+              <a:defRPr sz="4200" b="1">
+                <a:solidFill>
+                  <a:srgbClr val="0F172A"/>
                 </a:solidFill>
                 <a:latin typeface="Helvetica Neue"/>
               </a:defRPr>
@@ -4547,7 +4592,7 @@
               </a:spcBef>
               <a:defRPr sz="1150">
                 <a:solidFill>
-                  <a:srgbClr val="E4E4E7"/>
+                  <a:srgbClr val="334155"/>
                 </a:solidFill>
                 <a:latin typeface="Arial"/>
               </a:defRPr>
@@ -4566,7 +4611,7 @@
         </p:nvSpPr>
         <p:spPr>
           <a:xfrm>
-            <a:off x="822960" y="6217920"/>
+            <a:off x="822960" y="6263640"/>
             <a:ext cx="10545775" cy="320040"/>
           </a:xfrm>
           <a:prstGeom prst="rect">
@@ -4583,7 +4628,7 @@
             <a:pPr algn="ctr">
               <a:defRPr sz="1100">
                 <a:solidFill>
-                  <a:srgbClr val="A1A1AA"/>
+                  <a:srgbClr val="64748B"/>
                 </a:solidFill>
                 <a:latin typeface="Arial"/>
               </a:defRPr>
@@ -4608,7 +4653,7 @@
     <p:bg>
       <p:bgPr>
         <a:solidFill>
-          <a:srgbClr val="000000"/>
+          <a:srgbClr val="FFFFFF"/>
         </a:solidFill>
         <a:effectLst/>
       </p:bgPr>
@@ -4645,7 +4690,7 @@
             <a:pPr>
               <a:defRPr sz="950" b="1">
                 <a:solidFill>
-                  <a:srgbClr val="A1A1AA"/>
+                  <a:srgbClr val="64748B"/>
                 </a:solidFill>
                 <a:latin typeface="Arial"/>
               </a:defRPr>
@@ -4681,7 +4726,7 @@
             <a:pPr>
               <a:defRPr sz="2400" b="1">
                 <a:solidFill>
-                  <a:srgbClr val="FFFFFF"/>
+                  <a:srgbClr val="0F172A"/>
                 </a:solidFill>
                 <a:latin typeface="Helvetica Neue"/>
               </a:defRPr>
@@ -4707,11 +4752,11 @@
             <a:avLst/>
           </a:prstGeom>
           <a:solidFill>
-            <a:srgbClr val="121214"/>
+            <a:srgbClr val="F8FAFC"/>
           </a:solidFill>
           <a:ln w="9525">
             <a:solidFill>
-              <a:srgbClr val="27272A"/>
+              <a:srgbClr val="E2E8F0"/>
             </a:solidFill>
           </a:ln>
         </p:spPr>
@@ -4762,7 +4807,7 @@
             <a:pPr>
               <a:defRPr sz="1100" b="1">
                 <a:solidFill>
-                  <a:srgbClr val="A1A1AA"/>
+                  <a:srgbClr val="64748B"/>
                 </a:solidFill>
                 <a:latin typeface="Arial"/>
               </a:defRPr>
@@ -4776,9 +4821,9 @@
               <a:spcBef>
                 <a:spcPts val="800"/>
               </a:spcBef>
-              <a:defRPr sz="2800" b="1">
-                <a:solidFill>
-                  <a:srgbClr val="FFFFFF"/>
+              <a:defRPr sz="2600" b="1">
+                <a:solidFill>
+                  <a:srgbClr val="0F172A"/>
                 </a:solidFill>
                 <a:latin typeface="Helvetica Neue"/>
               </a:defRPr>
@@ -4794,7 +4839,7 @@
               </a:spcBef>
               <a:defRPr sz="1350" b="1">
                 <a:solidFill>
-                  <a:srgbClr val="E4E4E7"/>
+                  <a:srgbClr val="334155"/>
                 </a:solidFill>
                 <a:latin typeface="Helvetica Neue"/>
               </a:defRPr>
@@ -4810,7 +4855,7 @@
               </a:spcBef>
               <a:defRPr sz="1100">
                 <a:solidFill>
-                  <a:srgbClr val="71717A"/>
+                  <a:srgbClr val="94A3B8"/>
                 </a:solidFill>
                 <a:latin typeface="Arial"/>
               </a:defRPr>
@@ -4836,11 +4881,11 @@
             <a:avLst/>
           </a:prstGeom>
           <a:solidFill>
-            <a:srgbClr val="121214"/>
+            <a:srgbClr val="F8FAFC"/>
           </a:solidFill>
           <a:ln w="9525">
             <a:solidFill>
-              <a:srgbClr val="27272A"/>
+              <a:srgbClr val="E2E8F0"/>
             </a:solidFill>
           </a:ln>
         </p:spPr>
@@ -4891,7 +4936,7 @@
             <a:pPr>
               <a:defRPr sz="1100" b="1">
                 <a:solidFill>
-                  <a:srgbClr val="A1A1AA"/>
+                  <a:srgbClr val="64748B"/>
                 </a:solidFill>
                 <a:latin typeface="Arial"/>
               </a:defRPr>
@@ -4907,7 +4952,7 @@
               </a:spcBef>
               <a:defRPr sz="3800" b="1">
                 <a:solidFill>
-                  <a:srgbClr val="FFFFFF"/>
+                  <a:srgbClr val="0F172A"/>
                 </a:solidFill>
                 <a:latin typeface="Helvetica Neue"/>
               </a:defRPr>
@@ -4923,7 +4968,7 @@
               </a:spcBef>
               <a:defRPr sz="1350" b="1">
                 <a:solidFill>
-                  <a:srgbClr val="E4E4E7"/>
+                  <a:srgbClr val="334155"/>
                 </a:solidFill>
                 <a:latin typeface="Helvetica Neue"/>
               </a:defRPr>
@@ -4939,7 +4984,7 @@
               </a:spcBef>
               <a:defRPr sz="1100">
                 <a:solidFill>
-                  <a:srgbClr val="71717A"/>
+                  <a:srgbClr val="94A3B8"/>
                 </a:solidFill>
                 <a:latin typeface="Arial"/>
               </a:defRPr>
@@ -4965,11 +5010,11 @@
             <a:avLst/>
           </a:prstGeom>
           <a:solidFill>
-            <a:srgbClr val="121214"/>
+            <a:srgbClr val="F8FAFC"/>
           </a:solidFill>
           <a:ln w="9525">
             <a:solidFill>
-              <a:srgbClr val="27272A"/>
+              <a:srgbClr val="E2E8F0"/>
             </a:solidFill>
           </a:ln>
         </p:spPr>
@@ -5020,7 +5065,7 @@
             <a:pPr>
               <a:defRPr sz="1100" b="1">
                 <a:solidFill>
-                  <a:srgbClr val="A1A1AA"/>
+                  <a:srgbClr val="64748B"/>
                 </a:solidFill>
                 <a:latin typeface="Arial"/>
               </a:defRPr>
@@ -5036,7 +5081,7 @@
               </a:spcBef>
               <a:defRPr sz="3800" b="1">
                 <a:solidFill>
-                  <a:srgbClr val="FFFFFF"/>
+                  <a:srgbClr val="0F172A"/>
                 </a:solidFill>
                 <a:latin typeface="Helvetica Neue"/>
               </a:defRPr>
@@ -5052,7 +5097,7 @@
               </a:spcBef>
               <a:defRPr sz="1350" b="1">
                 <a:solidFill>
-                  <a:srgbClr val="E4E4E7"/>
+                  <a:srgbClr val="334155"/>
                 </a:solidFill>
                 <a:latin typeface="Helvetica Neue"/>
               </a:defRPr>
@@ -5068,7 +5113,7 @@
               </a:spcBef>
               <a:defRPr sz="1100">
                 <a:solidFill>
-                  <a:srgbClr val="71717A"/>
+                  <a:srgbClr val="94A3B8"/>
                 </a:solidFill>
                 <a:latin typeface="Arial"/>
               </a:defRPr>
@@ -5093,7 +5138,7 @@
     <p:bg>
       <p:bgPr>
         <a:solidFill>
-          <a:srgbClr val="000000"/>
+          <a:srgbClr val="FFFFFF"/>
         </a:solidFill>
         <a:effectLst/>
       </p:bgPr>
@@ -5130,7 +5175,7 @@
             <a:pPr>
               <a:defRPr sz="950" b="1">
                 <a:solidFill>
-                  <a:srgbClr val="A1A1AA"/>
+                  <a:srgbClr val="64748B"/>
                 </a:solidFill>
                 <a:latin typeface="Arial"/>
               </a:defRPr>
@@ -5166,7 +5211,7 @@
             <a:pPr>
               <a:defRPr sz="2400" b="1">
                 <a:solidFill>
-                  <a:srgbClr val="FFFFFF"/>
+                  <a:srgbClr val="0F172A"/>
                 </a:solidFill>
                 <a:latin typeface="Helvetica Neue"/>
               </a:defRPr>
@@ -5185,7 +5230,7 @@
         </p:nvSpPr>
         <p:spPr>
           <a:xfrm>
-            <a:off x="822960" y="1234440"/>
+            <a:off x="822960" y="1188720"/>
             <a:ext cx="10515600" cy="320040"/>
           </a:xfrm>
           <a:prstGeom prst="rect">
@@ -5202,7 +5247,7 @@
             <a:pPr>
               <a:defRPr sz="1100" b="1">
                 <a:solidFill>
-                  <a:srgbClr val="A1A1AA"/>
+                  <a:srgbClr val="64748B"/>
                 </a:solidFill>
                 <a:latin typeface="Arial"/>
               </a:defRPr>
@@ -5215,7 +5260,7 @@
       </p:sp>
       <p:pic>
         <p:nvPicPr>
-          <p:cNvPr id="5" name="Picture 4" descr="slide7_concept_bw.png"/>
+          <p:cNvPr id="5" name="Picture 4" descr="slide_7_Picture 7.png"/>
           <p:cNvPicPr>
             <a:picLocks noChangeAspect="1"/>
           </p:cNvPicPr>
@@ -5229,8 +5274,8 @@
         </p:blipFill>
         <p:spPr>
           <a:xfrm>
-            <a:off x="2651760" y="1554480"/>
-            <a:ext cx="5954043" cy="4389120"/>
+            <a:off x="3118104" y="1508760"/>
+            <a:ext cx="6078086" cy="4480560"/>
           </a:xfrm>
           <a:prstGeom prst="rect">
             <a:avLst/>
@@ -5245,7 +5290,7 @@
         </p:nvSpPr>
         <p:spPr>
           <a:xfrm>
-            <a:off x="822960" y="6217920"/>
+            <a:off x="822960" y="6263640"/>
             <a:ext cx="10545775" cy="320040"/>
           </a:xfrm>
           <a:prstGeom prst="rect">
@@ -5262,7 +5307,7 @@
             <a:pPr algn="ctr">
               <a:defRPr sz="1100">
                 <a:solidFill>
-                  <a:srgbClr val="A1A1AA"/>
+                  <a:srgbClr val="64748B"/>
                 </a:solidFill>
                 <a:latin typeface="Arial"/>
               </a:defRPr>
@@ -5287,7 +5332,7 @@
     <p:bg>
       <p:bgPr>
         <a:solidFill>
-          <a:srgbClr val="000000"/>
+          <a:srgbClr val="FFFFFF"/>
         </a:solidFill>
         <a:effectLst/>
       </p:bgPr>
@@ -5324,7 +5369,7 @@
             <a:pPr>
               <a:defRPr sz="950" b="1">
                 <a:solidFill>
-                  <a:srgbClr val="A1A1AA"/>
+                  <a:srgbClr val="64748B"/>
                 </a:solidFill>
                 <a:latin typeface="Arial"/>
               </a:defRPr>
@@ -5360,7 +5405,7 @@
             <a:pPr>
               <a:defRPr sz="2400" b="1">
                 <a:solidFill>
-                  <a:srgbClr val="FFFFFF"/>
+                  <a:srgbClr val="0F172A"/>
                 </a:solidFill>
                 <a:latin typeface="Helvetica Neue"/>
               </a:defRPr>
@@ -5386,11 +5431,11 @@
             <a:avLst/>
           </a:prstGeom>
           <a:solidFill>
-            <a:srgbClr val="121214"/>
+            <a:srgbClr val="F8FAFC"/>
           </a:solidFill>
           <a:ln w="9525">
             <a:solidFill>
-              <a:srgbClr val="27272A"/>
+              <a:srgbClr val="E2E8F0"/>
             </a:solidFill>
           </a:ln>
         </p:spPr>
@@ -5441,7 +5486,7 @@
             <a:pPr>
               <a:defRPr sz="1200" b="1">
                 <a:solidFill>
-                  <a:srgbClr val="E4E4E7"/>
+                  <a:srgbClr val="334155"/>
                 </a:solidFill>
                 <a:latin typeface="Arial"/>
               </a:defRPr>
@@ -5457,7 +5502,7 @@
               </a:spcBef>
               <a:defRPr sz="1600" b="1">
                 <a:solidFill>
-                  <a:srgbClr val="FFFFFF"/>
+                  <a:srgbClr val="0F172A"/>
                 </a:solidFill>
                 <a:latin typeface="Helvetica Neue"/>
               </a:defRPr>
@@ -5473,7 +5518,7 @@
               </a:spcBef>
               <a:defRPr sz="1050">
                 <a:solidFill>
-                  <a:srgbClr val="A1A1AA"/>
+                  <a:srgbClr val="64748B"/>
                 </a:solidFill>
                 <a:latin typeface="Courier New"/>
               </a:defRPr>
@@ -5499,11 +5544,11 @@
             <a:avLst/>
           </a:prstGeom>
           <a:solidFill>
-            <a:srgbClr val="121214"/>
+            <a:srgbClr val="F8FAFC"/>
           </a:solidFill>
           <a:ln w="9525">
             <a:solidFill>
-              <a:srgbClr val="27272A"/>
+              <a:srgbClr val="E2E8F0"/>
             </a:solidFill>
           </a:ln>
         </p:spPr>
@@ -5554,7 +5599,7 @@
             <a:pPr>
               <a:defRPr sz="1200" b="1">
                 <a:solidFill>
-                  <a:srgbClr val="E4E4E7"/>
+                  <a:srgbClr val="334155"/>
                 </a:solidFill>
                 <a:latin typeface="Arial"/>
               </a:defRPr>
@@ -5570,7 +5615,7 @@
               </a:spcBef>
               <a:defRPr sz="1600" b="1">
                 <a:solidFill>
-                  <a:srgbClr val="FFFFFF"/>
+                  <a:srgbClr val="0F172A"/>
                 </a:solidFill>
                 <a:latin typeface="Helvetica Neue"/>
               </a:defRPr>
@@ -5586,7 +5631,7 @@
               </a:spcBef>
               <a:defRPr sz="1050">
                 <a:solidFill>
-                  <a:srgbClr val="A1A1AA"/>
+                  <a:srgbClr val="64748B"/>
                 </a:solidFill>
                 <a:latin typeface="Courier New"/>
               </a:defRPr>

--- a/Aircraft_Design_DT1_EXAELIA_Group13.pptx
+++ b/Aircraft_Design_DT1_EXAELIA_Group13.pptx
@@ -4732,7 +4732,7 @@
               </a:defRPr>
             </a:pPr>
             <a:r>
-              <a:t>MTOW</a:t>
+              <a:t>MTOW &amp; Mass Sizing</a:t>
             </a:r>
           </a:p>
         </p:txBody>
@@ -4745,8 +4745,8 @@
         </p:nvSpPr>
         <p:spPr>
           <a:xfrm>
-            <a:off x="822960" y="1371600"/>
-            <a:ext cx="3413455" cy="4572000"/>
+            <a:off x="822960" y="1325880"/>
+            <a:ext cx="10545775" cy="1600200"/>
           </a:xfrm>
           <a:prstGeom prst="roundRect">
             <a:avLst/>
@@ -4790,8 +4790,8 @@
         </p:nvSpPr>
         <p:spPr>
           <a:xfrm>
-            <a:off x="1143000" y="1737360"/>
-            <a:ext cx="2743200" cy="3840480"/>
+            <a:off x="1097280" y="1463040"/>
+            <a:ext cx="10058400" cy="1325880"/>
           </a:xfrm>
           <a:prstGeom prst="rect">
             <a:avLst/>
@@ -4799,13 +4799,13 @@
           <a:noFill/>
         </p:spPr>
         <p:txBody>
-          <a:bodyPr wrap="none">
+          <a:bodyPr wrap="square">
             <a:spAutoFit/>
           </a:bodyPr>
           <a:lstStyle/>
           <a:p>
             <a:pPr>
-              <a:defRPr sz="1100" b="1">
+              <a:defRPr sz="1050" b="1">
                 <a:solidFill>
                   <a:srgbClr val="64748B"/>
                 </a:solidFill>
@@ -4813,15 +4813,15 @@
               </a:defRPr>
             </a:pPr>
             <a:r>
-              <a:t>ASSUMPTION</a:t>
+              <a:t>TAKEOFF WEIGHT SIZING EQUATION (RAYMER METHOD)</a:t>
             </a:r>
           </a:p>
           <a:p>
             <a:pPr>
               <a:spcBef>
-                <a:spcPts val="800"/>
+                <a:spcPts val="300"/>
               </a:spcBef>
-              <a:defRPr sz="2600" b="1">
+              <a:defRPr sz="1700" b="1">
                 <a:solidFill>
                   <a:srgbClr val="0F172A"/>
                 </a:solidFill>
@@ -4829,15 +4829,15 @@
               </a:defRPr>
             </a:pPr>
             <a:r>
-              <a:t>Aircraft design book</a:t>
+              <a:t>W0 = ( W_payload + W_crew )  /  [ 1 − ( We / W0 ) − ( Wf / W0 ) ]</a:t>
             </a:r>
           </a:p>
           <a:p>
             <a:pPr>
               <a:spcBef>
-                <a:spcPts val="600"/>
+                <a:spcPts val="400"/>
               </a:spcBef>
-              <a:defRPr sz="1350" b="1">
+              <a:defRPr sz="1400" b="1">
                 <a:solidFill>
                   <a:srgbClr val="334155"/>
                 </a:solidFill>
@@ -4845,23 +4845,7 @@
               </a:defRPr>
             </a:pPr>
             <a:r>
-              <a:t>Raymer statistical empty weight buildup method</a:t>
-            </a:r>
-          </a:p>
-          <a:p>
-            <a:pPr>
-              <a:spcBef>
-                <a:spcPts val="2600"/>
-              </a:spcBef>
-              <a:defRPr sz="1100">
-                <a:solidFill>
-                  <a:srgbClr val="94A3B8"/>
-                </a:solidFill>
-                <a:latin typeface="Arial"/>
-              </a:defRPr>
-            </a:pPr>
-            <a:r>
-              <a:t>Raymer Methodology</a:t>
+              <a:t>W0 = ( 53,750 kg + 1,260 kg )  /  [ 1 − 0.565 − 0.235 ]  =  55,010 kg / 0.200  =  275,460 kg  (~275.5 t)</a:t>
             </a:r>
           </a:p>
         </p:txBody>
@@ -4874,8 +4858,8 @@
         </p:nvSpPr>
         <p:spPr>
           <a:xfrm>
-            <a:off x="4389120" y="1371600"/>
-            <a:ext cx="3413455" cy="4572000"/>
+            <a:off x="822960" y="3108960"/>
+            <a:ext cx="2542032" cy="3017520"/>
           </a:xfrm>
           <a:prstGeom prst="roundRect">
             <a:avLst/>
@@ -4919,8 +4903,8 @@
         </p:nvSpPr>
         <p:spPr>
           <a:xfrm>
-            <a:off x="4709160" y="1737360"/>
-            <a:ext cx="2743200" cy="3840480"/>
+            <a:off x="1051560" y="3383280"/>
+            <a:ext cx="2103120" cy="2560320"/>
           </a:xfrm>
           <a:prstGeom prst="rect">
             <a:avLst/>
@@ -4928,21 +4912,53 @@
           <a:noFill/>
         </p:spPr>
         <p:txBody>
-          <a:bodyPr wrap="none">
+          <a:bodyPr wrap="square">
             <a:spAutoFit/>
           </a:bodyPr>
           <a:lstStyle/>
           <a:p>
             <a:pPr>
+              <a:defRPr sz="1000" b="1">
+                <a:solidFill>
+                  <a:srgbClr val="64748B"/>
+                </a:solidFill>
+                <a:latin typeface="Arial"/>
+              </a:defRPr>
+            </a:pPr>
+            <a:r>
+              <a:t>EMPTY WEIGHT (We)</a:t>
+            </a:r>
+          </a:p>
+          <a:p>
+            <a:pPr>
+              <a:spcBef>
+                <a:spcPts val="400"/>
+              </a:spcBef>
+              <a:defRPr sz="2200" b="1">
+                <a:solidFill>
+                  <a:srgbClr val="0F172A"/>
+                </a:solidFill>
+                <a:latin typeface="Helvetica Neue"/>
+              </a:defRPr>
+            </a:pPr>
+            <a:r>
+              <a:t>155,600 kg</a:t>
+            </a:r>
+          </a:p>
+          <a:p>
+            <a:pPr>
+              <a:spcBef>
+                <a:spcPts val="200"/>
+              </a:spcBef>
               <a:defRPr sz="1100" b="1">
                 <a:solidFill>
-                  <a:srgbClr val="64748B"/>
-                </a:solidFill>
-                <a:latin typeface="Arial"/>
-              </a:defRPr>
-            </a:pPr>
-            <a:r>
-              <a:t>EMPTY WEIGHT FRACTION</a:t>
+                  <a:srgbClr val="334155"/>
+                </a:solidFill>
+                <a:latin typeface="Helvetica Neue"/>
+              </a:defRPr>
+            </a:pPr>
+            <a:r>
+              <a:t>We / W0 = 0.56 (56.5%)</a:t>
             </a:r>
           </a:p>
           <a:p>
@@ -4950,47 +4966,19 @@
               <a:spcBef>
                 <a:spcPts val="800"/>
               </a:spcBef>
-              <a:defRPr sz="3800" b="1">
-                <a:solidFill>
-                  <a:srgbClr val="0F172A"/>
-                </a:solidFill>
-                <a:latin typeface="Helvetica Neue"/>
-              </a:defRPr>
-            </a:pPr>
-            <a:r>
-              <a:t>0.56</a:t>
-            </a:r>
-          </a:p>
-          <a:p>
-            <a:pPr>
-              <a:spcBef>
-                <a:spcPts val="600"/>
-              </a:spcBef>
-              <a:defRPr sz="1350" b="1">
-                <a:solidFill>
-                  <a:srgbClr val="334155"/>
-                </a:solidFill>
-                <a:latin typeface="Helvetica Neue"/>
-              </a:defRPr>
-            </a:pPr>
-            <a:r>
-              <a:t>We / W0 = 155,600 / 275,460 kg</a:t>
-            </a:r>
-          </a:p>
-          <a:p>
-            <a:pPr>
-              <a:spcBef>
-                <a:spcPts val="2600"/>
-              </a:spcBef>
-              <a:defRPr sz="1100">
-                <a:solidFill>
-                  <a:srgbClr val="94A3B8"/>
+              <a:defRPr sz="1000">
+                <a:solidFill>
+                  <a:srgbClr val="64748B"/>
                 </a:solidFill>
                 <a:latin typeface="Arial"/>
               </a:defRPr>
             </a:pPr>
             <a:r>
-              <a:t>MTOW = 275,460 kg (~275.5 t)</a:t>
+              <a:t>Airframe: 120,200 kg (43.6%)</a:t>
+            </a:r>
+            <a:br/>
+            <a:r>
+              <a:t>Tanks: 35,400 kg (6 × 5,900 kg)</a:t>
             </a:r>
           </a:p>
         </p:txBody>
@@ -5003,8 +4991,8 @@
         </p:nvSpPr>
         <p:spPr>
           <a:xfrm>
-            <a:off x="7955279" y="1371600"/>
-            <a:ext cx="3413455" cy="4572000"/>
+            <a:off x="3493008" y="3108960"/>
+            <a:ext cx="2542032" cy="3017520"/>
           </a:xfrm>
           <a:prstGeom prst="roundRect">
             <a:avLst/>
@@ -5048,8 +5036,8 @@
         </p:nvSpPr>
         <p:spPr>
           <a:xfrm>
-            <a:off x="8275319" y="1737360"/>
-            <a:ext cx="2743200" cy="3840480"/>
+            <a:off x="3721608" y="3383280"/>
+            <a:ext cx="2103120" cy="2560320"/>
           </a:xfrm>
           <a:prstGeom prst="rect">
             <a:avLst/>
@@ -5057,21 +5045,53 @@
           <a:noFill/>
         </p:spPr>
         <p:txBody>
-          <a:bodyPr wrap="none">
+          <a:bodyPr wrap="square">
             <a:spAutoFit/>
           </a:bodyPr>
           <a:lstStyle/>
           <a:p>
             <a:pPr>
+              <a:defRPr sz="1000" b="1">
+                <a:solidFill>
+                  <a:srgbClr val="64748B"/>
+                </a:solidFill>
+                <a:latin typeface="Arial"/>
+              </a:defRPr>
+            </a:pPr>
+            <a:r>
+              <a:t>DESIGN PAYLOAD</a:t>
+            </a:r>
+          </a:p>
+          <a:p>
+            <a:pPr>
+              <a:spcBef>
+                <a:spcPts val="400"/>
+              </a:spcBef>
+              <a:defRPr sz="2200" b="1">
+                <a:solidFill>
+                  <a:srgbClr val="0F172A"/>
+                </a:solidFill>
+                <a:latin typeface="Helvetica Neue"/>
+              </a:defRPr>
+            </a:pPr>
+            <a:r>
+              <a:t>53,750 kg</a:t>
+            </a:r>
+          </a:p>
+          <a:p>
+            <a:pPr>
+              <a:spcBef>
+                <a:spcPts val="200"/>
+              </a:spcBef>
               <a:defRPr sz="1100" b="1">
                 <a:solidFill>
-                  <a:srgbClr val="64748B"/>
-                </a:solidFill>
-                <a:latin typeface="Arial"/>
-              </a:defRPr>
-            </a:pPr>
-            <a:r>
-              <a:t>TANK MASS</a:t>
+                  <a:srgbClr val="334155"/>
+                </a:solidFill>
+                <a:latin typeface="Helvetica Neue"/>
+              </a:defRPr>
+            </a:pPr>
+            <a:r>
+              <a:t>19.5% of MTOW</a:t>
             </a:r>
           </a:p>
           <a:p>
@@ -5079,47 +5099,321 @@
               <a:spcBef>
                 <a:spcPts val="800"/>
               </a:spcBef>
-              <a:defRPr sz="3800" b="1">
-                <a:solidFill>
-                  <a:srgbClr val="0F172A"/>
-                </a:solidFill>
-                <a:latin typeface="Helvetica Neue"/>
-              </a:defRPr>
-            </a:pPr>
-            <a:r>
-              <a:t>35,400 kg</a:t>
+              <a:defRPr sz="1000">
+                <a:solidFill>
+                  <a:srgbClr val="64748B"/>
+                </a:solidFill>
+                <a:latin typeface="Arial"/>
+              </a:defRPr>
+            </a:pPr>
+            <a:r>
+              <a:t>430 Pax @ 100 kg = 43,000 kg</a:t>
+            </a:r>
+            <a:br/>
+            <a:r>
+              <a:t>Containerized Cargo = 10,750 kg</a:t>
+            </a:r>
+          </a:p>
+        </p:txBody>
+      </p:sp>
+      <p:sp>
+        <p:nvSpPr>
+          <p:cNvPr id="10" name="Rounded Rectangle 9"/>
+          <p:cNvSpPr/>
+          <p:nvPr/>
+        </p:nvSpPr>
+        <p:spPr>
+          <a:xfrm>
+            <a:off x="6163056" y="3108960"/>
+            <a:ext cx="2542032" cy="3017520"/>
+          </a:xfrm>
+          <a:prstGeom prst="roundRect">
+            <a:avLst/>
+          </a:prstGeom>
+          <a:solidFill>
+            <a:srgbClr val="F8FAFC"/>
+          </a:solidFill>
+          <a:ln w="9525">
+            <a:solidFill>
+              <a:srgbClr val="E2E8F0"/>
+            </a:solidFill>
+          </a:ln>
+        </p:spPr>
+        <p:style>
+          <a:lnRef idx="1">
+            <a:schemeClr val="accent1"/>
+          </a:lnRef>
+          <a:fillRef idx="3">
+            <a:schemeClr val="accent1"/>
+          </a:fillRef>
+          <a:effectRef idx="2">
+            <a:schemeClr val="accent1"/>
+          </a:effectRef>
+          <a:fontRef idx="minor">
+            <a:schemeClr val="lt1"/>
+          </a:fontRef>
+        </p:style>
+        <p:txBody>
+          <a:bodyPr rtlCol="0" anchor="ctr"/>
+          <a:lstStyle/>
+          <a:p>
+            <a:pPr algn="ctr"/>
+          </a:p>
+        </p:txBody>
+      </p:sp>
+      <p:sp>
+        <p:nvSpPr>
+          <p:cNvPr id="11" name="TextBox 10"/>
+          <p:cNvSpPr txBox="1"/>
+          <p:nvPr/>
+        </p:nvSpPr>
+        <p:spPr>
+          <a:xfrm>
+            <a:off x="6391656" y="3383280"/>
+            <a:ext cx="2103120" cy="2560320"/>
+          </a:xfrm>
+          <a:prstGeom prst="rect">
+            <a:avLst/>
+          </a:prstGeom>
+          <a:noFill/>
+        </p:spPr>
+        <p:txBody>
+          <a:bodyPr wrap="square">
+            <a:spAutoFit/>
+          </a:bodyPr>
+          <a:lstStyle/>
+          <a:p>
+            <a:pPr>
+              <a:defRPr sz="1000" b="1">
+                <a:solidFill>
+                  <a:srgbClr val="64748B"/>
+                </a:solidFill>
+                <a:latin typeface="Arial"/>
+              </a:defRPr>
+            </a:pPr>
+            <a:r>
+              <a:t>MISSION LH2 FUEL</a:t>
             </a:r>
           </a:p>
           <a:p>
             <a:pPr>
               <a:spcBef>
-                <a:spcPts val="600"/>
+                <a:spcPts val="400"/>
               </a:spcBef>
-              <a:defRPr sz="1350" b="1">
-                <a:solidFill>
-                  <a:srgbClr val="334155"/>
+              <a:defRPr sz="2200" b="1">
+                <a:solidFill>
+                  <a:srgbClr val="0F172A"/>
                 </a:solidFill>
                 <a:latin typeface="Helvetica Neue"/>
               </a:defRPr>
             </a:pPr>
             <a:r>
-              <a:t>6 tanks × 5,900 kg</a:t>
+              <a:t>64,850 kg</a:t>
             </a:r>
           </a:p>
           <a:p>
             <a:pPr>
               <a:spcBef>
-                <a:spcPts val="2600"/>
+                <a:spcPts val="200"/>
               </a:spcBef>
-              <a:defRPr sz="1100">
-                <a:solidFill>
-                  <a:srgbClr val="94A3B8"/>
+              <a:defRPr sz="1100" b="1">
+                <a:solidFill>
+                  <a:srgbClr val="334155"/>
+                </a:solidFill>
+                <a:latin typeface="Helvetica Neue"/>
+              </a:defRPr>
+            </a:pPr>
+            <a:r>
+              <a:t>Wf / W0 = 0.235 (23.5%)</a:t>
+            </a:r>
+          </a:p>
+          <a:p>
+            <a:pPr>
+              <a:spcBef>
+                <a:spcPts val="800"/>
+              </a:spcBef>
+              <a:defRPr sz="1000">
+                <a:solidFill>
+                  <a:srgbClr val="64748B"/>
                 </a:solidFill>
                 <a:latin typeface="Arial"/>
               </a:defRPr>
             </a:pPr>
             <a:r>
-              <a:t>Gravimetric index Gi = 0.50</a:t>
+              <a:t>Breguet cruise (12,500 km)</a:t>
+            </a:r>
+            <a:br/>
+            <a:r>
+              <a:t>200 nm diversion + 30 min loiter</a:t>
+            </a:r>
+          </a:p>
+        </p:txBody>
+      </p:sp>
+      <p:sp>
+        <p:nvSpPr>
+          <p:cNvPr id="12" name="Rounded Rectangle 11"/>
+          <p:cNvSpPr/>
+          <p:nvPr/>
+        </p:nvSpPr>
+        <p:spPr>
+          <a:xfrm>
+            <a:off x="8833104" y="3108960"/>
+            <a:ext cx="2542032" cy="3017520"/>
+          </a:xfrm>
+          <a:prstGeom prst="roundRect">
+            <a:avLst/>
+          </a:prstGeom>
+          <a:solidFill>
+            <a:srgbClr val="F8FAFC"/>
+          </a:solidFill>
+          <a:ln w="9525">
+            <a:solidFill>
+              <a:srgbClr val="E2E8F0"/>
+            </a:solidFill>
+          </a:ln>
+        </p:spPr>
+        <p:style>
+          <a:lnRef idx="1">
+            <a:schemeClr val="accent1"/>
+          </a:lnRef>
+          <a:fillRef idx="3">
+            <a:schemeClr val="accent1"/>
+          </a:fillRef>
+          <a:effectRef idx="2">
+            <a:schemeClr val="accent1"/>
+          </a:effectRef>
+          <a:fontRef idx="minor">
+            <a:schemeClr val="lt1"/>
+          </a:fontRef>
+        </p:style>
+        <p:txBody>
+          <a:bodyPr rtlCol="0" anchor="ctr"/>
+          <a:lstStyle/>
+          <a:p>
+            <a:pPr algn="ctr"/>
+          </a:p>
+        </p:txBody>
+      </p:sp>
+      <p:sp>
+        <p:nvSpPr>
+          <p:cNvPr id="13" name="TextBox 12"/>
+          <p:cNvSpPr txBox="1"/>
+          <p:nvPr/>
+        </p:nvSpPr>
+        <p:spPr>
+          <a:xfrm>
+            <a:off x="9061704" y="3383280"/>
+            <a:ext cx="2103120" cy="2560320"/>
+          </a:xfrm>
+          <a:prstGeom prst="rect">
+            <a:avLst/>
+          </a:prstGeom>
+          <a:noFill/>
+        </p:spPr>
+        <p:txBody>
+          <a:bodyPr wrap="square">
+            <a:spAutoFit/>
+          </a:bodyPr>
+          <a:lstStyle/>
+          <a:p>
+            <a:pPr>
+              <a:defRPr sz="1000" b="1">
+                <a:solidFill>
+                  <a:srgbClr val="64748B"/>
+                </a:solidFill>
+                <a:latin typeface="Arial"/>
+              </a:defRPr>
+            </a:pPr>
+            <a:r>
+              <a:t>FLIGHT CREW</a:t>
+            </a:r>
+          </a:p>
+          <a:p>
+            <a:pPr>
+              <a:spcBef>
+                <a:spcPts val="400"/>
+              </a:spcBef>
+              <a:defRPr sz="2200" b="1">
+                <a:solidFill>
+                  <a:srgbClr val="0F172A"/>
+                </a:solidFill>
+                <a:latin typeface="Helvetica Neue"/>
+              </a:defRPr>
+            </a:pPr>
+            <a:r>
+              <a:t>1,260 kg</a:t>
+            </a:r>
+          </a:p>
+          <a:p>
+            <a:pPr>
+              <a:spcBef>
+                <a:spcPts val="200"/>
+              </a:spcBef>
+              <a:defRPr sz="1100" b="1">
+                <a:solidFill>
+                  <a:srgbClr val="334155"/>
+                </a:solidFill>
+                <a:latin typeface="Helvetica Neue"/>
+              </a:defRPr>
+            </a:pPr>
+            <a:r>
+              <a:t>0.5% of MTOW</a:t>
+            </a:r>
+          </a:p>
+          <a:p>
+            <a:pPr>
+              <a:spcBef>
+                <a:spcPts val="800"/>
+              </a:spcBef>
+              <a:defRPr sz="1000">
+                <a:solidFill>
+                  <a:srgbClr val="64748B"/>
+                </a:solidFill>
+                <a:latin typeface="Arial"/>
+              </a:defRPr>
+            </a:pPr>
+            <a:r>
+              <a:t>2 Flight Deck Pilots</a:t>
+            </a:r>
+            <a:br/>
+            <a:r>
+              <a:t>10 Cabin Crew Attendants</a:t>
+            </a:r>
+          </a:p>
+        </p:txBody>
+      </p:sp>
+      <p:sp>
+        <p:nvSpPr>
+          <p:cNvPr id="14" name="TextBox 13"/>
+          <p:cNvSpPr txBox="1"/>
+          <p:nvPr/>
+        </p:nvSpPr>
+        <p:spPr>
+          <a:xfrm>
+            <a:off x="822960" y="6263640"/>
+            <a:ext cx="10545775" cy="320040"/>
+          </a:xfrm>
+          <a:prstGeom prst="rect">
+            <a:avLst/>
+          </a:prstGeom>
+          <a:noFill/>
+        </p:spPr>
+        <p:txBody>
+          <a:bodyPr wrap="none">
+            <a:spAutoFit/>
+          </a:bodyPr>
+          <a:lstStyle/>
+          <a:p>
+            <a:pPr algn="ctr">
+              <a:defRPr sz="1050">
+                <a:solidFill>
+                  <a:srgbClr val="64748B"/>
+                </a:solidFill>
+                <a:latin typeface="Arial"/>
+              </a:defRPr>
+            </a:pPr>
+            <a:r>
+              <a:t>Cryotank Gravimetric Index Gi = 0.50 (M_tank = M_fuel)  •  Raymer Statistical Empty Weight Sizing</a:t>
             </a:r>
           </a:p>
         </p:txBody>

--- a/Aircraft_Design_DT1_EXAELIA_Group13.pptx
+++ b/Aircraft_Design_DT1_EXAELIA_Group13.pptx
@@ -5,16 +5,16 @@
     <p:sldMasterId id="2147483648" r:id="rId1"/>
   </p:sldMasterIdLst>
   <p:sldIdLst>
-    <p:sldId id="256" r:id="rId7"/>
-    <p:sldId id="257" r:id="rId8"/>
-    <p:sldId id="258" r:id="rId9"/>
-    <p:sldId id="259" r:id="rId10"/>
-    <p:sldId id="260" r:id="rId11"/>
-    <p:sldId id="261" r:id="rId12"/>
-    <p:sldId id="262" r:id="rId13"/>
-    <p:sldId id="263" r:id="rId14"/>
+    <p:sldId id="256" r:id="rId2"/>
+    <p:sldId id="257" r:id="rId3"/>
+    <p:sldId id="258" r:id="rId4"/>
+    <p:sldId id="259" r:id="rId5"/>
+    <p:sldId id="260" r:id="rId6"/>
+    <p:sldId id="261" r:id="rId7"/>
+    <p:sldId id="262" r:id="rId8"/>
+    <p:sldId id="263" r:id="rId9"/>
   </p:sldIdLst>
-  <p:sldSz cx="12191695" cy="6858000" type="screen4x3"/>
+  <p:sldSz cx="12192000" cy="6858000"/>
   <p:notesSz cx="6858000" cy="9144000"/>
   <p:defaultTextStyle>
     <a:defPPr>
@@ -111,6 +111,22 @@
       </a:defRPr>
     </a:lvl9pPr>
   </p:defaultTextStyle>
+  <p:extLst>
+    <p:ext uri="{EFAFB233-063F-42B5-8137-9DF3F51BA10A}">
+      <p15:sldGuideLst xmlns:p15="http://schemas.microsoft.com/office/powerpoint/2012/main">
+        <p15:guide id="1" orient="horz" pos="2160">
+          <p15:clr>
+            <a:srgbClr val="A4A3A4"/>
+          </p15:clr>
+        </p15:guide>
+        <p15:guide id="2" pos="2880">
+          <p15:clr>
+            <a:srgbClr val="A4A3A4"/>
+          </p15:clr>
+        </p15:guide>
+      </p15:sldGuideLst>
+    </p:ext>
+  </p:extLst>
 </p:presentation>
 </file>
 
@@ -152,10 +168,9 @@
           <a:lstStyle/>
           <a:p>
             <a:r>
-              <a:rPr lang="en-US" smtClean="0"/>
+              <a:rPr lang="en-US"/>
               <a:t>Click to edit Master title style</a:t>
             </a:r>
-            <a:endParaRPr lang="en-US"/>
           </a:p>
         </p:txBody>
       </p:sp>
@@ -271,10 +286,9 @@
           </a:lstStyle>
           <a:p>
             <a:r>
-              <a:rPr lang="en-US" smtClean="0"/>
+              <a:rPr lang="en-US"/>
               <a:t>Click to edit Master subtitle style</a:t>
             </a:r>
-            <a:endParaRPr lang="en-US"/>
           </a:p>
         </p:txBody>
       </p:sp>
@@ -295,7 +309,7 @@
           <a:p>
             <a:fld id="{5BCAD085-E8A6-8845-BD4E-CB4CCA059FC4}" type="datetimeFigureOut">
               <a:rPr lang="en-US" smtClean="0"/>
-              <a:t>1/27/13</a:t>
+              <a:t>9/11/26</a:t>
             </a:fld>
             <a:endParaRPr lang="en-US"/>
           </a:p>
@@ -389,10 +403,9 @@
           <a:lstStyle/>
           <a:p>
             <a:r>
-              <a:rPr lang="en-US" smtClean="0"/>
+              <a:rPr lang="en-US"/>
               <a:t>Click to edit Master title style</a:t>
             </a:r>
-            <a:endParaRPr lang="en-US"/>
           </a:p>
         </p:txBody>
       </p:sp>
@@ -413,38 +426,37 @@
           <a:p>
             <a:pPr lvl="0"/>
             <a:r>
-              <a:rPr lang="en-US" smtClean="0"/>
+              <a:rPr lang="en-US"/>
               <a:t>Click to edit Master text styles</a:t>
             </a:r>
           </a:p>
           <a:p>
             <a:pPr lvl="1"/>
             <a:r>
-              <a:rPr lang="en-US" smtClean="0"/>
+              <a:rPr lang="en-US"/>
               <a:t>Second level</a:t>
             </a:r>
           </a:p>
           <a:p>
             <a:pPr lvl="2"/>
             <a:r>
-              <a:rPr lang="en-US" smtClean="0"/>
+              <a:rPr lang="en-US"/>
               <a:t>Third level</a:t>
             </a:r>
           </a:p>
           <a:p>
             <a:pPr lvl="3"/>
             <a:r>
-              <a:rPr lang="en-US" smtClean="0"/>
+              <a:rPr lang="en-US"/>
               <a:t>Fourth level</a:t>
             </a:r>
           </a:p>
           <a:p>
             <a:pPr lvl="4"/>
             <a:r>
-              <a:rPr lang="en-US" smtClean="0"/>
+              <a:rPr lang="en-US"/>
               <a:t>Fifth level</a:t>
             </a:r>
-            <a:endParaRPr lang="en-US"/>
           </a:p>
         </p:txBody>
       </p:sp>
@@ -465,7 +477,7 @@
           <a:p>
             <a:fld id="{5BCAD085-E8A6-8845-BD4E-CB4CCA059FC4}" type="datetimeFigureOut">
               <a:rPr lang="en-US" smtClean="0"/>
-              <a:t>1/27/13</a:t>
+              <a:t>9/11/26</a:t>
             </a:fld>
             <a:endParaRPr lang="en-US"/>
           </a:p>
@@ -564,10 +576,9 @@
           <a:lstStyle/>
           <a:p>
             <a:r>
-              <a:rPr lang="en-US" smtClean="0"/>
+              <a:rPr lang="en-US"/>
               <a:t>Click to edit Master title style</a:t>
             </a:r>
-            <a:endParaRPr lang="en-US"/>
           </a:p>
         </p:txBody>
       </p:sp>
@@ -593,38 +604,37 @@
           <a:p>
             <a:pPr lvl="0"/>
             <a:r>
-              <a:rPr lang="en-US" smtClean="0"/>
+              <a:rPr lang="en-US"/>
               <a:t>Click to edit Master text styles</a:t>
             </a:r>
           </a:p>
           <a:p>
             <a:pPr lvl="1"/>
             <a:r>
-              <a:rPr lang="en-US" smtClean="0"/>
+              <a:rPr lang="en-US"/>
               <a:t>Second level</a:t>
             </a:r>
           </a:p>
           <a:p>
             <a:pPr lvl="2"/>
             <a:r>
-              <a:rPr lang="en-US" smtClean="0"/>
+              <a:rPr lang="en-US"/>
               <a:t>Third level</a:t>
             </a:r>
           </a:p>
           <a:p>
             <a:pPr lvl="3"/>
             <a:r>
-              <a:rPr lang="en-US" smtClean="0"/>
+              <a:rPr lang="en-US"/>
               <a:t>Fourth level</a:t>
             </a:r>
           </a:p>
           <a:p>
             <a:pPr lvl="4"/>
             <a:r>
-              <a:rPr lang="en-US" smtClean="0"/>
+              <a:rPr lang="en-US"/>
               <a:t>Fifth level</a:t>
             </a:r>
-            <a:endParaRPr lang="en-US"/>
           </a:p>
         </p:txBody>
       </p:sp>
@@ -645,7 +655,7 @@
           <a:p>
             <a:fld id="{5BCAD085-E8A6-8845-BD4E-CB4CCA059FC4}" type="datetimeFigureOut">
               <a:rPr lang="en-US" smtClean="0"/>
-              <a:t>1/27/13</a:t>
+              <a:t>9/11/26</a:t>
             </a:fld>
             <a:endParaRPr lang="en-US"/>
           </a:p>
@@ -739,10 +749,9 @@
           <a:lstStyle/>
           <a:p>
             <a:r>
-              <a:rPr lang="en-US" smtClean="0"/>
+              <a:rPr lang="en-US"/>
               <a:t>Click to edit Master title style</a:t>
             </a:r>
-            <a:endParaRPr lang="en-US"/>
           </a:p>
         </p:txBody>
       </p:sp>
@@ -763,38 +772,37 @@
           <a:p>
             <a:pPr lvl="0"/>
             <a:r>
-              <a:rPr lang="en-US" smtClean="0"/>
+              <a:rPr lang="en-US"/>
               <a:t>Click to edit Master text styles</a:t>
             </a:r>
           </a:p>
           <a:p>
             <a:pPr lvl="1"/>
             <a:r>
-              <a:rPr lang="en-US" smtClean="0"/>
+              <a:rPr lang="en-US"/>
               <a:t>Second level</a:t>
             </a:r>
           </a:p>
           <a:p>
             <a:pPr lvl="2"/>
             <a:r>
-              <a:rPr lang="en-US" smtClean="0"/>
+              <a:rPr lang="en-US"/>
               <a:t>Third level</a:t>
             </a:r>
           </a:p>
           <a:p>
             <a:pPr lvl="3"/>
             <a:r>
-              <a:rPr lang="en-US" smtClean="0"/>
+              <a:rPr lang="en-US"/>
               <a:t>Fourth level</a:t>
             </a:r>
           </a:p>
           <a:p>
             <a:pPr lvl="4"/>
             <a:r>
-              <a:rPr lang="en-US" smtClean="0"/>
+              <a:rPr lang="en-US"/>
               <a:t>Fifth level</a:t>
             </a:r>
-            <a:endParaRPr lang="en-US"/>
           </a:p>
         </p:txBody>
       </p:sp>
@@ -815,7 +823,7 @@
           <a:p>
             <a:fld id="{5BCAD085-E8A6-8845-BD4E-CB4CCA059FC4}" type="datetimeFigureOut">
               <a:rPr lang="en-US" smtClean="0"/>
-              <a:t>1/27/13</a:t>
+              <a:t>9/11/26</a:t>
             </a:fld>
             <a:endParaRPr lang="en-US"/>
           </a:p>
@@ -918,10 +926,9 @@
           </a:lstStyle>
           <a:p>
             <a:r>
-              <a:rPr lang="en-US" smtClean="0"/>
+              <a:rPr lang="en-US"/>
               <a:t>Click to edit Master title style</a:t>
             </a:r>
-            <a:endParaRPr lang="en-US"/>
           </a:p>
         </p:txBody>
       </p:sp>
@@ -1038,7 +1045,7 @@
           <a:p>
             <a:pPr lvl="0"/>
             <a:r>
-              <a:rPr lang="en-US" smtClean="0"/>
+              <a:rPr lang="en-US"/>
               <a:t>Click to edit Master text styles</a:t>
             </a:r>
           </a:p>
@@ -1061,7 +1068,7 @@
           <a:p>
             <a:fld id="{5BCAD085-E8A6-8845-BD4E-CB4CCA059FC4}" type="datetimeFigureOut">
               <a:rPr lang="en-US" smtClean="0"/>
-              <a:t>1/27/13</a:t>
+              <a:t>9/11/26</a:t>
             </a:fld>
             <a:endParaRPr lang="en-US"/>
           </a:p>
@@ -1155,10 +1162,9 @@
           <a:lstStyle/>
           <a:p>
             <a:r>
-              <a:rPr lang="en-US" smtClean="0"/>
+              <a:rPr lang="en-US"/>
               <a:t>Click to edit Master title style</a:t>
             </a:r>
-            <a:endParaRPr lang="en-US"/>
           </a:p>
         </p:txBody>
       </p:sp>
@@ -1212,38 +1218,37 @@
           <a:p>
             <a:pPr lvl="0"/>
             <a:r>
-              <a:rPr lang="en-US" smtClean="0"/>
+              <a:rPr lang="en-US"/>
               <a:t>Click to edit Master text styles</a:t>
             </a:r>
           </a:p>
           <a:p>
             <a:pPr lvl="1"/>
             <a:r>
-              <a:rPr lang="en-US" smtClean="0"/>
+              <a:rPr lang="en-US"/>
               <a:t>Second level</a:t>
             </a:r>
           </a:p>
           <a:p>
             <a:pPr lvl="2"/>
             <a:r>
-              <a:rPr lang="en-US" smtClean="0"/>
+              <a:rPr lang="en-US"/>
               <a:t>Third level</a:t>
             </a:r>
           </a:p>
           <a:p>
             <a:pPr lvl="3"/>
             <a:r>
-              <a:rPr lang="en-US" smtClean="0"/>
+              <a:rPr lang="en-US"/>
               <a:t>Fourth level</a:t>
             </a:r>
           </a:p>
           <a:p>
             <a:pPr lvl="4"/>
             <a:r>
-              <a:rPr lang="en-US" smtClean="0"/>
+              <a:rPr lang="en-US"/>
               <a:t>Fifth level</a:t>
             </a:r>
-            <a:endParaRPr lang="en-US"/>
           </a:p>
         </p:txBody>
       </p:sp>
@@ -1297,38 +1302,37 @@
           <a:p>
             <a:pPr lvl="0"/>
             <a:r>
-              <a:rPr lang="en-US" smtClean="0"/>
+              <a:rPr lang="en-US"/>
               <a:t>Click to edit Master text styles</a:t>
             </a:r>
           </a:p>
           <a:p>
             <a:pPr lvl="1"/>
             <a:r>
-              <a:rPr lang="en-US" smtClean="0"/>
+              <a:rPr lang="en-US"/>
               <a:t>Second level</a:t>
             </a:r>
           </a:p>
           <a:p>
             <a:pPr lvl="2"/>
             <a:r>
-              <a:rPr lang="en-US" smtClean="0"/>
+              <a:rPr lang="en-US"/>
               <a:t>Third level</a:t>
             </a:r>
           </a:p>
           <a:p>
             <a:pPr lvl="3"/>
             <a:r>
-              <a:rPr lang="en-US" smtClean="0"/>
+              <a:rPr lang="en-US"/>
               <a:t>Fourth level</a:t>
             </a:r>
           </a:p>
           <a:p>
             <a:pPr lvl="4"/>
             <a:r>
-              <a:rPr lang="en-US" smtClean="0"/>
+              <a:rPr lang="en-US"/>
               <a:t>Fifth level</a:t>
             </a:r>
-            <a:endParaRPr lang="en-US"/>
           </a:p>
         </p:txBody>
       </p:sp>
@@ -1349,7 +1353,7 @@
           <a:p>
             <a:fld id="{5BCAD085-E8A6-8845-BD4E-CB4CCA059FC4}" type="datetimeFigureOut">
               <a:rPr lang="en-US" smtClean="0"/>
-              <a:t>1/27/13</a:t>
+              <a:t>9/11/26</a:t>
             </a:fld>
             <a:endParaRPr lang="en-US"/>
           </a:p>
@@ -1447,10 +1451,9 @@
           </a:lstStyle>
           <a:p>
             <a:r>
-              <a:rPr lang="en-US" smtClean="0"/>
+              <a:rPr lang="en-US"/>
               <a:t>Click to edit Master title style</a:t>
             </a:r>
-            <a:endParaRPr lang="en-US"/>
           </a:p>
         </p:txBody>
       </p:sp>
@@ -1513,7 +1516,7 @@
           <a:p>
             <a:pPr lvl="0"/>
             <a:r>
-              <a:rPr lang="en-US" smtClean="0"/>
+              <a:rPr lang="en-US"/>
               <a:t>Click to edit Master text styles</a:t>
             </a:r>
           </a:p>
@@ -1569,38 +1572,37 @@
           <a:p>
             <a:pPr lvl="0"/>
             <a:r>
-              <a:rPr lang="en-US" smtClean="0"/>
+              <a:rPr lang="en-US"/>
               <a:t>Click to edit Master text styles</a:t>
             </a:r>
           </a:p>
           <a:p>
             <a:pPr lvl="1"/>
             <a:r>
-              <a:rPr lang="en-US" smtClean="0"/>
+              <a:rPr lang="en-US"/>
               <a:t>Second level</a:t>
             </a:r>
           </a:p>
           <a:p>
             <a:pPr lvl="2"/>
             <a:r>
-              <a:rPr lang="en-US" smtClean="0"/>
+              <a:rPr lang="en-US"/>
               <a:t>Third level</a:t>
             </a:r>
           </a:p>
           <a:p>
             <a:pPr lvl="3"/>
             <a:r>
-              <a:rPr lang="en-US" smtClean="0"/>
+              <a:rPr lang="en-US"/>
               <a:t>Fourth level</a:t>
             </a:r>
           </a:p>
           <a:p>
             <a:pPr lvl="4"/>
             <a:r>
-              <a:rPr lang="en-US" smtClean="0"/>
+              <a:rPr lang="en-US"/>
               <a:t>Fifth level</a:t>
             </a:r>
-            <a:endParaRPr lang="en-US"/>
           </a:p>
         </p:txBody>
       </p:sp>
@@ -1663,7 +1665,7 @@
           <a:p>
             <a:pPr lvl="0"/>
             <a:r>
-              <a:rPr lang="en-US" smtClean="0"/>
+              <a:rPr lang="en-US"/>
               <a:t>Click to edit Master text styles</a:t>
             </a:r>
           </a:p>
@@ -1719,38 +1721,37 @@
           <a:p>
             <a:pPr lvl="0"/>
             <a:r>
-              <a:rPr lang="en-US" smtClean="0"/>
+              <a:rPr lang="en-US"/>
               <a:t>Click to edit Master text styles</a:t>
             </a:r>
           </a:p>
           <a:p>
             <a:pPr lvl="1"/>
             <a:r>
-              <a:rPr lang="en-US" smtClean="0"/>
+              <a:rPr lang="en-US"/>
               <a:t>Second level</a:t>
             </a:r>
           </a:p>
           <a:p>
             <a:pPr lvl="2"/>
             <a:r>
-              <a:rPr lang="en-US" smtClean="0"/>
+              <a:rPr lang="en-US"/>
               <a:t>Third level</a:t>
             </a:r>
           </a:p>
           <a:p>
             <a:pPr lvl="3"/>
             <a:r>
-              <a:rPr lang="en-US" smtClean="0"/>
+              <a:rPr lang="en-US"/>
               <a:t>Fourth level</a:t>
             </a:r>
           </a:p>
           <a:p>
             <a:pPr lvl="4"/>
             <a:r>
-              <a:rPr lang="en-US" smtClean="0"/>
+              <a:rPr lang="en-US"/>
               <a:t>Fifth level</a:t>
             </a:r>
-            <a:endParaRPr lang="en-US"/>
           </a:p>
         </p:txBody>
       </p:sp>
@@ -1771,7 +1772,7 @@
           <a:p>
             <a:fld id="{5BCAD085-E8A6-8845-BD4E-CB4CCA059FC4}" type="datetimeFigureOut">
               <a:rPr lang="en-US" smtClean="0"/>
-              <a:t>1/27/13</a:t>
+              <a:t>9/11/26</a:t>
             </a:fld>
             <a:endParaRPr lang="en-US"/>
           </a:p>
@@ -1865,10 +1866,9 @@
           <a:lstStyle/>
           <a:p>
             <a:r>
-              <a:rPr lang="en-US" smtClean="0"/>
+              <a:rPr lang="en-US"/>
               <a:t>Click to edit Master title style</a:t>
             </a:r>
-            <a:endParaRPr lang="en-US"/>
           </a:p>
         </p:txBody>
       </p:sp>
@@ -1889,7 +1889,7 @@
           <a:p>
             <a:fld id="{5BCAD085-E8A6-8845-BD4E-CB4CCA059FC4}" type="datetimeFigureOut">
               <a:rPr lang="en-US" smtClean="0"/>
-              <a:t>1/27/13</a:t>
+              <a:t>9/11/26</a:t>
             </a:fld>
             <a:endParaRPr lang="en-US"/>
           </a:p>
@@ -1984,7 +1984,7 @@
           <a:p>
             <a:fld id="{5BCAD085-E8A6-8845-BD4E-CB4CCA059FC4}" type="datetimeFigureOut">
               <a:rPr lang="en-US" smtClean="0"/>
-              <a:t>1/27/13</a:t>
+              <a:t>9/11/26</a:t>
             </a:fld>
             <a:endParaRPr lang="en-US"/>
           </a:p>
@@ -2087,10 +2087,9 @@
           </a:lstStyle>
           <a:p>
             <a:r>
-              <a:rPr lang="en-US" smtClean="0"/>
+              <a:rPr lang="en-US"/>
               <a:t>Click to edit Master title style</a:t>
             </a:r>
-            <a:endParaRPr lang="en-US"/>
           </a:p>
         </p:txBody>
       </p:sp>
@@ -2144,38 +2143,37 @@
           <a:p>
             <a:pPr lvl="0"/>
             <a:r>
-              <a:rPr lang="en-US" smtClean="0"/>
+              <a:rPr lang="en-US"/>
               <a:t>Click to edit Master text styles</a:t>
             </a:r>
           </a:p>
           <a:p>
             <a:pPr lvl="1"/>
             <a:r>
-              <a:rPr lang="en-US" smtClean="0"/>
+              <a:rPr lang="en-US"/>
               <a:t>Second level</a:t>
             </a:r>
           </a:p>
           <a:p>
             <a:pPr lvl="2"/>
             <a:r>
-              <a:rPr lang="en-US" smtClean="0"/>
+              <a:rPr lang="en-US"/>
               <a:t>Third level</a:t>
             </a:r>
           </a:p>
           <a:p>
             <a:pPr lvl="3"/>
             <a:r>
-              <a:rPr lang="en-US" smtClean="0"/>
+              <a:rPr lang="en-US"/>
               <a:t>Fourth level</a:t>
             </a:r>
           </a:p>
           <a:p>
             <a:pPr lvl="4"/>
             <a:r>
-              <a:rPr lang="en-US" smtClean="0"/>
+              <a:rPr lang="en-US"/>
               <a:t>Fifth level</a:t>
             </a:r>
-            <a:endParaRPr lang="en-US"/>
           </a:p>
         </p:txBody>
       </p:sp>
@@ -2238,7 +2236,7 @@
           <a:p>
             <a:pPr lvl="0"/>
             <a:r>
-              <a:rPr lang="en-US" smtClean="0"/>
+              <a:rPr lang="en-US"/>
               <a:t>Click to edit Master text styles</a:t>
             </a:r>
           </a:p>
@@ -2261,7 +2259,7 @@
           <a:p>
             <a:fld id="{5BCAD085-E8A6-8845-BD4E-CB4CCA059FC4}" type="datetimeFigureOut">
               <a:rPr lang="en-US" smtClean="0"/>
-              <a:t>1/27/13</a:t>
+              <a:t>9/11/26</a:t>
             </a:fld>
             <a:endParaRPr lang="en-US"/>
           </a:p>
@@ -2364,10 +2362,9 @@
           </a:lstStyle>
           <a:p>
             <a:r>
-              <a:rPr lang="en-US" smtClean="0"/>
+              <a:rPr lang="en-US"/>
               <a:t>Click to edit Master title style</a:t>
             </a:r>
-            <a:endParaRPr lang="en-US"/>
           </a:p>
         </p:txBody>
       </p:sp>
@@ -2491,7 +2488,7 @@
           <a:p>
             <a:pPr lvl="0"/>
             <a:r>
-              <a:rPr lang="en-US" smtClean="0"/>
+              <a:rPr lang="en-US"/>
               <a:t>Click to edit Master text styles</a:t>
             </a:r>
           </a:p>
@@ -2514,7 +2511,7 @@
           <a:p>
             <a:fld id="{5BCAD085-E8A6-8845-BD4E-CB4CCA059FC4}" type="datetimeFigureOut">
               <a:rPr lang="en-US" smtClean="0"/>
-              <a:t>1/27/13</a:t>
+              <a:t>9/11/26</a:t>
             </a:fld>
             <a:endParaRPr lang="en-US"/>
           </a:p>
@@ -2623,10 +2620,9 @@
           <a:lstStyle/>
           <a:p>
             <a:r>
-              <a:rPr lang="en-US" smtClean="0"/>
+              <a:rPr lang="en-US"/>
               <a:t>Click to edit Master title style</a:t>
             </a:r>
-            <a:endParaRPr lang="en-US"/>
           </a:p>
         </p:txBody>
       </p:sp>
@@ -2657,38 +2653,37 @@
           <a:p>
             <a:pPr lvl="0"/>
             <a:r>
-              <a:rPr lang="en-US" smtClean="0"/>
+              <a:rPr lang="en-US"/>
               <a:t>Click to edit Master text styles</a:t>
             </a:r>
           </a:p>
           <a:p>
             <a:pPr lvl="1"/>
             <a:r>
-              <a:rPr lang="en-US" smtClean="0"/>
+              <a:rPr lang="en-US"/>
               <a:t>Second level</a:t>
             </a:r>
           </a:p>
           <a:p>
             <a:pPr lvl="2"/>
             <a:r>
-              <a:rPr lang="en-US" smtClean="0"/>
+              <a:rPr lang="en-US"/>
               <a:t>Third level</a:t>
             </a:r>
           </a:p>
           <a:p>
             <a:pPr lvl="3"/>
             <a:r>
-              <a:rPr lang="en-US" smtClean="0"/>
+              <a:rPr lang="en-US"/>
               <a:t>Fourth level</a:t>
             </a:r>
           </a:p>
           <a:p>
             <a:pPr lvl="4"/>
             <a:r>
-              <a:rPr lang="en-US" smtClean="0"/>
+              <a:rPr lang="en-US"/>
               <a:t>Fifth level</a:t>
             </a:r>
-            <a:endParaRPr lang="en-US"/>
           </a:p>
         </p:txBody>
       </p:sp>
@@ -2727,7 +2722,7 @@
           <a:p>
             <a:fld id="{5BCAD085-E8A6-8845-BD4E-CB4CCA059FC4}" type="datetimeFigureOut">
               <a:rPr lang="en-US" smtClean="0"/>
-              <a:t>1/27/13</a:t>
+              <a:t>9/11/26</a:t>
             </a:fld>
             <a:endParaRPr lang="en-US"/>
           </a:p>
@@ -3086,7 +3081,7 @@
 </file>
 
 <file path=ppt/slides/slide1.xml><?xml version="1.0" encoding="utf-8"?>
-<p:sld xmlns:a="http://schemas.openxmlformats.org/drawingml/2006/main" xmlns:p="http://schemas.openxmlformats.org/presentationml/2006/main" xmlns:r="http://schemas.openxmlformats.org/officeDocument/2006/relationships">
+<p:sld xmlns:a="http://schemas.openxmlformats.org/drawingml/2006/main" xmlns:r="http://schemas.openxmlformats.org/officeDocument/2006/relationships" xmlns:p="http://schemas.openxmlformats.org/presentationml/2006/main">
   <p:cSld>
     <p:bg>
       <p:bgPr>
@@ -3102,7 +3097,14 @@
         <p:cNvGrpSpPr/>
         <p:nvPr/>
       </p:nvGrpSpPr>
-      <p:grpSpPr/>
+      <p:grpSpPr>
+        <a:xfrm>
+          <a:off x="0" y="0"/>
+          <a:ext cx="0" cy="0"/>
+          <a:chOff x="0" y="0"/>
+          <a:chExt cx="0" cy="0"/>
+        </a:xfrm>
+      </p:grpSpPr>
       <p:sp>
         <p:nvSpPr>
           <p:cNvPr id="2" name="TextBox 1"/>
@@ -3305,6 +3307,7 @@
           <a:lstStyle/>
           <a:p>
             <a:pPr algn="ctr"/>
+            <a:endParaRPr/>
           </a:p>
         </p:txBody>
       </p:sp>
@@ -3353,7 +3356,7 @@
 </file>
 
 <file path=ppt/slides/slide2.xml><?xml version="1.0" encoding="utf-8"?>
-<p:sld xmlns:a="http://schemas.openxmlformats.org/drawingml/2006/main" xmlns:p="http://schemas.openxmlformats.org/presentationml/2006/main" xmlns:r="http://schemas.openxmlformats.org/officeDocument/2006/relationships">
+<p:sld xmlns:a="http://schemas.openxmlformats.org/drawingml/2006/main" xmlns:r="http://schemas.openxmlformats.org/officeDocument/2006/relationships" xmlns:p="http://schemas.openxmlformats.org/presentationml/2006/main">
   <p:cSld>
     <p:bg>
       <p:bgPr>
@@ -3369,7 +3372,14 @@
         <p:cNvGrpSpPr/>
         <p:nvPr/>
       </p:nvGrpSpPr>
-      <p:grpSpPr/>
+      <p:grpSpPr>
+        <a:xfrm>
+          <a:off x="0" y="0"/>
+          <a:ext cx="0" cy="0"/>
+          <a:chOff x="0" y="0"/>
+          <a:chExt cx="0" cy="0"/>
+        </a:xfrm>
+      </p:grpSpPr>
       <p:sp>
         <p:nvSpPr>
           <p:cNvPr id="2" name="TextBox 1"/>
@@ -3387,7 +3397,7 @@
           <a:noFill/>
         </p:spPr>
         <p:txBody>
-          <a:bodyPr wrap="square" lIns="0" rIns="0" tIns="0" bIns="0">
+          <a:bodyPr wrap="square" lIns="0" tIns="0" rIns="0" bIns="0">
             <a:spAutoFit/>
           </a:bodyPr>
           <a:lstStyle/>
@@ -3423,7 +3433,7 @@
           <a:noFill/>
         </p:spPr>
         <p:txBody>
-          <a:bodyPr wrap="square" lIns="0" rIns="0" tIns="0" bIns="0">
+          <a:bodyPr wrap="square" lIns="0" tIns="0" rIns="0" bIns="0">
             <a:spAutoFit/>
           </a:bodyPr>
           <a:lstStyle/>
@@ -3484,6 +3494,7 @@
           <a:lstStyle/>
           <a:p>
             <a:pPr algn="ctr"/>
+            <a:endParaRPr/>
           </a:p>
         </p:txBody>
       </p:sp>
@@ -3556,7 +3567,7 @@
 </file>
 
 <file path=ppt/slides/slide3.xml><?xml version="1.0" encoding="utf-8"?>
-<p:sld xmlns:a="http://schemas.openxmlformats.org/drawingml/2006/main" xmlns:p="http://schemas.openxmlformats.org/presentationml/2006/main" xmlns:r="http://schemas.openxmlformats.org/officeDocument/2006/relationships">
+<p:sld xmlns:a="http://schemas.openxmlformats.org/drawingml/2006/main" xmlns:r="http://schemas.openxmlformats.org/officeDocument/2006/relationships" xmlns:p="http://schemas.openxmlformats.org/presentationml/2006/main">
   <p:cSld>
     <p:bg>
       <p:bgPr>
@@ -3572,7 +3583,14 @@
         <p:cNvGrpSpPr/>
         <p:nvPr/>
       </p:nvGrpSpPr>
-      <p:grpSpPr/>
+      <p:grpSpPr>
+        <a:xfrm>
+          <a:off x="0" y="0"/>
+          <a:ext cx="0" cy="0"/>
+          <a:chOff x="0" y="0"/>
+          <a:chExt cx="0" cy="0"/>
+        </a:xfrm>
+      </p:grpSpPr>
       <p:sp>
         <p:nvSpPr>
           <p:cNvPr id="2" name="TextBox 1"/>
@@ -3590,7 +3608,7 @@
           <a:noFill/>
         </p:spPr>
         <p:txBody>
-          <a:bodyPr wrap="square" lIns="0" rIns="0" tIns="0" bIns="0">
+          <a:bodyPr wrap="square" lIns="0" tIns="0" rIns="0" bIns="0">
             <a:spAutoFit/>
           </a:bodyPr>
           <a:lstStyle/>
@@ -3626,7 +3644,7 @@
           <a:noFill/>
         </p:spPr>
         <p:txBody>
-          <a:bodyPr wrap="square" lIns="0" rIns="0" tIns="0" bIns="0">
+          <a:bodyPr wrap="square" lIns="0" tIns="0" rIns="0" bIns="0">
             <a:spAutoFit/>
           </a:bodyPr>
           <a:lstStyle/>
@@ -3714,7 +3732,7 @@
 </file>
 
 <file path=ppt/slides/slide4.xml><?xml version="1.0" encoding="utf-8"?>
-<p:sld xmlns:a="http://schemas.openxmlformats.org/drawingml/2006/main" xmlns:p="http://schemas.openxmlformats.org/presentationml/2006/main" xmlns:r="http://schemas.openxmlformats.org/officeDocument/2006/relationships">
+<p:sld xmlns:a="http://schemas.openxmlformats.org/drawingml/2006/main" xmlns:r="http://schemas.openxmlformats.org/officeDocument/2006/relationships" xmlns:p="http://schemas.openxmlformats.org/presentationml/2006/main">
   <p:cSld>
     <p:bg>
       <p:bgPr>
@@ -3730,7 +3748,14 @@
         <p:cNvGrpSpPr/>
         <p:nvPr/>
       </p:nvGrpSpPr>
-      <p:grpSpPr/>
+      <p:grpSpPr>
+        <a:xfrm>
+          <a:off x="0" y="0"/>
+          <a:ext cx="0" cy="0"/>
+          <a:chOff x="0" y="0"/>
+          <a:chExt cx="0" cy="0"/>
+        </a:xfrm>
+      </p:grpSpPr>
       <p:sp>
         <p:nvSpPr>
           <p:cNvPr id="2" name="TextBox 1"/>
@@ -3748,7 +3773,7 @@
           <a:noFill/>
         </p:spPr>
         <p:txBody>
-          <a:bodyPr wrap="square" lIns="0" rIns="0" tIns="0" bIns="0">
+          <a:bodyPr wrap="square" lIns="0" tIns="0" rIns="0" bIns="0">
             <a:spAutoFit/>
           </a:bodyPr>
           <a:lstStyle/>
@@ -3784,7 +3809,7 @@
           <a:noFill/>
         </p:spPr>
         <p:txBody>
-          <a:bodyPr wrap="square" lIns="0" rIns="0" tIns="0" bIns="0">
+          <a:bodyPr wrap="square" lIns="0" tIns="0" rIns="0" bIns="0">
             <a:spAutoFit/>
           </a:bodyPr>
           <a:lstStyle/>
@@ -3836,7 +3861,7 @@
         <p:spPr>
           <a:xfrm>
             <a:off x="7315200" y="1463040"/>
-            <a:ext cx="4053535" cy="2148840"/>
+            <a:ext cx="4519448" cy="2148840"/>
           </a:xfrm>
           <a:prstGeom prst="roundRect">
             <a:avLst/>
@@ -3869,6 +3894,7 @@
           <a:lstStyle/>
           <a:p>
             <a:pPr algn="ctr"/>
+            <a:endParaRPr/>
           </a:p>
         </p:txBody>
       </p:sp>
@@ -3903,6 +3929,7 @@
               </a:defRPr>
             </a:pPr>
             <a:r>
+              <a:rPr dirty="0"/>
               <a:t>FOLLOWING TREND LINE</a:t>
             </a:r>
           </a:p>
@@ -3919,6 +3946,7 @@
               </a:defRPr>
             </a:pPr>
             <a:r>
+              <a:rPr dirty="0"/>
               <a:t>2050 SFC ~ 12.4 mg/Ns</a:t>
             </a:r>
           </a:p>
@@ -3935,6 +3963,7 @@
               </a:defRPr>
             </a:pPr>
             <a:r>
+              <a:rPr dirty="0"/>
               <a:t>Baseline turbofan historical efficiency extrapolation</a:t>
             </a:r>
           </a:p>
@@ -3982,6 +4011,7 @@
           <a:lstStyle/>
           <a:p>
             <a:pPr algn="ctr"/>
+            <a:endParaRPr/>
           </a:p>
         </p:txBody>
       </p:sp>
@@ -4062,7 +4092,7 @@
 </file>
 
 <file path=ppt/slides/slide5.xml><?xml version="1.0" encoding="utf-8"?>
-<p:sld xmlns:a="http://schemas.openxmlformats.org/drawingml/2006/main" xmlns:p="http://schemas.openxmlformats.org/presentationml/2006/main" xmlns:r="http://schemas.openxmlformats.org/officeDocument/2006/relationships">
+<p:sld xmlns:a="http://schemas.openxmlformats.org/drawingml/2006/main" xmlns:r="http://schemas.openxmlformats.org/officeDocument/2006/relationships" xmlns:p="http://schemas.openxmlformats.org/presentationml/2006/main">
   <p:cSld>
     <p:bg>
       <p:bgPr>
@@ -4078,7 +4108,14 @@
         <p:cNvGrpSpPr/>
         <p:nvPr/>
       </p:nvGrpSpPr>
-      <p:grpSpPr/>
+      <p:grpSpPr>
+        <a:xfrm>
+          <a:off x="0" y="0"/>
+          <a:ext cx="0" cy="0"/>
+          <a:chOff x="0" y="0"/>
+          <a:chExt cx="0" cy="0"/>
+        </a:xfrm>
+      </p:grpSpPr>
       <p:sp>
         <p:nvSpPr>
           <p:cNvPr id="2" name="TextBox 1"/>
@@ -4096,7 +4133,7 @@
           <a:noFill/>
         </p:spPr>
         <p:txBody>
-          <a:bodyPr wrap="square" lIns="0" rIns="0" tIns="0" bIns="0">
+          <a:bodyPr wrap="square" lIns="0" tIns="0" rIns="0" bIns="0">
             <a:spAutoFit/>
           </a:bodyPr>
           <a:lstStyle/>
@@ -4132,7 +4169,7 @@
           <a:noFill/>
         </p:spPr>
         <p:txBody>
-          <a:bodyPr wrap="square" lIns="0" rIns="0" tIns="0" bIns="0">
+          <a:bodyPr wrap="square" lIns="0" tIns="0" rIns="0" bIns="0">
             <a:spAutoFit/>
           </a:bodyPr>
           <a:lstStyle/>
@@ -4193,6 +4230,7 @@
           <a:lstStyle/>
           <a:p>
             <a:pPr algn="ctr"/>
+            <a:endParaRPr/>
           </a:p>
         </p:txBody>
       </p:sp>
@@ -4306,6 +4344,7 @@
           <a:lstStyle/>
           <a:p>
             <a:pPr algn="ctr"/>
+            <a:endParaRPr/>
           </a:p>
         </p:txBody>
       </p:sp>
@@ -4419,6 +4458,7 @@
           <a:lstStyle/>
           <a:p>
             <a:pPr algn="ctr"/>
+            <a:endParaRPr/>
           </a:p>
         </p:txBody>
       </p:sp>
@@ -4532,6 +4572,7 @@
           <a:lstStyle/>
           <a:p>
             <a:pPr algn="ctr"/>
+            <a:endParaRPr/>
           </a:p>
         </p:txBody>
       </p:sp>
@@ -4648,7 +4689,7 @@
 </file>
 
 <file path=ppt/slides/slide6.xml><?xml version="1.0" encoding="utf-8"?>
-<p:sld xmlns:a="http://schemas.openxmlformats.org/drawingml/2006/main" xmlns:p="http://schemas.openxmlformats.org/presentationml/2006/main" xmlns:r="http://schemas.openxmlformats.org/officeDocument/2006/relationships">
+<p:sld xmlns:a="http://schemas.openxmlformats.org/drawingml/2006/main" xmlns:r="http://schemas.openxmlformats.org/officeDocument/2006/relationships" xmlns:p="http://schemas.openxmlformats.org/presentationml/2006/main">
   <p:cSld>
     <p:bg>
       <p:bgPr>
@@ -4664,7 +4705,14 @@
         <p:cNvGrpSpPr/>
         <p:nvPr/>
       </p:nvGrpSpPr>
-      <p:grpSpPr/>
+      <p:grpSpPr>
+        <a:xfrm>
+          <a:off x="0" y="0"/>
+          <a:ext cx="0" cy="0"/>
+          <a:chOff x="0" y="0"/>
+          <a:chExt cx="0" cy="0"/>
+        </a:xfrm>
+      </p:grpSpPr>
       <p:sp>
         <p:nvSpPr>
           <p:cNvPr id="2" name="TextBox 1"/>
@@ -4682,7 +4730,7 @@
           <a:noFill/>
         </p:spPr>
         <p:txBody>
-          <a:bodyPr wrap="square" lIns="0" rIns="0" tIns="0" bIns="0">
+          <a:bodyPr wrap="square" lIns="0" tIns="0" rIns="0" bIns="0">
             <a:spAutoFit/>
           </a:bodyPr>
           <a:lstStyle/>
@@ -4718,7 +4766,7 @@
           <a:noFill/>
         </p:spPr>
         <p:txBody>
-          <a:bodyPr wrap="square" lIns="0" rIns="0" tIns="0" bIns="0">
+          <a:bodyPr wrap="square" lIns="0" tIns="0" rIns="0" bIns="0">
             <a:spAutoFit/>
           </a:bodyPr>
           <a:lstStyle/>
@@ -4732,7 +4780,7 @@
               </a:defRPr>
             </a:pPr>
             <a:r>
-              <a:t>MTOW &amp; Mass Sizing</a:t>
+              <a:t>MTOW</a:t>
             </a:r>
           </a:p>
         </p:txBody>
@@ -4745,8 +4793,8 @@
         </p:nvSpPr>
         <p:spPr>
           <a:xfrm>
-            <a:off x="822960" y="1325880"/>
-            <a:ext cx="10545775" cy="1600200"/>
+            <a:off x="822960" y="1371600"/>
+            <a:ext cx="3413455" cy="3379076"/>
           </a:xfrm>
           <a:prstGeom prst="roundRect">
             <a:avLst/>
@@ -4779,6 +4827,7 @@
           <a:lstStyle/>
           <a:p>
             <a:pPr algn="ctr"/>
+            <a:endParaRPr/>
           </a:p>
         </p:txBody>
       </p:sp>
@@ -4790,8 +4839,8 @@
         </p:nvSpPr>
         <p:spPr>
           <a:xfrm>
-            <a:off x="1097280" y="1463040"/>
-            <a:ext cx="10058400" cy="1325880"/>
+            <a:off x="1143000" y="1737360"/>
+            <a:ext cx="2884123" cy="2339102"/>
           </a:xfrm>
           <a:prstGeom prst="rect">
             <a:avLst/>
@@ -4799,13 +4848,13 @@
           <a:noFill/>
         </p:spPr>
         <p:txBody>
-          <a:bodyPr wrap="square">
+          <a:bodyPr wrap="none">
             <a:spAutoFit/>
           </a:bodyPr>
           <a:lstStyle/>
           <a:p>
             <a:pPr>
-              <a:defRPr sz="1050" b="1">
+              <a:defRPr sz="1100" b="1">
                 <a:solidFill>
                   <a:srgbClr val="64748B"/>
                 </a:solidFill>
@@ -4813,15 +4862,16 @@
               </a:defRPr>
             </a:pPr>
             <a:r>
-              <a:t>TAKEOFF WEIGHT SIZING EQUATION (RAYMER METHOD)</a:t>
+              <a:rPr dirty="0"/>
+              <a:t>ASSUMPTION</a:t>
             </a:r>
           </a:p>
           <a:p>
             <a:pPr>
               <a:spcBef>
-                <a:spcPts val="300"/>
+                <a:spcPts val="800"/>
               </a:spcBef>
-              <a:defRPr sz="1700" b="1">
+              <a:defRPr sz="2600" b="1">
                 <a:solidFill>
                   <a:srgbClr val="0F172A"/>
                 </a:solidFill>
@@ -4829,15 +4879,34 @@
               </a:defRPr>
             </a:pPr>
             <a:r>
-              <a:t>W0 = ( W_payload + W_crew )  /  [ 1 − ( We / W0 ) − ( Wf / W0 ) ]</a:t>
-            </a:r>
+              <a:rPr dirty="0"/>
+              <a:t>Aircraft design </a:t>
+            </a:r>
+            <a:endParaRPr lang="en-US" dirty="0"/>
           </a:p>
           <a:p>
             <a:pPr>
               <a:spcBef>
-                <a:spcPts val="400"/>
+                <a:spcPts val="800"/>
               </a:spcBef>
-              <a:defRPr sz="1400" b="1">
+              <a:defRPr sz="2600" b="1">
+                <a:solidFill>
+                  <a:srgbClr val="0F172A"/>
+                </a:solidFill>
+                <a:latin typeface="Helvetica Neue"/>
+              </a:defRPr>
+            </a:pPr>
+            <a:r>
+              <a:rPr dirty="0"/>
+              <a:t>book</a:t>
+            </a:r>
+          </a:p>
+          <a:p>
+            <a:pPr>
+              <a:spcBef>
+                <a:spcPts val="600"/>
+              </a:spcBef>
+              <a:defRPr sz="1350" b="1">
                 <a:solidFill>
                   <a:srgbClr val="334155"/>
                 </a:solidFill>
@@ -4845,7 +4914,43 @@
               </a:defRPr>
             </a:pPr>
             <a:r>
-              <a:t>W0 = ( 53,750 kg + 1,260 kg )  /  [ 1 − 0.565 − 0.235 ]  =  55,010 kg / 0.200  =  275,460 kg  (~275.5 t)</a:t>
+              <a:rPr dirty="0"/>
+              <a:t>Raymer statistical empty weight </a:t>
+            </a:r>
+            <a:endParaRPr lang="en-US" dirty="0"/>
+          </a:p>
+          <a:p>
+            <a:pPr>
+              <a:spcBef>
+                <a:spcPts val="600"/>
+              </a:spcBef>
+              <a:defRPr sz="1350" b="1">
+                <a:solidFill>
+                  <a:srgbClr val="334155"/>
+                </a:solidFill>
+                <a:latin typeface="Helvetica Neue"/>
+              </a:defRPr>
+            </a:pPr>
+            <a:r>
+              <a:rPr dirty="0"/>
+              <a:t>buildup method</a:t>
+            </a:r>
+          </a:p>
+          <a:p>
+            <a:pPr>
+              <a:spcBef>
+                <a:spcPts val="2600"/>
+              </a:spcBef>
+              <a:defRPr sz="1100">
+                <a:solidFill>
+                  <a:srgbClr val="94A3B8"/>
+                </a:solidFill>
+                <a:latin typeface="Arial"/>
+              </a:defRPr>
+            </a:pPr>
+            <a:r>
+              <a:rPr dirty="0"/>
+              <a:t>Raymer Methodology</a:t>
             </a:r>
           </a:p>
         </p:txBody>
@@ -4858,8 +4963,8 @@
         </p:nvSpPr>
         <p:spPr>
           <a:xfrm>
-            <a:off x="822960" y="3108960"/>
-            <a:ext cx="2542032" cy="3017520"/>
+            <a:off x="4389120" y="1371600"/>
+            <a:ext cx="3413455" cy="3379076"/>
           </a:xfrm>
           <a:prstGeom prst="roundRect">
             <a:avLst/>
@@ -4892,6 +4997,7 @@
           <a:lstStyle/>
           <a:p>
             <a:pPr algn="ctr"/>
+            <a:endParaRPr/>
           </a:p>
         </p:txBody>
       </p:sp>
@@ -4903,8 +5009,8 @@
         </p:nvSpPr>
         <p:spPr>
           <a:xfrm>
-            <a:off x="1051560" y="3383280"/>
-            <a:ext cx="2103120" cy="2560320"/>
+            <a:off x="4709160" y="1737360"/>
+            <a:ext cx="2743200" cy="3840480"/>
           </a:xfrm>
           <a:prstGeom prst="rect">
             <a:avLst/>
@@ -4912,13 +5018,13 @@
           <a:noFill/>
         </p:spPr>
         <p:txBody>
-          <a:bodyPr wrap="square">
+          <a:bodyPr wrap="none">
             <a:spAutoFit/>
           </a:bodyPr>
           <a:lstStyle/>
           <a:p>
             <a:pPr>
-              <a:defRPr sz="1000" b="1">
+              <a:defRPr sz="1100" b="1">
                 <a:solidFill>
                   <a:srgbClr val="64748B"/>
                 </a:solidFill>
@@ -4926,39 +5032,7 @@
               </a:defRPr>
             </a:pPr>
             <a:r>
-              <a:t>EMPTY WEIGHT (We)</a:t>
-            </a:r>
-          </a:p>
-          <a:p>
-            <a:pPr>
-              <a:spcBef>
-                <a:spcPts val="400"/>
-              </a:spcBef>
-              <a:defRPr sz="2200" b="1">
-                <a:solidFill>
-                  <a:srgbClr val="0F172A"/>
-                </a:solidFill>
-                <a:latin typeface="Helvetica Neue"/>
-              </a:defRPr>
-            </a:pPr>
-            <a:r>
-              <a:t>155,600 kg</a:t>
-            </a:r>
-          </a:p>
-          <a:p>
-            <a:pPr>
-              <a:spcBef>
-                <a:spcPts val="200"/>
-              </a:spcBef>
-              <a:defRPr sz="1100" b="1">
-                <a:solidFill>
-                  <a:srgbClr val="334155"/>
-                </a:solidFill>
-                <a:latin typeface="Helvetica Neue"/>
-              </a:defRPr>
-            </a:pPr>
-            <a:r>
-              <a:t>We / W0 = 0.56 (56.5%)</a:t>
+              <a:t>EMPTY WEIGHT FRACTION</a:t>
             </a:r>
           </a:p>
           <a:p>
@@ -4966,19 +5040,47 @@
               <a:spcBef>
                 <a:spcPts val="800"/>
               </a:spcBef>
-              <a:defRPr sz="1000">
-                <a:solidFill>
-                  <a:srgbClr val="64748B"/>
+              <a:defRPr sz="3800" b="1">
+                <a:solidFill>
+                  <a:srgbClr val="0F172A"/>
+                </a:solidFill>
+                <a:latin typeface="Helvetica Neue"/>
+              </a:defRPr>
+            </a:pPr>
+            <a:r>
+              <a:t>0.56</a:t>
+            </a:r>
+          </a:p>
+          <a:p>
+            <a:pPr>
+              <a:spcBef>
+                <a:spcPts val="600"/>
+              </a:spcBef>
+              <a:defRPr sz="1350" b="1">
+                <a:solidFill>
+                  <a:srgbClr val="334155"/>
+                </a:solidFill>
+                <a:latin typeface="Helvetica Neue"/>
+              </a:defRPr>
+            </a:pPr>
+            <a:r>
+              <a:t>We / W0 = 155,600 / 275,460 kg</a:t>
+            </a:r>
+          </a:p>
+          <a:p>
+            <a:pPr>
+              <a:spcBef>
+                <a:spcPts val="2600"/>
+              </a:spcBef>
+              <a:defRPr sz="1100">
+                <a:solidFill>
+                  <a:srgbClr val="94A3B8"/>
                 </a:solidFill>
                 <a:latin typeface="Arial"/>
               </a:defRPr>
             </a:pPr>
             <a:r>
-              <a:t>Airframe: 120,200 kg (43.6%)</a:t>
-            </a:r>
-            <a:br/>
-            <a:r>
-              <a:t>Tanks: 35,400 kg (6 × 5,900 kg)</a:t>
+              <a:t>MTOW = 275,460 kg (~275.5 t)</a:t>
             </a:r>
           </a:p>
         </p:txBody>
@@ -4991,8 +5093,8 @@
         </p:nvSpPr>
         <p:spPr>
           <a:xfrm>
-            <a:off x="3493008" y="3108960"/>
-            <a:ext cx="2542032" cy="3017520"/>
+            <a:off x="7955279" y="1371600"/>
+            <a:ext cx="3413455" cy="3379076"/>
           </a:xfrm>
           <a:prstGeom prst="roundRect">
             <a:avLst/>
@@ -5025,6 +5127,7 @@
           <a:lstStyle/>
           <a:p>
             <a:pPr algn="ctr"/>
+            <a:endParaRPr/>
           </a:p>
         </p:txBody>
       </p:sp>
@@ -5036,8 +5139,8 @@
         </p:nvSpPr>
         <p:spPr>
           <a:xfrm>
-            <a:off x="3721608" y="3383280"/>
-            <a:ext cx="2103120" cy="2560320"/>
+            <a:off x="8275319" y="1737360"/>
+            <a:ext cx="2743200" cy="3840480"/>
           </a:xfrm>
           <a:prstGeom prst="rect">
             <a:avLst/>
@@ -5045,13 +5148,13 @@
           <a:noFill/>
         </p:spPr>
         <p:txBody>
-          <a:bodyPr wrap="square">
+          <a:bodyPr wrap="none">
             <a:spAutoFit/>
           </a:bodyPr>
           <a:lstStyle/>
           <a:p>
             <a:pPr>
-              <a:defRPr sz="1000" b="1">
+              <a:defRPr sz="1100" b="1">
                 <a:solidFill>
                   <a:srgbClr val="64748B"/>
                 </a:solidFill>
@@ -5059,39 +5162,7 @@
               </a:defRPr>
             </a:pPr>
             <a:r>
-              <a:t>DESIGN PAYLOAD</a:t>
-            </a:r>
-          </a:p>
-          <a:p>
-            <a:pPr>
-              <a:spcBef>
-                <a:spcPts val="400"/>
-              </a:spcBef>
-              <a:defRPr sz="2200" b="1">
-                <a:solidFill>
-                  <a:srgbClr val="0F172A"/>
-                </a:solidFill>
-                <a:latin typeface="Helvetica Neue"/>
-              </a:defRPr>
-            </a:pPr>
-            <a:r>
-              <a:t>53,750 kg</a:t>
-            </a:r>
-          </a:p>
-          <a:p>
-            <a:pPr>
-              <a:spcBef>
-                <a:spcPts val="200"/>
-              </a:spcBef>
-              <a:defRPr sz="1100" b="1">
-                <a:solidFill>
-                  <a:srgbClr val="334155"/>
-                </a:solidFill>
-                <a:latin typeface="Helvetica Neue"/>
-              </a:defRPr>
-            </a:pPr>
-            <a:r>
-              <a:t>19.5% of MTOW</a:t>
+              <a:t>TANK MASS</a:t>
             </a:r>
           </a:p>
           <a:p>
@@ -5099,321 +5170,47 @@
               <a:spcBef>
                 <a:spcPts val="800"/>
               </a:spcBef>
-              <a:defRPr sz="1000">
-                <a:solidFill>
-                  <a:srgbClr val="64748B"/>
-                </a:solidFill>
-                <a:latin typeface="Arial"/>
-              </a:defRPr>
-            </a:pPr>
-            <a:r>
-              <a:t>430 Pax @ 100 kg = 43,000 kg</a:t>
-            </a:r>
-            <a:br/>
-            <a:r>
-              <a:t>Containerized Cargo = 10,750 kg</a:t>
-            </a:r>
-          </a:p>
-        </p:txBody>
-      </p:sp>
-      <p:sp>
-        <p:nvSpPr>
-          <p:cNvPr id="10" name="Rounded Rectangle 9"/>
-          <p:cNvSpPr/>
-          <p:nvPr/>
-        </p:nvSpPr>
-        <p:spPr>
-          <a:xfrm>
-            <a:off x="6163056" y="3108960"/>
-            <a:ext cx="2542032" cy="3017520"/>
-          </a:xfrm>
-          <a:prstGeom prst="roundRect">
-            <a:avLst/>
-          </a:prstGeom>
-          <a:solidFill>
-            <a:srgbClr val="F8FAFC"/>
-          </a:solidFill>
-          <a:ln w="9525">
-            <a:solidFill>
-              <a:srgbClr val="E2E8F0"/>
-            </a:solidFill>
-          </a:ln>
-        </p:spPr>
-        <p:style>
-          <a:lnRef idx="1">
-            <a:schemeClr val="accent1"/>
-          </a:lnRef>
-          <a:fillRef idx="3">
-            <a:schemeClr val="accent1"/>
-          </a:fillRef>
-          <a:effectRef idx="2">
-            <a:schemeClr val="accent1"/>
-          </a:effectRef>
-          <a:fontRef idx="minor">
-            <a:schemeClr val="lt1"/>
-          </a:fontRef>
-        </p:style>
-        <p:txBody>
-          <a:bodyPr rtlCol="0" anchor="ctr"/>
-          <a:lstStyle/>
-          <a:p>
-            <a:pPr algn="ctr"/>
-          </a:p>
-        </p:txBody>
-      </p:sp>
-      <p:sp>
-        <p:nvSpPr>
-          <p:cNvPr id="11" name="TextBox 10"/>
-          <p:cNvSpPr txBox="1"/>
-          <p:nvPr/>
-        </p:nvSpPr>
-        <p:spPr>
-          <a:xfrm>
-            <a:off x="6391656" y="3383280"/>
-            <a:ext cx="2103120" cy="2560320"/>
-          </a:xfrm>
-          <a:prstGeom prst="rect">
-            <a:avLst/>
-          </a:prstGeom>
-          <a:noFill/>
-        </p:spPr>
-        <p:txBody>
-          <a:bodyPr wrap="square">
-            <a:spAutoFit/>
-          </a:bodyPr>
-          <a:lstStyle/>
-          <a:p>
-            <a:pPr>
-              <a:defRPr sz="1000" b="1">
-                <a:solidFill>
-                  <a:srgbClr val="64748B"/>
-                </a:solidFill>
-                <a:latin typeface="Arial"/>
-              </a:defRPr>
-            </a:pPr>
-            <a:r>
-              <a:t>MISSION LH2 FUEL</a:t>
+              <a:defRPr sz="3800" b="1">
+                <a:solidFill>
+                  <a:srgbClr val="0F172A"/>
+                </a:solidFill>
+                <a:latin typeface="Helvetica Neue"/>
+              </a:defRPr>
+            </a:pPr>
+            <a:r>
+              <a:t>35,400 kg</a:t>
             </a:r>
           </a:p>
           <a:p>
             <a:pPr>
               <a:spcBef>
-                <a:spcPts val="400"/>
+                <a:spcPts val="600"/>
               </a:spcBef>
-              <a:defRPr sz="2200" b="1">
-                <a:solidFill>
-                  <a:srgbClr val="0F172A"/>
+              <a:defRPr sz="1350" b="1">
+                <a:solidFill>
+                  <a:srgbClr val="334155"/>
                 </a:solidFill>
                 <a:latin typeface="Helvetica Neue"/>
               </a:defRPr>
             </a:pPr>
             <a:r>
-              <a:t>64,850 kg</a:t>
+              <a:t>6 tanks × 5,900 kg</a:t>
             </a:r>
           </a:p>
           <a:p>
             <a:pPr>
               <a:spcBef>
-                <a:spcPts val="200"/>
+                <a:spcPts val="2600"/>
               </a:spcBef>
-              <a:defRPr sz="1100" b="1">
-                <a:solidFill>
-                  <a:srgbClr val="334155"/>
-                </a:solidFill>
-                <a:latin typeface="Helvetica Neue"/>
-              </a:defRPr>
-            </a:pPr>
-            <a:r>
-              <a:t>Wf / W0 = 0.235 (23.5%)</a:t>
-            </a:r>
-          </a:p>
-          <a:p>
-            <a:pPr>
-              <a:spcBef>
-                <a:spcPts val="800"/>
-              </a:spcBef>
-              <a:defRPr sz="1000">
-                <a:solidFill>
-                  <a:srgbClr val="64748B"/>
+              <a:defRPr sz="1100">
+                <a:solidFill>
+                  <a:srgbClr val="94A3B8"/>
                 </a:solidFill>
                 <a:latin typeface="Arial"/>
               </a:defRPr>
             </a:pPr>
             <a:r>
-              <a:t>Breguet cruise (12,500 km)</a:t>
-            </a:r>
-            <a:br/>
-            <a:r>
-              <a:t>200 nm diversion + 30 min loiter</a:t>
-            </a:r>
-          </a:p>
-        </p:txBody>
-      </p:sp>
-      <p:sp>
-        <p:nvSpPr>
-          <p:cNvPr id="12" name="Rounded Rectangle 11"/>
-          <p:cNvSpPr/>
-          <p:nvPr/>
-        </p:nvSpPr>
-        <p:spPr>
-          <a:xfrm>
-            <a:off x="8833104" y="3108960"/>
-            <a:ext cx="2542032" cy="3017520"/>
-          </a:xfrm>
-          <a:prstGeom prst="roundRect">
-            <a:avLst/>
-          </a:prstGeom>
-          <a:solidFill>
-            <a:srgbClr val="F8FAFC"/>
-          </a:solidFill>
-          <a:ln w="9525">
-            <a:solidFill>
-              <a:srgbClr val="E2E8F0"/>
-            </a:solidFill>
-          </a:ln>
-        </p:spPr>
-        <p:style>
-          <a:lnRef idx="1">
-            <a:schemeClr val="accent1"/>
-          </a:lnRef>
-          <a:fillRef idx="3">
-            <a:schemeClr val="accent1"/>
-          </a:fillRef>
-          <a:effectRef idx="2">
-            <a:schemeClr val="accent1"/>
-          </a:effectRef>
-          <a:fontRef idx="minor">
-            <a:schemeClr val="lt1"/>
-          </a:fontRef>
-        </p:style>
-        <p:txBody>
-          <a:bodyPr rtlCol="0" anchor="ctr"/>
-          <a:lstStyle/>
-          <a:p>
-            <a:pPr algn="ctr"/>
-          </a:p>
-        </p:txBody>
-      </p:sp>
-      <p:sp>
-        <p:nvSpPr>
-          <p:cNvPr id="13" name="TextBox 12"/>
-          <p:cNvSpPr txBox="1"/>
-          <p:nvPr/>
-        </p:nvSpPr>
-        <p:spPr>
-          <a:xfrm>
-            <a:off x="9061704" y="3383280"/>
-            <a:ext cx="2103120" cy="2560320"/>
-          </a:xfrm>
-          <a:prstGeom prst="rect">
-            <a:avLst/>
-          </a:prstGeom>
-          <a:noFill/>
-        </p:spPr>
-        <p:txBody>
-          <a:bodyPr wrap="square">
-            <a:spAutoFit/>
-          </a:bodyPr>
-          <a:lstStyle/>
-          <a:p>
-            <a:pPr>
-              <a:defRPr sz="1000" b="1">
-                <a:solidFill>
-                  <a:srgbClr val="64748B"/>
-                </a:solidFill>
-                <a:latin typeface="Arial"/>
-              </a:defRPr>
-            </a:pPr>
-            <a:r>
-              <a:t>FLIGHT CREW</a:t>
-            </a:r>
-          </a:p>
-          <a:p>
-            <a:pPr>
-              <a:spcBef>
-                <a:spcPts val="400"/>
-              </a:spcBef>
-              <a:defRPr sz="2200" b="1">
-                <a:solidFill>
-                  <a:srgbClr val="0F172A"/>
-                </a:solidFill>
-                <a:latin typeface="Helvetica Neue"/>
-              </a:defRPr>
-            </a:pPr>
-            <a:r>
-              <a:t>1,260 kg</a:t>
-            </a:r>
-          </a:p>
-          <a:p>
-            <a:pPr>
-              <a:spcBef>
-                <a:spcPts val="200"/>
-              </a:spcBef>
-              <a:defRPr sz="1100" b="1">
-                <a:solidFill>
-                  <a:srgbClr val="334155"/>
-                </a:solidFill>
-                <a:latin typeface="Helvetica Neue"/>
-              </a:defRPr>
-            </a:pPr>
-            <a:r>
-              <a:t>0.5% of MTOW</a:t>
-            </a:r>
-          </a:p>
-          <a:p>
-            <a:pPr>
-              <a:spcBef>
-                <a:spcPts val="800"/>
-              </a:spcBef>
-              <a:defRPr sz="1000">
-                <a:solidFill>
-                  <a:srgbClr val="64748B"/>
-                </a:solidFill>
-                <a:latin typeface="Arial"/>
-              </a:defRPr>
-            </a:pPr>
-            <a:r>
-              <a:t>2 Flight Deck Pilots</a:t>
-            </a:r>
-            <a:br/>
-            <a:r>
-              <a:t>10 Cabin Crew Attendants</a:t>
-            </a:r>
-          </a:p>
-        </p:txBody>
-      </p:sp>
-      <p:sp>
-        <p:nvSpPr>
-          <p:cNvPr id="14" name="TextBox 13"/>
-          <p:cNvSpPr txBox="1"/>
-          <p:nvPr/>
-        </p:nvSpPr>
-        <p:spPr>
-          <a:xfrm>
-            <a:off x="822960" y="6263640"/>
-            <a:ext cx="10545775" cy="320040"/>
-          </a:xfrm>
-          <a:prstGeom prst="rect">
-            <a:avLst/>
-          </a:prstGeom>
-          <a:noFill/>
-        </p:spPr>
-        <p:txBody>
-          <a:bodyPr wrap="none">
-            <a:spAutoFit/>
-          </a:bodyPr>
-          <a:lstStyle/>
-          <a:p>
-            <a:pPr algn="ctr">
-              <a:defRPr sz="1050">
-                <a:solidFill>
-                  <a:srgbClr val="64748B"/>
-                </a:solidFill>
-                <a:latin typeface="Arial"/>
-              </a:defRPr>
-            </a:pPr>
-            <a:r>
-              <a:t>Cryotank Gravimetric Index Gi = 0.50 (M_tank = M_fuel)  •  Raymer Statistical Empty Weight Sizing</a:t>
+              <a:t>Gravimetric index Gi = 0.50</a:t>
             </a:r>
           </a:p>
         </p:txBody>
@@ -5427,7 +5224,7 @@
 </file>
 
 <file path=ppt/slides/slide7.xml><?xml version="1.0" encoding="utf-8"?>
-<p:sld xmlns:a="http://schemas.openxmlformats.org/drawingml/2006/main" xmlns:p="http://schemas.openxmlformats.org/presentationml/2006/main" xmlns:r="http://schemas.openxmlformats.org/officeDocument/2006/relationships">
+<p:sld xmlns:a="http://schemas.openxmlformats.org/drawingml/2006/main" xmlns:r="http://schemas.openxmlformats.org/officeDocument/2006/relationships" xmlns:p="http://schemas.openxmlformats.org/presentationml/2006/main">
   <p:cSld>
     <p:bg>
       <p:bgPr>
@@ -5443,7 +5240,14 @@
         <p:cNvGrpSpPr/>
         <p:nvPr/>
       </p:nvGrpSpPr>
-      <p:grpSpPr/>
+      <p:grpSpPr>
+        <a:xfrm>
+          <a:off x="0" y="0"/>
+          <a:ext cx="0" cy="0"/>
+          <a:chOff x="0" y="0"/>
+          <a:chExt cx="0" cy="0"/>
+        </a:xfrm>
+      </p:grpSpPr>
       <p:sp>
         <p:nvSpPr>
           <p:cNvPr id="2" name="TextBox 1"/>
@@ -5461,7 +5265,7 @@
           <a:noFill/>
         </p:spPr>
         <p:txBody>
-          <a:bodyPr wrap="square" lIns="0" rIns="0" tIns="0" bIns="0">
+          <a:bodyPr wrap="square" lIns="0" tIns="0" rIns="0" bIns="0">
             <a:spAutoFit/>
           </a:bodyPr>
           <a:lstStyle/>
@@ -5497,7 +5301,7 @@
           <a:noFill/>
         </p:spPr>
         <p:txBody>
-          <a:bodyPr wrap="square" lIns="0" rIns="0" tIns="0" bIns="0">
+          <a:bodyPr wrap="square" lIns="0" tIns="0" rIns="0" bIns="0">
             <a:spAutoFit/>
           </a:bodyPr>
           <a:lstStyle/>
@@ -5621,7 +5425,7 @@
 </file>
 
 <file path=ppt/slides/slide8.xml><?xml version="1.0" encoding="utf-8"?>
-<p:sld xmlns:a="http://schemas.openxmlformats.org/drawingml/2006/main" xmlns:p="http://schemas.openxmlformats.org/presentationml/2006/main" xmlns:r="http://schemas.openxmlformats.org/officeDocument/2006/relationships">
+<p:sld xmlns:a="http://schemas.openxmlformats.org/drawingml/2006/main" xmlns:r="http://schemas.openxmlformats.org/officeDocument/2006/relationships" xmlns:p="http://schemas.openxmlformats.org/presentationml/2006/main">
   <p:cSld>
     <p:bg>
       <p:bgPr>
@@ -5637,7 +5441,14 @@
         <p:cNvGrpSpPr/>
         <p:nvPr/>
       </p:nvGrpSpPr>
-      <p:grpSpPr/>
+      <p:grpSpPr>
+        <a:xfrm>
+          <a:off x="0" y="0"/>
+          <a:ext cx="0" cy="0"/>
+          <a:chOff x="0" y="0"/>
+          <a:chExt cx="0" cy="0"/>
+        </a:xfrm>
+      </p:grpSpPr>
       <p:sp>
         <p:nvSpPr>
           <p:cNvPr id="2" name="TextBox 1"/>
@@ -5655,7 +5466,7 @@
           <a:noFill/>
         </p:spPr>
         <p:txBody>
-          <a:bodyPr wrap="square" lIns="0" rIns="0" tIns="0" bIns="0">
+          <a:bodyPr wrap="square" lIns="0" tIns="0" rIns="0" bIns="0">
             <a:spAutoFit/>
           </a:bodyPr>
           <a:lstStyle/>
@@ -5691,7 +5502,7 @@
           <a:noFill/>
         </p:spPr>
         <p:txBody>
-          <a:bodyPr wrap="square" lIns="0" rIns="0" tIns="0" bIns="0">
+          <a:bodyPr wrap="square" lIns="0" tIns="0" rIns="0" bIns="0">
             <a:spAutoFit/>
           </a:bodyPr>
           <a:lstStyle/>
@@ -5752,6 +5563,7 @@
           <a:lstStyle/>
           <a:p>
             <a:pPr algn="ctr"/>
+            <a:endParaRPr/>
           </a:p>
         </p:txBody>
       </p:sp>
@@ -5865,6 +5677,7 @@
           <a:lstStyle/>
           <a:p>
             <a:pPr algn="ctr"/>
+            <a:endParaRPr/>
           </a:p>
         </p:txBody>
       </p:sp>
